--- a/docs/presentation.pptx
+++ b/docs/presentation.pptx
@@ -14,10 +14,9 @@
     <p:sldId id="262" r:id="rId8"/>
     <p:sldId id="263" r:id="rId9"/>
     <p:sldId id="264" r:id="rId10"/>
-    <p:sldId id="265" r:id="rId11"/>
   </p:sldIdLst>
   <p:notesMasterIdLst>
-    <p:notesMasterId r:id="rId12"/>
+    <p:notesMasterId r:id="rId11"/>
   </p:notesMasterIdLst>
   <p:sldSz cx="12192000" cy="6858000"/>
   <p:notesSz cx="6858000" cy="12192000"/>
@@ -553,94 +552,6 @@
 </p:notes>
 </file>
 
-<file path=ppt/notesSlides/notesSlide10.xml><?xml version="1.0" encoding="utf-8"?>
-<p:notes xmlns:a="http://schemas.openxmlformats.org/drawingml/2006/main" xmlns:r="http://schemas.openxmlformats.org/officeDocument/2006/relationships" xmlns:p="http://schemas.openxmlformats.org/presentationml/2006/main">
-  <p:cSld>
-    <p:spTree>
-      <p:nvGrpSpPr>
-        <p:cNvPr id="1" name=""/>
-        <p:cNvGrpSpPr/>
-        <p:nvPr/>
-      </p:nvGrpSpPr>
-      <p:grpSpPr>
-        <a:xfrm>
-          <a:off x="0" y="0"/>
-          <a:ext cx="0" cy="0"/>
-          <a:chOff x="0" y="0"/>
-          <a:chExt cx="0" cy="0"/>
-        </a:xfrm>
-      </p:grpSpPr>
-      <p:sp>
-        <p:nvSpPr>
-          <p:cNvPr id="2" name="Slide Image Placeholder 1"/>
-          <p:cNvSpPr>
-            <a:spLocks noGrp="1" noRot="1" noChangeAspect="1"/>
-          </p:cNvSpPr>
-          <p:nvPr>
-            <p:ph type="sldImg"/>
-          </p:nvPr>
-        </p:nvSpPr>
-        <p:spPr/>
-      </p:sp>
-      <p:sp>
-        <p:nvSpPr>
-          <p:cNvPr id="3" name="Notes Placeholder 2"/>
-          <p:cNvSpPr>
-            <a:spLocks noGrp="1"/>
-          </p:cNvSpPr>
-          <p:nvPr>
-            <p:ph type="body" idx="1"/>
-          </p:nvPr>
-        </p:nvSpPr>
-        <p:spPr/>
-        <p:txBody>
-          <a:bodyPr/>
-          <a:lstStyle/>
-          <a:p>
-            <a:r>
-              <a:rPr lang="en-US" dirty="0"/>
-              <a:t>価値は3つ: スピード、判断基準の資産化、社長の時間。次のアクションはヒアリング日程の確定から。</a:t>
-            </a:r>
-            <a:endParaRPr lang="en-US" dirty="0"/>
-          </a:p>
-        </p:txBody>
-      </p:sp>
-      <p:sp>
-        <p:nvSpPr>
-          <p:cNvPr id="4" name="Slide Number Placeholder 3"/>
-          <p:cNvSpPr>
-            <a:spLocks noGrp="1"/>
-          </p:cNvSpPr>
-          <p:nvPr>
-            <p:ph type="sldNum" sz="quarter" idx="10"/>
-          </p:nvPr>
-        </p:nvSpPr>
-        <p:spPr/>
-        <p:txBody>
-          <a:bodyPr/>
-          <a:lstStyle/>
-          <a:p>
-            <a:fld id="{F7021451-1387-4CA6-816F-3879F97B5CBC}" type="slidenum">
-              <a:rPr lang="en-US"/>
-              <a:t>10</a:t>
-            </a:fld>
-            <a:endParaRPr lang="en-US"/>
-          </a:p>
-        </p:txBody>
-      </p:sp>
-    </p:spTree>
-    <p:extLst>
-      <p:ext uri="{BB962C8B-B14F-4D97-AF65-F5344CB8AC3E}">
-        <p14:creationId xmlns:p14="http://schemas.microsoft.com/office/powerpoint/2010/main" val="1024086991"/>
-      </p:ext>
-    </p:extLst>
-  </p:cSld>
-  <p:clrMapOvr>
-    <a:masterClrMapping/>
-  </p:clrMapOvr>
-</p:notes>
-</file>
-
 <file path=ppt/notesSlides/notesSlide2.xml><?xml version="1.0" encoding="utf-8"?>
 <p:notes xmlns:a="http://schemas.openxmlformats.org/drawingml/2006/main" xmlns:r="http://schemas.openxmlformats.org/officeDocument/2006/relationships" xmlns:p="http://schemas.openxmlformats.org/presentationml/2006/main">
   <p:cSld>
@@ -1127,7 +1038,7 @@
           <a:p>
             <a:r>
               <a:rPr lang="en-US" dirty="0"/>
-              <a:t>三木谷氏の公開哲学（スピード・仮説検証・経済圏など）でペルソナを作り、全経路を実測。自社では社長のヒアリングシートで置き換える。</a:t>
+              <a:t>セキュリティ4点: ローカル+会社Notion、採用PIIの非保存、Vertex AI移行、会社アカウント統一。</a:t>
             </a:r>
             <a:endParaRPr lang="en-US" dirty="0"/>
           </a:p>
@@ -1215,7 +1126,7 @@
           <a:p>
             <a:r>
               <a:rPr lang="en-US" dirty="0"/>
-              <a:t>セキュリティ4点: ローカル+会社Notion、採用PIIの非保存、Vertex AI移行、会社アカウント統一。</a:t>
+              <a:t>導入は1日。前日ヒアリング→午前セットアップ→午後実データ一周→週内に自動化と本格移行。準備物はすべて作成済み。</a:t>
             </a:r>
             <a:endParaRPr lang="en-US" dirty="0"/>
           </a:p>
@@ -1303,7 +1214,7 @@
           <a:p>
             <a:r>
               <a:rPr lang="en-US" dirty="0"/>
-              <a:t>導入は1日。前日ヒアリング→午前セットアップ→午後実データ一周→週内に自動化と本格移行。準備物はすべて作成済み。</a:t>
+              <a:t>価値は3つ: スピード、判断基準の資産化、社長の時間。次のアクションはヒアリング日程の確定から。</a:t>
             </a:r>
             <a:endParaRPr lang="en-US" dirty="0"/>
           </a:p>
@@ -1924,582 +1835,6 @@
 </p:sld>
 </file>
 
-<file path=ppt/slides/slide10.xml><?xml version="1.0" encoding="utf-8"?>
-<p:sld xmlns:a="http://schemas.openxmlformats.org/drawingml/2006/main" xmlns:r="http://schemas.openxmlformats.org/officeDocument/2006/relationships" xmlns:p="http://schemas.openxmlformats.org/presentationml/2006/main">
-  <p:cSld name="Slide 10">
-    <p:bg>
-      <p:bgPr>
-        <a:solidFill>
-          <a:srgbClr val="1E2761"/>
-        </a:solidFill>
-      </p:bgPr>
-    </p:bg>
-    <p:spTree>
-      <p:nvGrpSpPr>
-        <p:cNvPr id="1" name=""/>
-        <p:cNvGrpSpPr/>
-        <p:nvPr/>
-      </p:nvGrpSpPr>
-      <p:grpSpPr>
-        <a:xfrm>
-          <a:off x="0" y="0"/>
-          <a:ext cx="0" cy="0"/>
-          <a:chOff x="0" y="0"/>
-          <a:chExt cx="0" cy="0"/>
-        </a:xfrm>
-      </p:grpSpPr>
-      <p:sp>
-        <p:nvSpPr>
-          <p:cNvPr id="2" name="Shape 0"/>
-          <p:cNvSpPr/>
-          <p:nvPr/>
-        </p:nvSpPr>
-        <p:spPr>
-          <a:xfrm>
-            <a:off x="10241280" y="4480560"/>
-            <a:ext cx="3291840" cy="3291840"/>
-          </a:xfrm>
-          <a:prstGeom prst="ellipse">
-            <a:avLst/>
-          </a:prstGeom>
-          <a:solidFill>
-            <a:srgbClr val="2A3575"/>
-          </a:solidFill>
-          <a:ln/>
-        </p:spPr>
-      </p:sp>
-      <p:sp>
-        <p:nvSpPr>
-          <p:cNvPr id="3" name="Text 1"/>
-          <p:cNvSpPr/>
-          <p:nvPr/>
-        </p:nvSpPr>
-        <p:spPr>
-          <a:xfrm>
-            <a:off x="822960" y="777240"/>
-            <a:ext cx="10515600" cy="914400"/>
-          </a:xfrm>
-          <a:prstGeom prst="rect">
-            <a:avLst/>
-          </a:prstGeom>
-          <a:noFill/>
-          <a:ln/>
-        </p:spPr>
-        <p:txBody>
-          <a:bodyPr wrap="square" lIns="0" tIns="0" rIns="0" bIns="0" rtlCol="0" anchor="ctr"/>
-          <a:lstStyle/>
-          <a:p>
-            <a:pPr indent="0" marL="0">
-              <a:buNone/>
-            </a:pPr>
-            <a:r>
-              <a:rPr lang="en-US" sz="4400" b="1" dirty="0">
-                <a:solidFill>
-                  <a:srgbClr val="FFFFFF"/>
-                </a:solidFill>
-                <a:latin typeface="Meiryo" pitchFamily="34" charset="0"/>
-                <a:ea typeface="Meiryo" pitchFamily="34" charset="-122"/>
-                <a:cs typeface="Meiryo" pitchFamily="34" charset="-120"/>
-              </a:rPr>
-              <a:t>待たない現場へ。</a:t>
-            </a:r>
-            <a:endParaRPr lang="en-US" sz="4400" dirty="0"/>
-          </a:p>
-        </p:txBody>
-      </p:sp>
-      <p:sp>
-        <p:nvSpPr>
-          <p:cNvPr id="4" name="Shape 2"/>
-          <p:cNvSpPr/>
-          <p:nvPr/>
-        </p:nvSpPr>
-        <p:spPr>
-          <a:xfrm>
-            <a:off x="822960" y="2011680"/>
-            <a:ext cx="3383280" cy="2651760"/>
-          </a:xfrm>
-          <a:prstGeom prst="roundRect">
-            <a:avLst>
-              <a:gd name="adj" fmla="val 4138"/>
-            </a:avLst>
-          </a:prstGeom>
-          <a:solidFill>
-            <a:srgbClr val="2A3575"/>
-          </a:solidFill>
-          <a:ln/>
-        </p:spPr>
-      </p:sp>
-      <p:sp>
-        <p:nvSpPr>
-          <p:cNvPr id="5" name="Shape 3"/>
-          <p:cNvSpPr/>
-          <p:nvPr/>
-        </p:nvSpPr>
-        <p:spPr>
-          <a:xfrm>
-            <a:off x="1143000" y="2331720"/>
-            <a:ext cx="685800" cy="685800"/>
-          </a:xfrm>
-          <a:prstGeom prst="ellipse">
-            <a:avLst/>
-          </a:prstGeom>
-          <a:solidFill>
-            <a:srgbClr val="CADCFC"/>
-          </a:solidFill>
-          <a:ln/>
-        </p:spPr>
-      </p:sp>
-      <p:pic>
-        <p:nvPicPr>
-          <p:cNvPr id="6" name="Image 0" descr="preencoded.png">    </p:cNvPr>
-          <p:cNvPicPr>
-            <a:picLocks noChangeAspect="1"/>
-          </p:cNvPicPr>
-          <p:nvPr/>
-        </p:nvPicPr>
-        <p:blipFill>
-          <a:blip r:embed="rId1"/>
-          <a:stretch>
-            <a:fillRect/>
-          </a:stretch>
-        </p:blipFill>
-        <p:spPr>
-          <a:xfrm>
-            <a:off x="1314450" y="2503170"/>
-            <a:ext cx="342900" cy="342900"/>
-          </a:xfrm>
-          <a:prstGeom prst="rect">
-            <a:avLst/>
-          </a:prstGeom>
-        </p:spPr>
-      </p:pic>
-      <p:sp>
-        <p:nvSpPr>
-          <p:cNvPr id="7" name="Text 4"/>
-          <p:cNvSpPr/>
-          <p:nvPr/>
-        </p:nvSpPr>
-        <p:spPr>
-          <a:xfrm>
-            <a:off x="1143000" y="3200400"/>
-            <a:ext cx="2743200" cy="685800"/>
-          </a:xfrm>
-          <a:prstGeom prst="rect">
-            <a:avLst/>
-          </a:prstGeom>
-          <a:noFill/>
-          <a:ln/>
-        </p:spPr>
-        <p:txBody>
-          <a:bodyPr wrap="square" lIns="0" tIns="0" rIns="0" bIns="0" rtlCol="0" anchor="ctr"/>
-          <a:lstStyle/>
-          <a:p>
-            <a:pPr indent="0" marL="0">
-              <a:buNone/>
-            </a:pPr>
-            <a:r>
-              <a:rPr lang="en-US" sz="1700" b="1" dirty="0">
-                <a:solidFill>
-                  <a:srgbClr val="FFFFFF"/>
-                </a:solidFill>
-                <a:latin typeface="Meiryo" pitchFamily="34" charset="0"/>
-                <a:ea typeface="Meiryo" pitchFamily="34" charset="-122"/>
-                <a:cs typeface="Meiryo" pitchFamily="34" charset="-120"/>
-              </a:rPr>
-              <a:t>意思決定が速くなる</a:t>
-            </a:r>
-            <a:endParaRPr lang="en-US" sz="1700" dirty="0"/>
-          </a:p>
-        </p:txBody>
-      </p:sp>
-      <p:sp>
-        <p:nvSpPr>
-          <p:cNvPr id="8" name="Text 5"/>
-          <p:cNvSpPr/>
-          <p:nvPr/>
-        </p:nvSpPr>
-        <p:spPr>
-          <a:xfrm>
-            <a:off x="1143000" y="3794760"/>
-            <a:ext cx="2743200" cy="777240"/>
-          </a:xfrm>
-          <a:prstGeom prst="rect">
-            <a:avLst/>
-          </a:prstGeom>
-          <a:noFill/>
-          <a:ln/>
-        </p:spPr>
-        <p:txBody>
-          <a:bodyPr wrap="square" lIns="0" tIns="0" rIns="0" bIns="0" rtlCol="0" anchor="ctr"/>
-          <a:lstStyle/>
-          <a:p>
-            <a:pPr indent="0" marL="0">
-              <a:buNone/>
-            </a:pPr>
-            <a:r>
-              <a:rPr lang="en-US" sz="1150" dirty="0">
-                <a:solidFill>
-                  <a:srgbClr val="CADCFC"/>
-                </a:solidFill>
-                <a:latin typeface="Meiryo" pitchFamily="34" charset="0"/>
-                <a:ea typeface="Meiryo" pitchFamily="34" charset="-122"/>
-                <a:cs typeface="Meiryo" pitchFamily="34" charset="-120"/>
-              </a:rPr>
-              <a:t>営業は商談の場で即断。社長確認は本当に必要なものだけに。</a:t>
-            </a:r>
-            <a:endParaRPr lang="en-US" sz="1150" dirty="0"/>
-          </a:p>
-        </p:txBody>
-      </p:sp>
-      <p:sp>
-        <p:nvSpPr>
-          <p:cNvPr id="9" name="Shape 6"/>
-          <p:cNvSpPr/>
-          <p:nvPr/>
-        </p:nvSpPr>
-        <p:spPr>
-          <a:xfrm>
-            <a:off x="4480560" y="2011680"/>
-            <a:ext cx="3383280" cy="2651760"/>
-          </a:xfrm>
-          <a:prstGeom prst="roundRect">
-            <a:avLst>
-              <a:gd name="adj" fmla="val 4138"/>
-            </a:avLst>
-          </a:prstGeom>
-          <a:solidFill>
-            <a:srgbClr val="2A3575"/>
-          </a:solidFill>
-          <a:ln/>
-        </p:spPr>
-      </p:sp>
-      <p:sp>
-        <p:nvSpPr>
-          <p:cNvPr id="10" name="Shape 7"/>
-          <p:cNvSpPr/>
-          <p:nvPr/>
-        </p:nvSpPr>
-        <p:spPr>
-          <a:xfrm>
-            <a:off x="4800600" y="2331720"/>
-            <a:ext cx="685800" cy="685800"/>
-          </a:xfrm>
-          <a:prstGeom prst="ellipse">
-            <a:avLst/>
-          </a:prstGeom>
-          <a:solidFill>
-            <a:srgbClr val="CADCFC"/>
-          </a:solidFill>
-          <a:ln/>
-        </p:spPr>
-      </p:sp>
-      <p:pic>
-        <p:nvPicPr>
-          <p:cNvPr id="11" name="Image 1" descr="preencoded.png">    </p:cNvPr>
-          <p:cNvPicPr>
-            <a:picLocks noChangeAspect="1"/>
-          </p:cNvPicPr>
-          <p:nvPr/>
-        </p:nvPicPr>
-        <p:blipFill>
-          <a:blip r:embed="rId2"/>
-          <a:stretch>
-            <a:fillRect/>
-          </a:stretch>
-        </p:blipFill>
-        <p:spPr>
-          <a:xfrm>
-            <a:off x="4972050" y="2503170"/>
-            <a:ext cx="342900" cy="342900"/>
-          </a:xfrm>
-          <a:prstGeom prst="rect">
-            <a:avLst/>
-          </a:prstGeom>
-        </p:spPr>
-      </p:pic>
-      <p:sp>
-        <p:nvSpPr>
-          <p:cNvPr id="12" name="Text 8"/>
-          <p:cNvSpPr/>
-          <p:nvPr/>
-        </p:nvSpPr>
-        <p:spPr>
-          <a:xfrm>
-            <a:off x="4800600" y="3200400"/>
-            <a:ext cx="2743200" cy="685800"/>
-          </a:xfrm>
-          <a:prstGeom prst="rect">
-            <a:avLst/>
-          </a:prstGeom>
-          <a:noFill/>
-          <a:ln/>
-        </p:spPr>
-        <p:txBody>
-          <a:bodyPr wrap="square" lIns="0" tIns="0" rIns="0" bIns="0" rtlCol="0" anchor="ctr"/>
-          <a:lstStyle/>
-          <a:p>
-            <a:pPr indent="0" marL="0">
-              <a:buNone/>
-            </a:pPr>
-            <a:r>
-              <a:rPr lang="en-US" sz="1700" b="1" dirty="0">
-                <a:solidFill>
-                  <a:srgbClr val="FFFFFF"/>
-                </a:solidFill>
-                <a:latin typeface="Meiryo" pitchFamily="34" charset="0"/>
-                <a:ea typeface="Meiryo" pitchFamily="34" charset="-122"/>
-                <a:cs typeface="Meiryo" pitchFamily="34" charset="-120"/>
-              </a:rPr>
-              <a:t>判断基準が資産になる</a:t>
-            </a:r>
-            <a:endParaRPr lang="en-US" sz="1700" dirty="0"/>
-          </a:p>
-        </p:txBody>
-      </p:sp>
-      <p:sp>
-        <p:nvSpPr>
-          <p:cNvPr id="13" name="Text 9"/>
-          <p:cNvSpPr/>
-          <p:nvPr/>
-        </p:nvSpPr>
-        <p:spPr>
-          <a:xfrm>
-            <a:off x="4800600" y="3794760"/>
-            <a:ext cx="2743200" cy="777240"/>
-          </a:xfrm>
-          <a:prstGeom prst="rect">
-            <a:avLst/>
-          </a:prstGeom>
-          <a:noFill/>
-          <a:ln/>
-        </p:spPr>
-        <p:txBody>
-          <a:bodyPr wrap="square" lIns="0" tIns="0" rIns="0" bIns="0" rtlCol="0" anchor="ctr"/>
-          <a:lstStyle/>
-          <a:p>
-            <a:pPr indent="0" marL="0">
-              <a:buNone/>
-            </a:pPr>
-            <a:r>
-              <a:rPr lang="en-US" sz="1150" dirty="0">
-                <a:solidFill>
-                  <a:srgbClr val="CADCFC"/>
-                </a:solidFill>
-                <a:latin typeface="Meiryo" pitchFamily="34" charset="0"/>
-                <a:ea typeface="Meiryo" pitchFamily="34" charset="-122"/>
-                <a:cs typeface="Meiryo" pitchFamily="34" charset="-120"/>
-              </a:rPr>
-              <a:t>社長の思考・因果関係がNotionに蓄積され、会社の共有財産に。</a:t>
-            </a:r>
-            <a:endParaRPr lang="en-US" sz="1150" dirty="0"/>
-          </a:p>
-        </p:txBody>
-      </p:sp>
-      <p:sp>
-        <p:nvSpPr>
-          <p:cNvPr id="14" name="Shape 10"/>
-          <p:cNvSpPr/>
-          <p:nvPr/>
-        </p:nvSpPr>
-        <p:spPr>
-          <a:xfrm>
-            <a:off x="8138160" y="2011680"/>
-            <a:ext cx="3383280" cy="2651760"/>
-          </a:xfrm>
-          <a:prstGeom prst="roundRect">
-            <a:avLst>
-              <a:gd name="adj" fmla="val 4138"/>
-            </a:avLst>
-          </a:prstGeom>
-          <a:solidFill>
-            <a:srgbClr val="2A3575"/>
-          </a:solidFill>
-          <a:ln/>
-        </p:spPr>
-      </p:sp>
-      <p:sp>
-        <p:nvSpPr>
-          <p:cNvPr id="15" name="Shape 11"/>
-          <p:cNvSpPr/>
-          <p:nvPr/>
-        </p:nvSpPr>
-        <p:spPr>
-          <a:xfrm>
-            <a:off x="8458200" y="2331720"/>
-            <a:ext cx="685800" cy="685800"/>
-          </a:xfrm>
-          <a:prstGeom prst="ellipse">
-            <a:avLst/>
-          </a:prstGeom>
-          <a:solidFill>
-            <a:srgbClr val="CADCFC"/>
-          </a:solidFill>
-          <a:ln/>
-        </p:spPr>
-      </p:sp>
-      <p:pic>
-        <p:nvPicPr>
-          <p:cNvPr id="16" name="Image 2" descr="preencoded.png">    </p:cNvPr>
-          <p:cNvPicPr>
-            <a:picLocks noChangeAspect="1"/>
-          </p:cNvPicPr>
-          <p:nvPr/>
-        </p:nvPicPr>
-        <p:blipFill>
-          <a:blip r:embed="rId3"/>
-          <a:stretch>
-            <a:fillRect/>
-          </a:stretch>
-        </p:blipFill>
-        <p:spPr>
-          <a:xfrm>
-            <a:off x="8629650" y="2503170"/>
-            <a:ext cx="342900" cy="342900"/>
-          </a:xfrm>
-          <a:prstGeom prst="rect">
-            <a:avLst/>
-          </a:prstGeom>
-        </p:spPr>
-      </p:pic>
-      <p:sp>
-        <p:nvSpPr>
-          <p:cNvPr id="17" name="Text 12"/>
-          <p:cNvSpPr/>
-          <p:nvPr/>
-        </p:nvSpPr>
-        <p:spPr>
-          <a:xfrm>
-            <a:off x="8458200" y="3200400"/>
-            <a:ext cx="2743200" cy="685800"/>
-          </a:xfrm>
-          <a:prstGeom prst="rect">
-            <a:avLst/>
-          </a:prstGeom>
-          <a:noFill/>
-          <a:ln/>
-        </p:spPr>
-        <p:txBody>
-          <a:bodyPr wrap="square" lIns="0" tIns="0" rIns="0" bIns="0" rtlCol="0" anchor="ctr"/>
-          <a:lstStyle/>
-          <a:p>
-            <a:pPr indent="0" marL="0">
-              <a:buNone/>
-            </a:pPr>
-            <a:r>
-              <a:rPr lang="en-US" sz="1700" b="1" dirty="0">
-                <a:solidFill>
-                  <a:srgbClr val="FFFFFF"/>
-                </a:solidFill>
-                <a:latin typeface="Meiryo" pitchFamily="34" charset="0"/>
-                <a:ea typeface="Meiryo" pitchFamily="34" charset="-122"/>
-                <a:cs typeface="Meiryo" pitchFamily="34" charset="-120"/>
-              </a:rPr>
-              <a:t>社長の時間が戻ってくる</a:t>
-            </a:r>
-            <a:endParaRPr lang="en-US" sz="1700" dirty="0"/>
-          </a:p>
-        </p:txBody>
-      </p:sp>
-      <p:sp>
-        <p:nvSpPr>
-          <p:cNvPr id="18" name="Text 13"/>
-          <p:cNvSpPr/>
-          <p:nvPr/>
-        </p:nvSpPr>
-        <p:spPr>
-          <a:xfrm>
-            <a:off x="8458200" y="3794760"/>
-            <a:ext cx="2743200" cy="777240"/>
-          </a:xfrm>
-          <a:prstGeom prst="rect">
-            <a:avLst/>
-          </a:prstGeom>
-          <a:noFill/>
-          <a:ln/>
-        </p:spPr>
-        <p:txBody>
-          <a:bodyPr wrap="square" lIns="0" tIns="0" rIns="0" bIns="0" rtlCol="0" anchor="ctr"/>
-          <a:lstStyle/>
-          <a:p>
-            <a:pPr indent="0" marL="0">
-              <a:buNone/>
-            </a:pPr>
-            <a:r>
-              <a:rPr lang="en-US" sz="1150" dirty="0">
-                <a:solidFill>
-                  <a:srgbClr val="CADCFC"/>
-                </a:solidFill>
-                <a:latin typeface="Meiryo" pitchFamily="34" charset="0"/>
-                <a:ea typeface="Meiryo" pitchFamily="34" charset="-122"/>
-                <a:cs typeface="Meiryo" pitchFamily="34" charset="-120"/>
-              </a:rPr>
-              <a:t>一次評価・壁打ち・情報整理をAIが肩代わり。社長は本質的な判断に集中。</a:t>
-            </a:r>
-            <a:endParaRPr lang="en-US" sz="1150" dirty="0"/>
-          </a:p>
-        </p:txBody>
-      </p:sp>
-      <p:sp>
-        <p:nvSpPr>
-          <p:cNvPr id="19" name="Text 14"/>
-          <p:cNvSpPr/>
-          <p:nvPr/>
-        </p:nvSpPr>
-        <p:spPr>
-          <a:xfrm>
-            <a:off x="822960" y="5212080"/>
-            <a:ext cx="10881360" cy="822960"/>
-          </a:xfrm>
-          <a:prstGeom prst="rect">
-            <a:avLst/>
-          </a:prstGeom>
-          <a:noFill/>
-          <a:ln/>
-        </p:spPr>
-        <p:txBody>
-          <a:bodyPr wrap="square" lIns="0" tIns="0" rIns="0" bIns="0" rtlCol="0" anchor="ctr"/>
-          <a:lstStyle/>
-          <a:p>
-            <a:pPr indent="0" marL="0">
-              <a:buNone/>
-            </a:pPr>
-            <a:r>
-              <a:rPr lang="en-US" sz="1400" b="1" dirty="0">
-                <a:solidFill>
-                  <a:srgbClr val="E8A33D"/>
-                </a:solidFill>
-                <a:latin typeface="Meiryo" pitchFamily="34" charset="0"/>
-                <a:ea typeface="Meiryo" pitchFamily="34" charset="-122"/>
-                <a:cs typeface="Meiryo" pitchFamily="34" charset="-120"/>
-              </a:rPr>
-              <a:t>次のアクション　</a:t>
-            </a:r>
-            <a:pPr indent="0" marL="0">
-              <a:buNone/>
-            </a:pPr>
-            <a:r>
-              <a:rPr lang="en-US" sz="1400" dirty="0">
-                <a:solidFill>
-                  <a:srgbClr val="FFFFFF"/>
-                </a:solidFill>
-                <a:latin typeface="Meiryo" pitchFamily="34" charset="0"/>
-                <a:ea typeface="Meiryo" pitchFamily="34" charset="-122"/>
-                <a:cs typeface="Meiryo" pitchFamily="34" charset="-120"/>
-              </a:rPr>
-              <a:t>① ヒアリング日程の確定（60〜90分）　② 導入日に実データで体験　③ 1〜2週間の試用で精度を評価</a:t>
-            </a:r>
-            <a:endParaRPr lang="en-US" sz="1400" dirty="0"/>
-          </a:p>
-        </p:txBody>
-      </p:sp>
-    </p:spTree>
-  </p:cSld>
-  <p:clrMapOvr>
-    <a:masterClrMapping/>
-  </p:clrMapOvr>
-</p:sld>
-</file>
-
 <file path=ppt/slides/slide2.xml><?xml version="1.0" encoding="utf-8"?>
 <p:sld xmlns:a="http://schemas.openxmlformats.org/drawingml/2006/main" xmlns:r="http://schemas.openxmlformats.org/officeDocument/2006/relationships" xmlns:p="http://schemas.openxmlformats.org/presentationml/2006/main">
   <p:cSld name="Slide 2">
@@ -5808,30 +5143,74 @@
       </p:grpSpPr>
       <p:sp>
         <p:nvSpPr>
-          <p:cNvPr id="2" name="Text 0"/>
+          <p:cNvPr id="2" name="Shape 0"/>
           <p:cNvSpPr/>
           <p:nvPr/>
         </p:nvSpPr>
         <p:spPr>
           <a:xfrm>
             <a:off x="640080" y="502920"/>
-            <a:ext cx="10972800" cy="731520"/>
-          </a:xfrm>
-          <a:prstGeom prst="rect">
-            <a:avLst/>
-          </a:prstGeom>
-          <a:noFill/>
-          <a:ln/>
-        </p:spPr>
-        <p:txBody>
-          <a:bodyPr wrap="square" lIns="0" tIns="0" rIns="0" bIns="0" rtlCol="0" anchor="ctr"/>
-          <a:lstStyle/>
-          <a:p>
-            <a:pPr indent="0" marL="0">
-              <a:buNone/>
-            </a:pPr>
-            <a:r>
-              <a:rPr lang="en-US" sz="3000" b="1" dirty="0">
+            <a:ext cx="685800" cy="685800"/>
+          </a:xfrm>
+          <a:prstGeom prst="ellipse">
+            <a:avLst/>
+          </a:prstGeom>
+          <a:solidFill>
+            <a:srgbClr val="1E2761"/>
+          </a:solidFill>
+          <a:ln/>
+        </p:spPr>
+      </p:sp>
+      <p:pic>
+        <p:nvPicPr>
+          <p:cNvPr id="3" name="Image 0" descr="preencoded.png">    </p:cNvPr>
+          <p:cNvPicPr>
+            <a:picLocks noChangeAspect="1"/>
+          </p:cNvPicPr>
+          <p:nvPr/>
+        </p:nvPicPr>
+        <p:blipFill>
+          <a:blip r:embed="rId1"/>
+          <a:stretch>
+            <a:fillRect/>
+          </a:stretch>
+        </p:blipFill>
+        <p:spPr>
+          <a:xfrm>
+            <a:off x="811530" y="674370"/>
+            <a:ext cx="342900" cy="342900"/>
+          </a:xfrm>
+          <a:prstGeom prst="rect">
+            <a:avLst/>
+          </a:prstGeom>
+        </p:spPr>
+      </p:pic>
+      <p:sp>
+        <p:nvSpPr>
+          <p:cNvPr id="4" name="Text 1"/>
+          <p:cNvSpPr/>
+          <p:nvPr/>
+        </p:nvSpPr>
+        <p:spPr>
+          <a:xfrm>
+            <a:off x="1508760" y="566928"/>
+            <a:ext cx="9601200" cy="594360"/>
+          </a:xfrm>
+          <a:prstGeom prst="rect">
+            <a:avLst/>
+          </a:prstGeom>
+          <a:noFill/>
+          <a:ln/>
+        </p:spPr>
+        <p:txBody>
+          <a:bodyPr wrap="square" lIns="0" tIns="0" rIns="0" bIns="0" rtlCol="0" anchor="ctr"/>
+          <a:lstStyle/>
+          <a:p>
+            <a:pPr indent="0" marL="0">
+              <a:buNone/>
+            </a:pPr>
+            <a:r>
+              <a:rPr lang="en-US" sz="3200" b="1" dirty="0">
                 <a:solidFill>
                   <a:srgbClr val="1C2333"/>
                 </a:solidFill>
@@ -5839,38 +5218,121 @@
                 <a:ea typeface="Meiryo" pitchFamily="34" charset="-122"/>
                 <a:cs typeface="Meiryo" pitchFamily="34" charset="-120"/>
               </a:rPr>
-              <a:t>動作実証済み — 公開情報で「三木谷スタイル」を再現</a:t>
-            </a:r>
-            <a:endParaRPr lang="en-US" sz="3000" dirty="0"/>
-          </a:p>
-        </p:txBody>
-      </p:sp>
-      <p:sp>
-        <p:nvSpPr>
-          <p:cNvPr id="3" name="Text 1"/>
-          <p:cNvSpPr/>
-          <p:nvPr/>
-        </p:nvSpPr>
-        <p:spPr>
-          <a:xfrm>
-            <a:off x="640080" y="1280160"/>
-            <a:ext cx="10881360" cy="457200"/>
-          </a:xfrm>
-          <a:prstGeom prst="rect">
-            <a:avLst/>
-          </a:prstGeom>
-          <a:noFill/>
-          <a:ln/>
-        </p:spPr>
-        <p:txBody>
-          <a:bodyPr wrap="square" lIns="0" tIns="0" rIns="0" bIns="0" rtlCol="0" anchor="ctr"/>
-          <a:lstStyle/>
-          <a:p>
-            <a:pPr indent="0" marL="0">
-              <a:buNone/>
-            </a:pPr>
-            <a:r>
-              <a:rPr lang="en-US" sz="1400" dirty="0">
+              <a:t>セキュリティとデータ管理</a:t>
+            </a:r>
+            <a:endParaRPr lang="en-US" sz="3200" dirty="0"/>
+          </a:p>
+        </p:txBody>
+      </p:sp>
+      <p:sp>
+        <p:nvSpPr>
+          <p:cNvPr id="5" name="Shape 2"/>
+          <p:cNvSpPr/>
+          <p:nvPr/>
+        </p:nvSpPr>
+        <p:spPr>
+          <a:xfrm>
+            <a:off x="731520" y="1627632"/>
+            <a:ext cx="566928" cy="566928"/>
+          </a:xfrm>
+          <a:prstGeom prst="ellipse">
+            <a:avLst/>
+          </a:prstGeom>
+          <a:solidFill>
+            <a:srgbClr val="EDF3FD"/>
+          </a:solidFill>
+          <a:ln/>
+        </p:spPr>
+      </p:sp>
+      <p:pic>
+        <p:nvPicPr>
+          <p:cNvPr id="6" name="Image 1" descr="preencoded.png">    </p:cNvPr>
+          <p:cNvPicPr>
+            <a:picLocks noChangeAspect="1"/>
+          </p:cNvPicPr>
+          <p:nvPr/>
+        </p:nvPicPr>
+        <p:blipFill>
+          <a:blip r:embed="rId2"/>
+          <a:stretch>
+            <a:fillRect/>
+          </a:stretch>
+        </p:blipFill>
+        <p:spPr>
+          <a:xfrm>
+            <a:off x="873252" y="1769364"/>
+            <a:ext cx="283464" cy="283464"/>
+          </a:xfrm>
+          <a:prstGeom prst="rect">
+            <a:avLst/>
+          </a:prstGeom>
+        </p:spPr>
+      </p:pic>
+      <p:sp>
+        <p:nvSpPr>
+          <p:cNvPr id="7" name="Text 3"/>
+          <p:cNvSpPr/>
+          <p:nvPr/>
+        </p:nvSpPr>
+        <p:spPr>
+          <a:xfrm>
+            <a:off x="1600200" y="1554480"/>
+            <a:ext cx="9692640" cy="384048"/>
+          </a:xfrm>
+          <a:prstGeom prst="rect">
+            <a:avLst/>
+          </a:prstGeom>
+          <a:noFill/>
+          <a:ln/>
+        </p:spPr>
+        <p:txBody>
+          <a:bodyPr wrap="square" lIns="0" tIns="0" rIns="0" bIns="0" rtlCol="0" anchor="ctr"/>
+          <a:lstStyle/>
+          <a:p>
+            <a:pPr indent="0" marL="0">
+              <a:buNone/>
+            </a:pPr>
+            <a:r>
+              <a:rPr lang="en-US" sz="1700" b="1" dirty="0">
+                <a:solidFill>
+                  <a:srgbClr val="1E2761"/>
+                </a:solidFill>
+                <a:latin typeface="Meiryo" pitchFamily="34" charset="0"/>
+                <a:ea typeface="Meiryo" pitchFamily="34" charset="-122"/>
+                <a:cs typeface="Meiryo" pitchFamily="34" charset="-120"/>
+              </a:rPr>
+              <a:t>会社の管理下で完結</a:t>
+            </a:r>
+            <a:endParaRPr lang="en-US" sz="1700" dirty="0"/>
+          </a:p>
+        </p:txBody>
+      </p:sp>
+      <p:sp>
+        <p:nvSpPr>
+          <p:cNvPr id="8" name="Text 4"/>
+          <p:cNvSpPr/>
+          <p:nvPr/>
+        </p:nvSpPr>
+        <p:spPr>
+          <a:xfrm>
+            <a:off x="1600200" y="1956816"/>
+            <a:ext cx="9692640" cy="548640"/>
+          </a:xfrm>
+          <a:prstGeom prst="rect">
+            <a:avLst/>
+          </a:prstGeom>
+          <a:noFill/>
+          <a:ln/>
+        </p:spPr>
+        <p:txBody>
+          <a:bodyPr wrap="square" lIns="0" tIns="0" rIns="0" bIns="0" rtlCol="0" anchor="ctr"/>
+          <a:lstStyle/>
+          <a:p>
+            <a:pPr indent="0" marL="0">
+              <a:buNone/>
+            </a:pPr>
+            <a:r>
+              <a:rPr lang="en-US" sz="1250" dirty="0">
                 <a:solidFill>
                   <a:srgbClr val="5A6474"/>
                 </a:solidFill>
@@ -5878,648 +5340,414 @@
                 <a:ea typeface="Meiryo" pitchFamily="34" charset="-122"/>
                 <a:cs typeface="Meiryo" pitchFamily="34" charset="-120"/>
               </a:rPr>
-              <a:t>実在の著名経営者の公開された経営哲学でペルソナを構築し、入力から出力まで全経路を実測検証しました。</a:t>
-            </a:r>
-            <a:endParaRPr lang="en-US" sz="1400" dirty="0"/>
-          </a:p>
-        </p:txBody>
-      </p:sp>
-      <p:sp>
-        <p:nvSpPr>
-          <p:cNvPr id="4" name="Shape 2"/>
-          <p:cNvSpPr/>
-          <p:nvPr/>
-        </p:nvSpPr>
-        <p:spPr>
-          <a:xfrm>
-            <a:off x="640080" y="1920240"/>
-            <a:ext cx="3474720" cy="1828800"/>
-          </a:xfrm>
-          <a:prstGeom prst="roundRect">
-            <a:avLst>
-              <a:gd name="adj" fmla="val 6000"/>
-            </a:avLst>
-          </a:prstGeom>
-          <a:solidFill>
-            <a:srgbClr val="1E2761"/>
-          </a:solidFill>
-          <a:ln/>
-        </p:spPr>
-      </p:sp>
-      <p:sp>
-        <p:nvSpPr>
-          <p:cNvPr id="5" name="Text 3"/>
-          <p:cNvSpPr/>
-          <p:nvPr/>
-        </p:nvSpPr>
-        <p:spPr>
-          <a:xfrm>
-            <a:off x="640080" y="2057400"/>
-            <a:ext cx="3474720" cy="777240"/>
-          </a:xfrm>
-          <a:prstGeom prst="rect">
-            <a:avLst/>
-          </a:prstGeom>
-          <a:noFill/>
-          <a:ln/>
-        </p:spPr>
-        <p:txBody>
-          <a:bodyPr wrap="square" rtlCol="0" anchor="ctr"/>
-          <a:lstStyle/>
-          <a:p>
-            <a:pPr algn="ctr" indent="0" marL="0">
-              <a:buNone/>
-            </a:pPr>
-            <a:r>
-              <a:rPr lang="en-US" sz="4200" b="1" dirty="0">
-                <a:solidFill>
-                  <a:srgbClr val="FFFFFF"/>
-                </a:solidFill>
-                <a:latin typeface="Meiryo" pitchFamily="34" charset="0"/>
-                <a:ea typeface="Meiryo" pitchFamily="34" charset="-122"/>
-                <a:cs typeface="Meiryo" pitchFamily="34" charset="-120"/>
-              </a:rPr>
-              <a:t>7種</a:t>
-            </a:r>
-            <a:endParaRPr lang="en-US" sz="4200" dirty="0"/>
-          </a:p>
-        </p:txBody>
-      </p:sp>
-      <p:sp>
-        <p:nvSpPr>
-          <p:cNvPr id="6" name="Text 4"/>
-          <p:cNvSpPr/>
-          <p:nvPr/>
-        </p:nvSpPr>
-        <p:spPr>
-          <a:xfrm>
-            <a:off x="822960" y="2880360"/>
-            <a:ext cx="3108960" cy="777240"/>
-          </a:xfrm>
-          <a:prstGeom prst="rect">
-            <a:avLst/>
-          </a:prstGeom>
-          <a:noFill/>
-          <a:ln/>
-        </p:spPr>
-        <p:txBody>
-          <a:bodyPr wrap="square" rtlCol="0" anchor="ctr"/>
-          <a:lstStyle/>
-          <a:p>
-            <a:pPr algn="ctr" indent="0" marL="0">
-              <a:lnSpc>
-                <a:spcPct val="115000"/>
-              </a:lnSpc>
-              <a:buNone/>
-            </a:pPr>
-            <a:r>
-              <a:rPr lang="en-US" sz="1100" dirty="0">
-                <a:solidFill>
-                  <a:srgbClr val="CADCFC"/>
-                </a:solidFill>
-                <a:latin typeface="Meiryo" pitchFamily="34" charset="0"/>
-                <a:ea typeface="Meiryo" pitchFamily="34" charset="-122"/>
-                <a:cs typeface="Meiryo" pitchFamily="34" charset="-120"/>
-              </a:rPr>
-              <a:t>データソース</a:t>
+              <a:t>処理は社内のMacで実行。データはNotion（会社ワークスペース）に保存し、メンバー権限で閲覧制御。</a:t>
+            </a:r>
+            <a:endParaRPr lang="en-US" sz="1250" dirty="0"/>
+          </a:p>
+        </p:txBody>
+      </p:sp>
+      <p:sp>
+        <p:nvSpPr>
+          <p:cNvPr id="9" name="Shape 5"/>
+          <p:cNvSpPr/>
+          <p:nvPr/>
+        </p:nvSpPr>
+        <p:spPr>
+          <a:xfrm>
+            <a:off x="731520" y="2798064"/>
+            <a:ext cx="566928" cy="566928"/>
+          </a:xfrm>
+          <a:prstGeom prst="ellipse">
+            <a:avLst/>
+          </a:prstGeom>
+          <a:solidFill>
+            <a:srgbClr val="EDF3FD"/>
+          </a:solidFill>
+          <a:ln/>
+        </p:spPr>
+      </p:sp>
+      <p:pic>
+        <p:nvPicPr>
+          <p:cNvPr id="10" name="Image 2" descr="preencoded.png">    </p:cNvPr>
+          <p:cNvPicPr>
+            <a:picLocks noChangeAspect="1"/>
+          </p:cNvPicPr>
+          <p:nvPr/>
+        </p:nvPicPr>
+        <p:blipFill>
+          <a:blip r:embed="rId3"/>
+          <a:stretch>
+            <a:fillRect/>
+          </a:stretch>
+        </p:blipFill>
+        <p:spPr>
+          <a:xfrm>
+            <a:off x="873252" y="2939796"/>
+            <a:ext cx="283464" cy="283464"/>
+          </a:xfrm>
+          <a:prstGeom prst="rect">
+            <a:avLst/>
+          </a:prstGeom>
+        </p:spPr>
+      </p:pic>
+      <p:sp>
+        <p:nvSpPr>
+          <p:cNvPr id="11" name="Text 6"/>
+          <p:cNvSpPr/>
+          <p:nvPr/>
+        </p:nvSpPr>
+        <p:spPr>
+          <a:xfrm>
+            <a:off x="1600200" y="2724912"/>
+            <a:ext cx="9692640" cy="384048"/>
+          </a:xfrm>
+          <a:prstGeom prst="rect">
+            <a:avLst/>
+          </a:prstGeom>
+          <a:noFill/>
+          <a:ln/>
+        </p:spPr>
+        <p:txBody>
+          <a:bodyPr wrap="square" lIns="0" tIns="0" rIns="0" bIns="0" rtlCol="0" anchor="ctr"/>
+          <a:lstStyle/>
+          <a:p>
+            <a:pPr indent="0" marL="0">
+              <a:buNone/>
+            </a:pPr>
+            <a:r>
+              <a:rPr lang="en-US" sz="1700" b="1" dirty="0">
+                <a:solidFill>
+                  <a:srgbClr val="1E2761"/>
+                </a:solidFill>
+                <a:latin typeface="Meiryo" pitchFamily="34" charset="0"/>
+                <a:ea typeface="Meiryo" pitchFamily="34" charset="-122"/>
+                <a:cs typeface="Meiryo" pitchFamily="34" charset="-120"/>
+              </a:rPr>
+              <a:t>候補者情報は学習させない</a:t>
+            </a:r>
+            <a:endParaRPr lang="en-US" sz="1700" dirty="0"/>
+          </a:p>
+        </p:txBody>
+      </p:sp>
+      <p:sp>
+        <p:nvSpPr>
+          <p:cNvPr id="12" name="Text 7"/>
+          <p:cNvSpPr/>
+          <p:nvPr/>
+        </p:nvSpPr>
+        <p:spPr>
+          <a:xfrm>
+            <a:off x="1600200" y="3127248"/>
+            <a:ext cx="9692640" cy="548640"/>
+          </a:xfrm>
+          <a:prstGeom prst="rect">
+            <a:avLst/>
+          </a:prstGeom>
+          <a:noFill/>
+          <a:ln/>
+        </p:spPr>
+        <p:txBody>
+          <a:bodyPr wrap="square" lIns="0" tIns="0" rIns="0" bIns="0" rtlCol="0" anchor="ctr"/>
+          <a:lstStyle/>
+          <a:p>
+            <a:pPr indent="0" marL="0">
+              <a:buNone/>
+            </a:pPr>
+            <a:r>
+              <a:rPr lang="en-US" sz="1250" dirty="0">
+                <a:solidFill>
+                  <a:srgbClr val="5A6474"/>
+                </a:solidFill>
+                <a:latin typeface="Meiryo" pitchFamily="34" charset="0"/>
+                <a:ea typeface="Meiryo" pitchFamily="34" charset="-122"/>
+                <a:cs typeface="Meiryo" pitchFamily="34" charset="-120"/>
+              </a:rPr>
+              <a:t>採用モードの入力（履歴書・面接メモ）はDBに保存せず、他の回答に混入しない設計。</a:t>
+            </a:r>
+            <a:endParaRPr lang="en-US" sz="1250" dirty="0"/>
+          </a:p>
+        </p:txBody>
+      </p:sp>
+      <p:sp>
+        <p:nvSpPr>
+          <p:cNvPr id="13" name="Shape 8"/>
+          <p:cNvSpPr/>
+          <p:nvPr/>
+        </p:nvSpPr>
+        <p:spPr>
+          <a:xfrm>
+            <a:off x="731520" y="3968496"/>
+            <a:ext cx="566928" cy="566928"/>
+          </a:xfrm>
+          <a:prstGeom prst="ellipse">
+            <a:avLst/>
+          </a:prstGeom>
+          <a:solidFill>
+            <a:srgbClr val="EDF3FD"/>
+          </a:solidFill>
+          <a:ln/>
+        </p:spPr>
+      </p:sp>
+      <p:pic>
+        <p:nvPicPr>
+          <p:cNvPr id="14" name="Image 3" descr="preencoded.png">    </p:cNvPr>
+          <p:cNvPicPr>
+            <a:picLocks noChangeAspect="1"/>
+          </p:cNvPicPr>
+          <p:nvPr/>
+        </p:nvPicPr>
+        <p:blipFill>
+          <a:blip r:embed="rId4"/>
+          <a:stretch>
+            <a:fillRect/>
+          </a:stretch>
+        </p:blipFill>
+        <p:spPr>
+          <a:xfrm>
+            <a:off x="873252" y="4110228"/>
+            <a:ext cx="283464" cy="283464"/>
+          </a:xfrm>
+          <a:prstGeom prst="rect">
+            <a:avLst/>
+          </a:prstGeom>
+        </p:spPr>
+      </p:pic>
+      <p:sp>
+        <p:nvSpPr>
+          <p:cNvPr id="15" name="Text 9"/>
+          <p:cNvSpPr/>
+          <p:nvPr/>
+        </p:nvSpPr>
+        <p:spPr>
+          <a:xfrm>
+            <a:off x="1600200" y="3895344"/>
+            <a:ext cx="9692640" cy="384048"/>
+          </a:xfrm>
+          <a:prstGeom prst="rect">
+            <a:avLst/>
+          </a:prstGeom>
+          <a:noFill/>
+          <a:ln/>
+        </p:spPr>
+        <p:txBody>
+          <a:bodyPr wrap="square" lIns="0" tIns="0" rIns="0" bIns="0" rtlCol="0" anchor="ctr"/>
+          <a:lstStyle/>
+          <a:p>
+            <a:pPr indent="0" marL="0">
+              <a:buNone/>
+            </a:pPr>
+            <a:r>
+              <a:rPr lang="en-US" sz="1700" b="1" dirty="0">
+                <a:solidFill>
+                  <a:srgbClr val="1E2761"/>
+                </a:solidFill>
+                <a:latin typeface="Meiryo" pitchFamily="34" charset="0"/>
+                <a:ea typeface="Meiryo" pitchFamily="34" charset="-122"/>
+                <a:cs typeface="Meiryo" pitchFamily="34" charset="-120"/>
+              </a:rPr>
+              <a:t>AIへのデータの渡し方も選べる</a:t>
+            </a:r>
+            <a:endParaRPr lang="en-US" sz="1700" dirty="0"/>
+          </a:p>
+        </p:txBody>
+      </p:sp>
+      <p:sp>
+        <p:nvSpPr>
+          <p:cNvPr id="16" name="Text 10"/>
+          <p:cNvSpPr/>
+          <p:nvPr/>
+        </p:nvSpPr>
+        <p:spPr>
+          <a:xfrm>
+            <a:off x="1600200" y="4297680"/>
+            <a:ext cx="9692640" cy="548640"/>
+          </a:xfrm>
+          <a:prstGeom prst="rect">
+            <a:avLst/>
+          </a:prstGeom>
+          <a:noFill/>
+          <a:ln/>
+        </p:spPr>
+        <p:txBody>
+          <a:bodyPr wrap="square" lIns="0" tIns="0" rIns="0" bIns="0" rtlCol="0" anchor="ctr"/>
+          <a:lstStyle/>
+          <a:p>
+            <a:pPr indent="0" marL="0">
+              <a:buNone/>
+            </a:pPr>
+            <a:r>
+              <a:rPr lang="en-US" sz="1250" dirty="0">
+                <a:solidFill>
+                  <a:srgbClr val="5A6474"/>
+                </a:solidFill>
+                <a:latin typeface="Meiryo" pitchFamily="34" charset="0"/>
+                <a:ea typeface="Meiryo" pitchFamily="34" charset="-122"/>
+                <a:cs typeface="Meiryo" pitchFamily="34" charset="-120"/>
+              </a:rPr>
+              <a:t>本格運用では Vertex AI（自社GCP）に切替可能 — 入力データはモデル学習に使われず自社クラウド内に留まる。</a:t>
+            </a:r>
+            <a:endParaRPr lang="en-US" sz="1250" dirty="0"/>
+          </a:p>
+        </p:txBody>
+      </p:sp>
+      <p:sp>
+        <p:nvSpPr>
+          <p:cNvPr id="17" name="Shape 11"/>
+          <p:cNvSpPr/>
+          <p:nvPr/>
+        </p:nvSpPr>
+        <p:spPr>
+          <a:xfrm>
+            <a:off x="731520" y="5138928"/>
+            <a:ext cx="566928" cy="566928"/>
+          </a:xfrm>
+          <a:prstGeom prst="ellipse">
+            <a:avLst/>
+          </a:prstGeom>
+          <a:solidFill>
+            <a:srgbClr val="EDF3FD"/>
+          </a:solidFill>
+          <a:ln/>
+        </p:spPr>
+      </p:sp>
+      <p:pic>
+        <p:nvPicPr>
+          <p:cNvPr id="18" name="Image 4" descr="preencoded.png">    </p:cNvPr>
+          <p:cNvPicPr>
+            <a:picLocks noChangeAspect="1"/>
+          </p:cNvPicPr>
+          <p:nvPr/>
+        </p:nvPicPr>
+        <p:blipFill>
+          <a:blip r:embed="rId5"/>
+          <a:stretch>
+            <a:fillRect/>
+          </a:stretch>
+        </p:blipFill>
+        <p:spPr>
+          <a:xfrm>
+            <a:off x="873252" y="5280660"/>
+            <a:ext cx="283464" cy="283464"/>
+          </a:xfrm>
+          <a:prstGeom prst="rect">
+            <a:avLst/>
+          </a:prstGeom>
+        </p:spPr>
+      </p:pic>
+      <p:sp>
+        <p:nvSpPr>
+          <p:cNvPr id="19" name="Text 12"/>
+          <p:cNvSpPr/>
+          <p:nvPr/>
+        </p:nvSpPr>
+        <p:spPr>
+          <a:xfrm>
+            <a:off x="1600200" y="5065776"/>
+            <a:ext cx="9692640" cy="384048"/>
+          </a:xfrm>
+          <a:prstGeom prst="rect">
+            <a:avLst/>
+          </a:prstGeom>
+          <a:noFill/>
+          <a:ln/>
+        </p:spPr>
+        <p:txBody>
+          <a:bodyPr wrap="square" lIns="0" tIns="0" rIns="0" bIns="0" rtlCol="0" anchor="ctr"/>
+          <a:lstStyle/>
+          <a:p>
+            <a:pPr indent="0" marL="0">
+              <a:buNone/>
+            </a:pPr>
+            <a:r>
+              <a:rPr lang="en-US" sz="1700" b="1" dirty="0">
+                <a:solidFill>
+                  <a:srgbClr val="1E2761"/>
+                </a:solidFill>
+                <a:latin typeface="Meiryo" pitchFamily="34" charset="0"/>
+                <a:ea typeface="Meiryo" pitchFamily="34" charset="-122"/>
+                <a:cs typeface="Meiryo" pitchFamily="34" charset="-120"/>
+              </a:rPr>
+              <a:t>属人化しないアカウント設計</a:t>
+            </a:r>
+            <a:endParaRPr lang="en-US" sz="1700" dirty="0"/>
+          </a:p>
+        </p:txBody>
+      </p:sp>
+      <p:sp>
+        <p:nvSpPr>
+          <p:cNvPr id="20" name="Text 13"/>
+          <p:cNvSpPr/>
+          <p:nvPr/>
+        </p:nvSpPr>
+        <p:spPr>
+          <a:xfrm>
+            <a:off x="1600200" y="5468112"/>
+            <a:ext cx="9692640" cy="548640"/>
+          </a:xfrm>
+          <a:prstGeom prst="rect">
+            <a:avLst/>
+          </a:prstGeom>
+          <a:noFill/>
+          <a:ln/>
+        </p:spPr>
+        <p:txBody>
+          <a:bodyPr wrap="square" lIns="0" tIns="0" rIns="0" bIns="0" rtlCol="0" anchor="ctr"/>
+          <a:lstStyle/>
+          <a:p>
+            <a:pPr indent="0" marL="0">
+              <a:buNone/>
+            </a:pPr>
+            <a:r>
+              <a:rPr lang="en-US" sz="1250" dirty="0">
+                <a:solidFill>
+                  <a:srgbClr val="5A6474"/>
+                </a:solidFill>
+                <a:latin typeface="Meiryo" pitchFamily="34" charset="0"/>
+                <a:ea typeface="Meiryo" pitchFamily="34" charset="-122"/>
+                <a:cs typeface="Meiryo" pitchFamily="34" charset="-120"/>
+              </a:rPr>
+              <a:t>キー・DB・コードは会社アカウントに統一（LINEのみ個人が必然）。退職や不在でシステムが止まらない。</a:t>
+            </a:r>
+            <a:endParaRPr lang="en-US" sz="1250" dirty="0"/>
+          </a:p>
+        </p:txBody>
+      </p:sp>
+      <p:sp>
+        <p:nvSpPr>
+          <p:cNvPr id="21" name="Text 14"/>
+          <p:cNvSpPr/>
+          <p:nvPr/>
+        </p:nvSpPr>
+        <p:spPr>
+          <a:xfrm>
+            <a:off x="640080" y="6263640"/>
+            <a:ext cx="10881360" cy="365760"/>
+          </a:xfrm>
+          <a:prstGeom prst="rect">
+            <a:avLst/>
+          </a:prstGeom>
+          <a:noFill/>
+          <a:ln/>
+        </p:spPr>
+        <p:txBody>
+          <a:bodyPr wrap="square" lIns="0" tIns="0" rIns="0" bIns="0" rtlCol="0" anchor="ctr"/>
+          <a:lstStyle/>
+          <a:p>
+            <a:pPr indent="0" marL="0">
+              <a:buNone/>
+            </a:pPr>
+            <a:r>
+              <a:rPr lang="en-US" sz="1100" i="1" dirty="0">
+                <a:solidFill>
+                  <a:srgbClr val="5A6474"/>
+                </a:solidFill>
+                <a:latin typeface="Meiryo" pitchFamily="34" charset="0"/>
+                <a:ea typeface="Meiryo" pitchFamily="34" charset="-122"/>
+                <a:cs typeface="Meiryo" pitchFamily="34" charset="-120"/>
+              </a:rPr>
+              <a:t>経営者本人の同意と継続的な協力（録音・データ提供）が前提です。AIの回答は参考情報であり、最終判断は人が行います。</a:t>
             </a:r>
             <a:endParaRPr lang="en-US" sz="1100" dirty="0"/>
-          </a:p>
-          <a:p>
-            <a:pPr algn="ctr" indent="0" marL="0">
-              <a:lnSpc>
-                <a:spcPct val="115000"/>
-              </a:lnSpc>
-              <a:buNone/>
-            </a:pPr>
-            <a:r>
-              <a:rPr lang="en-US" sz="1100" dirty="0">
-                <a:solidFill>
-                  <a:srgbClr val="CADCFC"/>
-                </a:solidFill>
-                <a:latin typeface="Meiryo" pitchFamily="34" charset="0"/>
-                <a:ea typeface="Meiryo" pitchFamily="34" charset="-122"/>
-                <a:cs typeface="Meiryo" pitchFamily="34" charset="-120"/>
-              </a:rPr>
-              <a:t>音声・LINE・Slack・メール</a:t>
-            </a:r>
-            <a:endParaRPr lang="en-US" sz="1100" dirty="0"/>
-          </a:p>
-          <a:p>
-            <a:pPr algn="ctr" indent="0" marL="0">
-              <a:lnSpc>
-                <a:spcPct val="115000"/>
-              </a:lnSpc>
-              <a:buNone/>
-            </a:pPr>
-            <a:r>
-              <a:rPr lang="en-US" sz="1100" dirty="0">
-                <a:solidFill>
-                  <a:srgbClr val="CADCFC"/>
-                </a:solidFill>
-                <a:latin typeface="Meiryo" pitchFamily="34" charset="0"/>
-                <a:ea typeface="Meiryo" pitchFamily="34" charset="-122"/>
-                <a:cs typeface="Meiryo" pitchFamily="34" charset="-120"/>
-              </a:rPr>
-              <a:t>会議・文書・カレンダー</a:t>
-            </a:r>
-            <a:endParaRPr lang="en-US" sz="1100" dirty="0"/>
-          </a:p>
-        </p:txBody>
-      </p:sp>
-      <p:sp>
-        <p:nvSpPr>
-          <p:cNvPr id="7" name="Shape 5"/>
-          <p:cNvSpPr/>
-          <p:nvPr/>
-        </p:nvSpPr>
-        <p:spPr>
-          <a:xfrm>
-            <a:off x="4389120" y="1920240"/>
-            <a:ext cx="3474720" cy="1828800"/>
-          </a:xfrm>
-          <a:prstGeom prst="roundRect">
-            <a:avLst>
-              <a:gd name="adj" fmla="val 6000"/>
-            </a:avLst>
-          </a:prstGeom>
-          <a:solidFill>
-            <a:srgbClr val="1E2761"/>
-          </a:solidFill>
-          <a:ln/>
-        </p:spPr>
-      </p:sp>
-      <p:sp>
-        <p:nvSpPr>
-          <p:cNvPr id="8" name="Text 6"/>
-          <p:cNvSpPr/>
-          <p:nvPr/>
-        </p:nvSpPr>
-        <p:spPr>
-          <a:xfrm>
-            <a:off x="4389120" y="2057400"/>
-            <a:ext cx="3474720" cy="777240"/>
-          </a:xfrm>
-          <a:prstGeom prst="rect">
-            <a:avLst/>
-          </a:prstGeom>
-          <a:noFill/>
-          <a:ln/>
-        </p:spPr>
-        <p:txBody>
-          <a:bodyPr wrap="square" rtlCol="0" anchor="ctr"/>
-          <a:lstStyle/>
-          <a:p>
-            <a:pPr algn="ctr" indent="0" marL="0">
-              <a:buNone/>
-            </a:pPr>
-            <a:r>
-              <a:rPr lang="en-US" sz="4200" b="1" dirty="0">
-                <a:solidFill>
-                  <a:srgbClr val="FFFFFF"/>
-                </a:solidFill>
-                <a:latin typeface="Meiryo" pitchFamily="34" charset="0"/>
-                <a:ea typeface="Meiryo" pitchFamily="34" charset="-122"/>
-                <a:cs typeface="Meiryo" pitchFamily="34" charset="-120"/>
-              </a:rPr>
-              <a:t>5つ</a:t>
-            </a:r>
-            <a:endParaRPr lang="en-US" sz="4200" dirty="0"/>
-          </a:p>
-        </p:txBody>
-      </p:sp>
-      <p:sp>
-        <p:nvSpPr>
-          <p:cNvPr id="9" name="Text 7"/>
-          <p:cNvSpPr/>
-          <p:nvPr/>
-        </p:nvSpPr>
-        <p:spPr>
-          <a:xfrm>
-            <a:off x="4572000" y="2880360"/>
-            <a:ext cx="3108960" cy="777240"/>
-          </a:xfrm>
-          <a:prstGeom prst="rect">
-            <a:avLst/>
-          </a:prstGeom>
-          <a:noFill/>
-          <a:ln/>
-        </p:spPr>
-        <p:txBody>
-          <a:bodyPr wrap="square" rtlCol="0" anchor="ctr"/>
-          <a:lstStyle/>
-          <a:p>
-            <a:pPr algn="ctr" indent="0" marL="0">
-              <a:lnSpc>
-                <a:spcPct val="115000"/>
-              </a:lnSpc>
-              <a:buNone/>
-            </a:pPr>
-            <a:r>
-              <a:rPr lang="en-US" sz="1100" dirty="0">
-                <a:solidFill>
-                  <a:srgbClr val="CADCFC"/>
-                </a:solidFill>
-                <a:latin typeface="Meiryo" pitchFamily="34" charset="0"/>
-                <a:ea typeface="Meiryo" pitchFamily="34" charset="-122"/>
-                <a:cs typeface="Meiryo" pitchFamily="34" charset="-120"/>
-              </a:rPr>
-              <a:t>アウトプット</a:t>
-            </a:r>
-            <a:endParaRPr lang="en-US" sz="1100" dirty="0"/>
-          </a:p>
-          <a:p>
-            <a:pPr algn="ctr" indent="0" marL="0">
-              <a:lnSpc>
-                <a:spcPct val="115000"/>
-              </a:lnSpc>
-              <a:buNone/>
-            </a:pPr>
-            <a:r>
-              <a:rPr lang="en-US" sz="1100" dirty="0">
-                <a:solidFill>
-                  <a:srgbClr val="CADCFC"/>
-                </a:solidFill>
-                <a:latin typeface="Meiryo" pitchFamily="34" charset="0"/>
-                <a:ea typeface="Meiryo" pitchFamily="34" charset="-122"/>
-                <a:cs typeface="Meiryo" pitchFamily="34" charset="-120"/>
-              </a:rPr>
-              <a:t>即断・採用・壁打ち</a:t>
-            </a:r>
-            <a:endParaRPr lang="en-US" sz="1100" dirty="0"/>
-          </a:p>
-          <a:p>
-            <a:pPr algn="ctr" indent="0" marL="0">
-              <a:lnSpc>
-                <a:spcPct val="115000"/>
-              </a:lnSpc>
-              <a:buNone/>
-            </a:pPr>
-            <a:r>
-              <a:rPr lang="en-US" sz="1100" dirty="0">
-                <a:solidFill>
-                  <a:srgbClr val="CADCFC"/>
-                </a:solidFill>
-                <a:latin typeface="Meiryo" pitchFamily="34" charset="0"/>
-                <a:ea typeface="Meiryo" pitchFamily="34" charset="-122"/>
-                <a:cs typeface="Meiryo" pitchFamily="34" charset="-120"/>
-              </a:rPr>
-              <a:t>ブリーフィング・ダイジェスト</a:t>
-            </a:r>
-            <a:endParaRPr lang="en-US" sz="1100" dirty="0"/>
-          </a:p>
-        </p:txBody>
-      </p:sp>
-      <p:sp>
-        <p:nvSpPr>
-          <p:cNvPr id="10" name="Shape 8"/>
-          <p:cNvSpPr/>
-          <p:nvPr/>
-        </p:nvSpPr>
-        <p:spPr>
-          <a:xfrm>
-            <a:off x="8138160" y="1920240"/>
-            <a:ext cx="3474720" cy="1828800"/>
-          </a:xfrm>
-          <a:prstGeom prst="roundRect">
-            <a:avLst>
-              <a:gd name="adj" fmla="val 6000"/>
-            </a:avLst>
-          </a:prstGeom>
-          <a:solidFill>
-            <a:srgbClr val="1E2761"/>
-          </a:solidFill>
-          <a:ln/>
-        </p:spPr>
-      </p:sp>
-      <p:sp>
-        <p:nvSpPr>
-          <p:cNvPr id="11" name="Text 9"/>
-          <p:cNvSpPr/>
-          <p:nvPr/>
-        </p:nvSpPr>
-        <p:spPr>
-          <a:xfrm>
-            <a:off x="8138160" y="2057400"/>
-            <a:ext cx="3474720" cy="777240"/>
-          </a:xfrm>
-          <a:prstGeom prst="rect">
-            <a:avLst/>
-          </a:prstGeom>
-          <a:noFill/>
-          <a:ln/>
-        </p:spPr>
-        <p:txBody>
-          <a:bodyPr wrap="square" rtlCol="0" anchor="ctr"/>
-          <a:lstStyle/>
-          <a:p>
-            <a:pPr algn="ctr" indent="0" marL="0">
-              <a:buNone/>
-            </a:pPr>
-            <a:r>
-              <a:rPr lang="en-US" sz="4200" b="1" dirty="0">
-                <a:solidFill>
-                  <a:srgbClr val="FFFFFF"/>
-                </a:solidFill>
-                <a:latin typeface="Meiryo" pitchFamily="34" charset="0"/>
-                <a:ea typeface="Meiryo" pitchFamily="34" charset="-122"/>
-                <a:cs typeface="Meiryo" pitchFamily="34" charset="-120"/>
-              </a:rPr>
-              <a:t>100%</a:t>
-            </a:r>
-            <a:endParaRPr lang="en-US" sz="4200" dirty="0"/>
-          </a:p>
-        </p:txBody>
-      </p:sp>
-      <p:sp>
-        <p:nvSpPr>
-          <p:cNvPr id="12" name="Text 10"/>
-          <p:cNvSpPr/>
-          <p:nvPr/>
-        </p:nvSpPr>
-        <p:spPr>
-          <a:xfrm>
-            <a:off x="8321040" y="2880360"/>
-            <a:ext cx="3108960" cy="777240"/>
-          </a:xfrm>
-          <a:prstGeom prst="rect">
-            <a:avLst/>
-          </a:prstGeom>
-          <a:noFill/>
-          <a:ln/>
-        </p:spPr>
-        <p:txBody>
-          <a:bodyPr wrap="square" rtlCol="0" anchor="ctr"/>
-          <a:lstStyle/>
-          <a:p>
-            <a:pPr algn="ctr" indent="0" marL="0">
-              <a:lnSpc>
-                <a:spcPct val="115000"/>
-              </a:lnSpc>
-              <a:buNone/>
-            </a:pPr>
-            <a:r>
-              <a:rPr lang="en-US" sz="1100" dirty="0">
-                <a:solidFill>
-                  <a:srgbClr val="CADCFC"/>
-                </a:solidFill>
-                <a:latin typeface="Meiryo" pitchFamily="34" charset="0"/>
-                <a:ea typeface="Meiryo" pitchFamily="34" charset="-122"/>
-                <a:cs typeface="Meiryo" pitchFamily="34" charset="-120"/>
-              </a:rPr>
-              <a:t>根拠トレーサビリティ</a:t>
-            </a:r>
-            <a:endParaRPr lang="en-US" sz="1100" dirty="0"/>
-          </a:p>
-          <a:p>
-            <a:pPr algn="ctr" indent="0" marL="0">
-              <a:lnSpc>
-                <a:spcPct val="115000"/>
-              </a:lnSpc>
-              <a:buNone/>
-            </a:pPr>
-            <a:r>
-              <a:rPr lang="en-US" sz="1100" dirty="0">
-                <a:solidFill>
-                  <a:srgbClr val="CADCFC"/>
-                </a:solidFill>
-                <a:latin typeface="Meiryo" pitchFamily="34" charset="0"/>
-                <a:ea typeface="Meiryo" pitchFamily="34" charset="-122"/>
-                <a:cs typeface="Meiryo" pitchFamily="34" charset="-120"/>
-              </a:rPr>
-              <a:t>全回答にNotionへの</a:t>
-            </a:r>
-            <a:endParaRPr lang="en-US" sz="1100" dirty="0"/>
-          </a:p>
-          <a:p>
-            <a:pPr algn="ctr" indent="0" marL="0">
-              <a:lnSpc>
-                <a:spcPct val="115000"/>
-              </a:lnSpc>
-              <a:buNone/>
-            </a:pPr>
-            <a:r>
-              <a:rPr lang="en-US" sz="1100" dirty="0">
-                <a:solidFill>
-                  <a:srgbClr val="CADCFC"/>
-                </a:solidFill>
-                <a:latin typeface="Meiryo" pitchFamily="34" charset="0"/>
-                <a:ea typeface="Meiryo" pitchFamily="34" charset="-122"/>
-                <a:cs typeface="Meiryo" pitchFamily="34" charset="-120"/>
-              </a:rPr>
-              <a:t>参照タグ付き</a:t>
-            </a:r>
-            <a:endParaRPr lang="en-US" sz="1100" dirty="0"/>
-          </a:p>
-        </p:txBody>
-      </p:sp>
-      <p:sp>
-        <p:nvSpPr>
-          <p:cNvPr id="13" name="Shape 11"/>
-          <p:cNvSpPr/>
-          <p:nvPr/>
-        </p:nvSpPr>
-        <p:spPr>
-          <a:xfrm>
-            <a:off x="640080" y="4069080"/>
-            <a:ext cx="10881360" cy="2011680"/>
-          </a:xfrm>
-          <a:prstGeom prst="roundRect">
-            <a:avLst>
-              <a:gd name="adj" fmla="val 5455"/>
-            </a:avLst>
-          </a:prstGeom>
-          <a:solidFill>
-            <a:srgbClr val="EDF3FD"/>
-          </a:solidFill>
-          <a:ln/>
-        </p:spPr>
-      </p:sp>
-      <p:sp>
-        <p:nvSpPr>
-          <p:cNvPr id="14" name="Text 12"/>
-          <p:cNvSpPr/>
-          <p:nvPr/>
-        </p:nvSpPr>
-        <p:spPr>
-          <a:xfrm>
-            <a:off x="914400" y="4251960"/>
-            <a:ext cx="10332720" cy="365760"/>
-          </a:xfrm>
-          <a:prstGeom prst="rect">
-            <a:avLst/>
-          </a:prstGeom>
-          <a:noFill/>
-          <a:ln/>
-        </p:spPr>
-        <p:txBody>
-          <a:bodyPr wrap="square" lIns="0" tIns="0" rIns="0" bIns="0" rtlCol="0" anchor="ctr"/>
-          <a:lstStyle/>
-          <a:p>
-            <a:pPr indent="0" marL="0">
-              <a:buNone/>
-            </a:pPr>
-            <a:r>
-              <a:rPr lang="en-US" sz="1400" b="1" dirty="0">
-                <a:solidFill>
-                  <a:srgbClr val="1E2761"/>
-                </a:solidFill>
-                <a:latin typeface="Meiryo" pitchFamily="34" charset="0"/>
-                <a:ea typeface="Meiryo" pitchFamily="34" charset="-122"/>
-                <a:cs typeface="Meiryo" pitchFamily="34" charset="-120"/>
-              </a:rPr>
-              <a:t>検証済みの実出力例（Gemini 実測）</a:t>
-            </a:r>
-            <a:endParaRPr lang="en-US" sz="1400" dirty="0"/>
-          </a:p>
-        </p:txBody>
-      </p:sp>
-      <p:sp>
-        <p:nvSpPr>
-          <p:cNvPr id="15" name="Text 13"/>
-          <p:cNvSpPr/>
-          <p:nvPr/>
-        </p:nvSpPr>
-        <p:spPr>
-          <a:xfrm>
-            <a:off x="914400" y="4709160"/>
-            <a:ext cx="10332720" cy="1188720"/>
-          </a:xfrm>
-          <a:prstGeom prst="rect">
-            <a:avLst/>
-          </a:prstGeom>
-          <a:noFill/>
-          <a:ln/>
-        </p:spPr>
-        <p:txBody>
-          <a:bodyPr wrap="square" lIns="0" tIns="0" rIns="0" bIns="0" rtlCol="0" anchor="ctr"/>
-          <a:lstStyle/>
-          <a:p>
-            <a:pPr indent="0" marL="0">
-              <a:lnSpc>
-                <a:spcPct val="130000"/>
-              </a:lnSpc>
-              <a:buNone/>
-            </a:pPr>
-            <a:r>
-              <a:rPr lang="en-US" sz="1350" dirty="0">
-                <a:solidFill>
-                  <a:srgbClr val="1C2333"/>
-                </a:solidFill>
-                <a:latin typeface="Meiryo" pitchFamily="34" charset="0"/>
-                <a:ea typeface="Meiryo" pitchFamily="34" charset="-122"/>
-                <a:cs typeface="Meiryo" pitchFamily="34" charset="-120"/>
-              </a:rPr>
-              <a:t>議事録・音声メモの投入 → シグナル7件抽出＋因果ストーリー構築　</a:t>
-            </a:r>
-            <a:pPr indent="0" marL="0">
-              <a:lnSpc>
-                <a:spcPct val="130000"/>
-              </a:lnSpc>
-              <a:buNone/>
-            </a:pPr>
-            <a:r>
-              <a:rPr lang="en-US" sz="1350" dirty="0">
-                <a:solidFill>
-                  <a:srgbClr val="5A6474"/>
-                </a:solidFill>
-                <a:latin typeface="Meiryo" pitchFamily="34" charset="0"/>
-                <a:ea typeface="Meiryo" pitchFamily="34" charset="-122"/>
-                <a:cs typeface="Meiryo" pitchFamily="34" charset="-120"/>
-              </a:rPr>
-              <a:t>／　</a:t>
-            </a:r>
-            <a:pPr indent="0" marL="0">
-              <a:lnSpc>
-                <a:spcPct val="130000"/>
-              </a:lnSpc>
-              <a:buNone/>
-            </a:pPr>
-            <a:r>
-              <a:rPr lang="en-US" sz="1350" dirty="0">
-                <a:solidFill>
-                  <a:srgbClr val="1C2333"/>
-                </a:solidFill>
-                <a:latin typeface="Meiryo" pitchFamily="34" charset="0"/>
-                <a:ea typeface="Meiryo" pitchFamily="34" charset="-122"/>
-                <a:cs typeface="Meiryo" pitchFamily="34" charset="-120"/>
-              </a:rPr>
-              <a:t>値引き相談 → 「OK・営業裁量」を根拠付きで即答　</a:t>
-            </a:r>
-            <a:pPr indent="0" marL="0">
-              <a:lnSpc>
-                <a:spcPct val="130000"/>
-              </a:lnSpc>
-              <a:buNone/>
-            </a:pPr>
-            <a:r>
-              <a:rPr lang="en-US" sz="1350" dirty="0">
-                <a:solidFill>
-                  <a:srgbClr val="5A6474"/>
-                </a:solidFill>
-                <a:latin typeface="Meiryo" pitchFamily="34" charset="0"/>
-                <a:ea typeface="Meiryo" pitchFamily="34" charset="-122"/>
-                <a:cs typeface="Meiryo" pitchFamily="34" charset="-120"/>
-              </a:rPr>
-              <a:t>／　</a:t>
-            </a:r>
-            <a:pPr indent="0" marL="0">
-              <a:lnSpc>
-                <a:spcPct val="130000"/>
-              </a:lnSpc>
-              <a:buNone/>
-            </a:pPr>
-            <a:r>
-              <a:rPr lang="en-US" sz="1350" dirty="0">
-                <a:solidFill>
-                  <a:srgbClr val="1C2333"/>
-                </a:solidFill>
-                <a:latin typeface="Meiryo" pitchFamily="34" charset="0"/>
-                <a:ea typeface="Meiryo" pitchFamily="34" charset="-122"/>
-                <a:cs typeface="Meiryo" pitchFamily="34" charset="-120"/>
-              </a:rPr>
-              <a:t>架空候補者の採用評価 → 採用寄り（確信度:高）＋深掘り質問4件</a:t>
-            </a:r>
-            <a:endParaRPr lang="en-US" sz="1350" dirty="0"/>
-          </a:p>
-        </p:txBody>
-      </p:sp>
-      <p:sp>
-        <p:nvSpPr>
-          <p:cNvPr id="16" name="Text 14"/>
-          <p:cNvSpPr/>
-          <p:nvPr/>
-        </p:nvSpPr>
-        <p:spPr>
-          <a:xfrm>
-            <a:off x="640080" y="6217920"/>
-            <a:ext cx="10881360" cy="365760"/>
-          </a:xfrm>
-          <a:prstGeom prst="rect">
-            <a:avLst/>
-          </a:prstGeom>
-          <a:noFill/>
-          <a:ln/>
-        </p:spPr>
-        <p:txBody>
-          <a:bodyPr wrap="square" lIns="0" tIns="0" rIns="0" bIns="0" rtlCol="0" anchor="ctr"/>
-          <a:lstStyle/>
-          <a:p>
-            <a:pPr indent="0" marL="0">
-              <a:buNone/>
-            </a:pPr>
-            <a:r>
-              <a:rPr lang="en-US" sz="1000" dirty="0">
-                <a:solidFill>
-                  <a:srgbClr val="5A6474"/>
-                </a:solidFill>
-                <a:latin typeface="Meiryo" pitchFamily="34" charset="0"/>
-                <a:ea typeface="Meiryo" pitchFamily="34" charset="-122"/>
-                <a:cs typeface="Meiryo" pitchFamily="34" charset="-120"/>
-              </a:rPr>
-              <a:t>※ 公開情報に基づく再現デモであり、本人・楽天グループ公認ではありません。自社導入時は社長本人のプロファイルに差し替えます。</a:t>
-            </a:r>
-            <a:endParaRPr lang="en-US" sz="1000" dirty="0"/>
           </a:p>
         </p:txBody>
       </p:sp>
@@ -6632,7 +5860,7 @@
                 <a:ea typeface="Meiryo" pitchFamily="34" charset="-122"/>
                 <a:cs typeface="Meiryo" pitchFamily="34" charset="-120"/>
               </a:rPr>
-              <a:t>セキュリティとデータ管理</a:t>
+              <a:t>導入プラン — 初日に「実データ一周」まで</a:t>
             </a:r>
             <a:endParaRPr lang="en-US" sz="3200" dirty="0"/>
           </a:p>
@@ -6646,68 +5874,203 @@
         </p:nvSpPr>
         <p:spPr>
           <a:xfrm>
-            <a:off x="731520" y="1627632"/>
-            <a:ext cx="566928" cy="566928"/>
+            <a:off x="731520" y="1709928"/>
+            <a:ext cx="457200" cy="457200"/>
           </a:xfrm>
           <a:prstGeom prst="ellipse">
             <a:avLst/>
           </a:prstGeom>
           <a:solidFill>
+            <a:srgbClr val="1E2761"/>
+          </a:solidFill>
+          <a:ln/>
+        </p:spPr>
+      </p:sp>
+      <p:sp>
+        <p:nvSpPr>
+          <p:cNvPr id="6" name="Text 3"/>
+          <p:cNvSpPr/>
+          <p:nvPr/>
+        </p:nvSpPr>
+        <p:spPr>
+          <a:xfrm>
+            <a:off x="731520" y="1709928"/>
+            <a:ext cx="457200" cy="457200"/>
+          </a:xfrm>
+          <a:prstGeom prst="rect">
+            <a:avLst/>
+          </a:prstGeom>
+          <a:noFill/>
+          <a:ln/>
+        </p:spPr>
+        <p:txBody>
+          <a:bodyPr wrap="square" lIns="0" tIns="0" rIns="0" bIns="0" rtlCol="0" anchor="ctr"/>
+          <a:lstStyle/>
+          <a:p>
+            <a:pPr algn="ctr" indent="0" marL="0">
+              <a:buNone/>
+            </a:pPr>
+            <a:r>
+              <a:rPr lang="en-US" sz="1600" b="1" dirty="0">
+                <a:solidFill>
+                  <a:srgbClr val="FFFFFF"/>
+                </a:solidFill>
+                <a:latin typeface="Meiryo" pitchFamily="34" charset="0"/>
+                <a:ea typeface="Meiryo" pitchFamily="34" charset="-122"/>
+                <a:cs typeface="Meiryo" pitchFamily="34" charset="-120"/>
+              </a:rPr>
+              <a:t>1</a:t>
+            </a:r>
+            <a:endParaRPr lang="en-US" sz="1600" dirty="0"/>
+          </a:p>
+        </p:txBody>
+      </p:sp>
+      <p:sp>
+        <p:nvSpPr>
+          <p:cNvPr id="7" name="Shape 4"/>
+          <p:cNvSpPr/>
+          <p:nvPr/>
+        </p:nvSpPr>
+        <p:spPr>
+          <a:xfrm>
+            <a:off x="932688" y="2203704"/>
+            <a:ext cx="41148" cy="566928"/>
+          </a:xfrm>
+          <a:prstGeom prst="rect">
+            <a:avLst/>
+          </a:prstGeom>
+          <a:solidFill>
+            <a:srgbClr val="CADCFC"/>
+          </a:solidFill>
+          <a:ln/>
+        </p:spPr>
+      </p:sp>
+      <p:sp>
+        <p:nvSpPr>
+          <p:cNvPr id="8" name="Text 5"/>
+          <p:cNvSpPr/>
+          <p:nvPr/>
+        </p:nvSpPr>
+        <p:spPr>
+          <a:xfrm>
+            <a:off x="1463040" y="1618488"/>
+            <a:ext cx="1691640" cy="640080"/>
+          </a:xfrm>
+          <a:prstGeom prst="rect">
+            <a:avLst/>
+          </a:prstGeom>
+          <a:noFill/>
+          <a:ln/>
+        </p:spPr>
+        <p:txBody>
+          <a:bodyPr wrap="square" lIns="0" tIns="0" rIns="0" bIns="0" rtlCol="0" anchor="ctr"/>
+          <a:lstStyle/>
+          <a:p>
+            <a:pPr indent="0" marL="0">
+              <a:buNone/>
+            </a:pPr>
+            <a:r>
+              <a:rPr lang="en-US" sz="1600" b="1" dirty="0">
+                <a:solidFill>
+                  <a:srgbClr val="1E2761"/>
+                </a:solidFill>
+                <a:latin typeface="Meiryo" pitchFamily="34" charset="0"/>
+                <a:ea typeface="Meiryo" pitchFamily="34" charset="-122"/>
+                <a:cs typeface="Meiryo" pitchFamily="34" charset="-120"/>
+              </a:rPr>
+              <a:t>前日まで</a:t>
+            </a:r>
+            <a:endParaRPr lang="en-US" sz="1600" dirty="0"/>
+          </a:p>
+        </p:txBody>
+      </p:sp>
+      <p:sp>
+        <p:nvSpPr>
+          <p:cNvPr id="9" name="Text 6"/>
+          <p:cNvSpPr/>
+          <p:nvPr/>
+        </p:nvSpPr>
+        <p:spPr>
+          <a:xfrm>
+            <a:off x="3200400" y="1618488"/>
+            <a:ext cx="6583680" cy="960120"/>
+          </a:xfrm>
+          <a:prstGeom prst="rect">
+            <a:avLst/>
+          </a:prstGeom>
+          <a:noFill/>
+          <a:ln/>
+        </p:spPr>
+        <p:txBody>
+          <a:bodyPr wrap="square" lIns="0" tIns="0" rIns="0" bIns="0" rtlCol="0" anchor="ctr"/>
+          <a:lstStyle/>
+          <a:p>
+            <a:pPr indent="0" marL="0">
+              <a:buNone/>
+            </a:pPr>
+            <a:r>
+              <a:rPr lang="en-US" sz="1250" dirty="0">
+                <a:solidFill>
+                  <a:srgbClr val="1C2333"/>
+                </a:solidFill>
+                <a:latin typeface="Meiryo" pitchFamily="34" charset="0"/>
+                <a:ea typeface="Meiryo" pitchFamily="34" charset="-122"/>
+                <a:cs typeface="Meiryo" pitchFamily="34" charset="-120"/>
+              </a:rPr>
+              <a:t>ヒアリングシートで社長の価値観・判断ルール・権限委譲ライン・採用基準を言語化（60〜90分）</a:t>
+            </a:r>
+            <a:endParaRPr lang="en-US" sz="1250" dirty="0"/>
+          </a:p>
+        </p:txBody>
+      </p:sp>
+      <p:sp>
+        <p:nvSpPr>
+          <p:cNvPr id="10" name="Shape 7"/>
+          <p:cNvSpPr/>
+          <p:nvPr/>
+        </p:nvSpPr>
+        <p:spPr>
+          <a:xfrm>
+            <a:off x="9921240" y="1664208"/>
+            <a:ext cx="1691640" cy="438912"/>
+          </a:xfrm>
+          <a:prstGeom prst="roundRect">
+            <a:avLst>
+              <a:gd name="adj" fmla="val 20833"/>
+            </a:avLst>
+          </a:prstGeom>
+          <a:solidFill>
             <a:srgbClr val="EDF3FD"/>
           </a:solidFill>
           <a:ln/>
         </p:spPr>
       </p:sp>
-      <p:pic>
-        <p:nvPicPr>
-          <p:cNvPr id="6" name="Image 1" descr="preencoded.png">    </p:cNvPr>
-          <p:cNvPicPr>
-            <a:picLocks noChangeAspect="1"/>
-          </p:cNvPicPr>
-          <p:nvPr/>
-        </p:nvPicPr>
-        <p:blipFill>
-          <a:blip r:embed="rId2"/>
-          <a:stretch>
-            <a:fillRect/>
-          </a:stretch>
-        </p:blipFill>
-        <p:spPr>
-          <a:xfrm>
-            <a:off x="873252" y="1769364"/>
-            <a:ext cx="283464" cy="283464"/>
-          </a:xfrm>
-          <a:prstGeom prst="rect">
-            <a:avLst/>
-          </a:prstGeom>
-        </p:spPr>
-      </p:pic>
-      <p:sp>
-        <p:nvSpPr>
-          <p:cNvPr id="7" name="Text 3"/>
-          <p:cNvSpPr/>
-          <p:nvPr/>
-        </p:nvSpPr>
-        <p:spPr>
-          <a:xfrm>
-            <a:off x="1600200" y="1554480"/>
-            <a:ext cx="9692640" cy="384048"/>
-          </a:xfrm>
-          <a:prstGeom prst="rect">
-            <a:avLst/>
-          </a:prstGeom>
-          <a:noFill/>
-          <a:ln/>
-        </p:spPr>
-        <p:txBody>
-          <a:bodyPr wrap="square" lIns="0" tIns="0" rIns="0" bIns="0" rtlCol="0" anchor="ctr"/>
-          <a:lstStyle/>
-          <a:p>
-            <a:pPr indent="0" marL="0">
-              <a:buNone/>
-            </a:pPr>
-            <a:r>
-              <a:rPr lang="en-US" sz="1700" b="1" dirty="0">
+      <p:sp>
+        <p:nvSpPr>
+          <p:cNvPr id="11" name="Text 8"/>
+          <p:cNvSpPr/>
+          <p:nvPr/>
+        </p:nvSpPr>
+        <p:spPr>
+          <a:xfrm>
+            <a:off x="9921240" y="1664208"/>
+            <a:ext cx="1691640" cy="438912"/>
+          </a:xfrm>
+          <a:prstGeom prst="rect">
+            <a:avLst/>
+          </a:prstGeom>
+          <a:noFill/>
+          <a:ln/>
+        </p:spPr>
+        <p:txBody>
+          <a:bodyPr wrap="square" lIns="0" tIns="0" rIns="0" bIns="0" rtlCol="0" anchor="ctr"/>
+          <a:lstStyle/>
+          <a:p>
+            <a:pPr algn="ctr" indent="0" marL="0">
+              <a:buNone/>
+            </a:pPr>
+            <a:r>
+              <a:rPr lang="en-US" sz="1050" b="1" dirty="0">
                 <a:solidFill>
                   <a:srgbClr val="1E2761"/>
                 </a:solidFill>
@@ -6715,22 +6078,140 @@
                 <a:ea typeface="Meiryo" pitchFamily="34" charset="-122"/>
                 <a:cs typeface="Meiryo" pitchFamily="34" charset="-120"/>
               </a:rPr>
-              <a:t>会社の管理下で完結</a:t>
-            </a:r>
-            <a:endParaRPr lang="en-US" sz="1700" dirty="0"/>
-          </a:p>
-        </p:txBody>
-      </p:sp>
-      <p:sp>
-        <p:nvSpPr>
-          <p:cNvPr id="8" name="Text 4"/>
-          <p:cNvSpPr/>
-          <p:nvPr/>
-        </p:nvSpPr>
-        <p:spPr>
-          <a:xfrm>
-            <a:off x="1600200" y="1956816"/>
-            <a:ext cx="9692640" cy="548640"/>
+              <a:t>準備済み ✓</a:t>
+            </a:r>
+            <a:endParaRPr lang="en-US" sz="1050" dirty="0"/>
+          </a:p>
+        </p:txBody>
+      </p:sp>
+      <p:sp>
+        <p:nvSpPr>
+          <p:cNvPr id="12" name="Shape 9"/>
+          <p:cNvSpPr/>
+          <p:nvPr/>
+        </p:nvSpPr>
+        <p:spPr>
+          <a:xfrm>
+            <a:off x="731520" y="2825496"/>
+            <a:ext cx="457200" cy="457200"/>
+          </a:xfrm>
+          <a:prstGeom prst="ellipse">
+            <a:avLst/>
+          </a:prstGeom>
+          <a:solidFill>
+            <a:srgbClr val="1E2761"/>
+          </a:solidFill>
+          <a:ln/>
+        </p:spPr>
+      </p:sp>
+      <p:sp>
+        <p:nvSpPr>
+          <p:cNvPr id="13" name="Text 10"/>
+          <p:cNvSpPr/>
+          <p:nvPr/>
+        </p:nvSpPr>
+        <p:spPr>
+          <a:xfrm>
+            <a:off x="731520" y="2825496"/>
+            <a:ext cx="457200" cy="457200"/>
+          </a:xfrm>
+          <a:prstGeom prst="rect">
+            <a:avLst/>
+          </a:prstGeom>
+          <a:noFill/>
+          <a:ln/>
+        </p:spPr>
+        <p:txBody>
+          <a:bodyPr wrap="square" lIns="0" tIns="0" rIns="0" bIns="0" rtlCol="0" anchor="ctr"/>
+          <a:lstStyle/>
+          <a:p>
+            <a:pPr algn="ctr" indent="0" marL="0">
+              <a:buNone/>
+            </a:pPr>
+            <a:r>
+              <a:rPr lang="en-US" sz="1600" b="1" dirty="0">
+                <a:solidFill>
+                  <a:srgbClr val="FFFFFF"/>
+                </a:solidFill>
+                <a:latin typeface="Meiryo" pitchFamily="34" charset="0"/>
+                <a:ea typeface="Meiryo" pitchFamily="34" charset="-122"/>
+                <a:cs typeface="Meiryo" pitchFamily="34" charset="-120"/>
+              </a:rPr>
+              <a:t>2</a:t>
+            </a:r>
+            <a:endParaRPr lang="en-US" sz="1600" dirty="0"/>
+          </a:p>
+        </p:txBody>
+      </p:sp>
+      <p:sp>
+        <p:nvSpPr>
+          <p:cNvPr id="14" name="Shape 11"/>
+          <p:cNvSpPr/>
+          <p:nvPr/>
+        </p:nvSpPr>
+        <p:spPr>
+          <a:xfrm>
+            <a:off x="932688" y="3319272"/>
+            <a:ext cx="41148" cy="566928"/>
+          </a:xfrm>
+          <a:prstGeom prst="rect">
+            <a:avLst/>
+          </a:prstGeom>
+          <a:solidFill>
+            <a:srgbClr val="CADCFC"/>
+          </a:solidFill>
+          <a:ln/>
+        </p:spPr>
+      </p:sp>
+      <p:sp>
+        <p:nvSpPr>
+          <p:cNvPr id="15" name="Text 12"/>
+          <p:cNvSpPr/>
+          <p:nvPr/>
+        </p:nvSpPr>
+        <p:spPr>
+          <a:xfrm>
+            <a:off x="1463040" y="2734056"/>
+            <a:ext cx="1691640" cy="640080"/>
+          </a:xfrm>
+          <a:prstGeom prst="rect">
+            <a:avLst/>
+          </a:prstGeom>
+          <a:noFill/>
+          <a:ln/>
+        </p:spPr>
+        <p:txBody>
+          <a:bodyPr wrap="square" lIns="0" tIns="0" rIns="0" bIns="0" rtlCol="0" anchor="ctr"/>
+          <a:lstStyle/>
+          <a:p>
+            <a:pPr indent="0" marL="0">
+              <a:buNone/>
+            </a:pPr>
+            <a:r>
+              <a:rPr lang="en-US" sz="1600" b="1" dirty="0">
+                <a:solidFill>
+                  <a:srgbClr val="1E2761"/>
+                </a:solidFill>
+                <a:latin typeface="Meiryo" pitchFamily="34" charset="0"/>
+                <a:ea typeface="Meiryo" pitchFamily="34" charset="-122"/>
+                <a:cs typeface="Meiryo" pitchFamily="34" charset="-120"/>
+              </a:rPr>
+              <a:t>当日 午前</a:t>
+            </a:r>
+            <a:endParaRPr lang="en-US" sz="1600" dirty="0"/>
+          </a:p>
+        </p:txBody>
+      </p:sp>
+      <p:sp>
+        <p:nvSpPr>
+          <p:cNvPr id="16" name="Text 13"/>
+          <p:cNvSpPr/>
+          <p:nvPr/>
+        </p:nvSpPr>
+        <p:spPr>
+          <a:xfrm>
+            <a:off x="3200400" y="2734056"/>
+            <a:ext cx="6583680" cy="960120"/>
           </a:xfrm>
           <a:prstGeom prst="rect">
             <a:avLst/>
@@ -6748,13 +6229,13 @@
             <a:r>
               <a:rPr lang="en-US" sz="1250" dirty="0">
                 <a:solidFill>
-                  <a:srgbClr val="5A6474"/>
-                </a:solidFill>
-                <a:latin typeface="Meiryo" pitchFamily="34" charset="0"/>
-                <a:ea typeface="Meiryo" pitchFamily="34" charset="-122"/>
-                <a:cs typeface="Meiryo" pitchFamily="34" charset="-120"/>
-              </a:rPr>
-              <a:t>処理は社内のMacで実行。データはNotion（会社ワークスペース）に保存し、メンバー権限で閲覧制御。</a:t>
+                  <a:srgbClr val="1C2333"/>
+                </a:solidFill>
+                <a:latin typeface="Meiryo" pitchFamily="34" charset="0"/>
+                <a:ea typeface="Meiryo" pitchFamily="34" charset="-122"/>
+                <a:cs typeface="Meiryo" pitchFamily="34" charset="-120"/>
+              </a:rPr>
+              <a:t>Mac セットアップ（約30分）→ 環境診断・リハーサルコマンドで全経路を自動チェック → デモ確認</a:t>
             </a:r>
             <a:endParaRPr lang="en-US" sz="1250" dirty="0"/>
           </a:p>
@@ -6762,74 +6243,270 @@
       </p:sp>
       <p:sp>
         <p:nvSpPr>
-          <p:cNvPr id="9" name="Shape 5"/>
-          <p:cNvSpPr/>
-          <p:nvPr/>
-        </p:nvSpPr>
-        <p:spPr>
-          <a:xfrm>
-            <a:off x="731520" y="2798064"/>
-            <a:ext cx="566928" cy="566928"/>
+          <p:cNvPr id="17" name="Shape 14"/>
+          <p:cNvSpPr/>
+          <p:nvPr/>
+        </p:nvSpPr>
+        <p:spPr>
+          <a:xfrm>
+            <a:off x="9921240" y="2779776"/>
+            <a:ext cx="1691640" cy="438912"/>
+          </a:xfrm>
+          <a:prstGeom prst="roundRect">
+            <a:avLst>
+              <a:gd name="adj" fmla="val 20833"/>
+            </a:avLst>
+          </a:prstGeom>
+          <a:solidFill>
+            <a:srgbClr val="EDF3FD"/>
+          </a:solidFill>
+          <a:ln/>
+        </p:spPr>
+      </p:sp>
+      <p:sp>
+        <p:nvSpPr>
+          <p:cNvPr id="18" name="Text 15"/>
+          <p:cNvSpPr/>
+          <p:nvPr/>
+        </p:nvSpPr>
+        <p:spPr>
+          <a:xfrm>
+            <a:off x="9921240" y="2779776"/>
+            <a:ext cx="1691640" cy="438912"/>
+          </a:xfrm>
+          <a:prstGeom prst="rect">
+            <a:avLst/>
+          </a:prstGeom>
+          <a:noFill/>
+          <a:ln/>
+        </p:spPr>
+        <p:txBody>
+          <a:bodyPr wrap="square" lIns="0" tIns="0" rIns="0" bIns="0" rtlCol="0" anchor="ctr"/>
+          <a:lstStyle/>
+          <a:p>
+            <a:pPr algn="ctr" indent="0" marL="0">
+              <a:buNone/>
+            </a:pPr>
+            <a:r>
+              <a:rPr lang="en-US" sz="1050" b="1" dirty="0">
+                <a:solidFill>
+                  <a:srgbClr val="1E2761"/>
+                </a:solidFill>
+                <a:latin typeface="Meiryo" pitchFamily="34" charset="0"/>
+                <a:ea typeface="Meiryo" pitchFamily="34" charset="-122"/>
+                <a:cs typeface="Meiryo" pitchFamily="34" charset="-120"/>
+              </a:rPr>
+              <a:t>Notion DB作成済み ✓</a:t>
+            </a:r>
+            <a:endParaRPr lang="en-US" sz="1050" dirty="0"/>
+          </a:p>
+        </p:txBody>
+      </p:sp>
+      <p:sp>
+        <p:nvSpPr>
+          <p:cNvPr id="19" name="Shape 16"/>
+          <p:cNvSpPr/>
+          <p:nvPr/>
+        </p:nvSpPr>
+        <p:spPr>
+          <a:xfrm>
+            <a:off x="731520" y="3941064"/>
+            <a:ext cx="457200" cy="457200"/>
           </a:xfrm>
           <a:prstGeom prst="ellipse">
             <a:avLst/>
           </a:prstGeom>
           <a:solidFill>
+            <a:srgbClr val="1E2761"/>
+          </a:solidFill>
+          <a:ln/>
+        </p:spPr>
+      </p:sp>
+      <p:sp>
+        <p:nvSpPr>
+          <p:cNvPr id="20" name="Text 17"/>
+          <p:cNvSpPr/>
+          <p:nvPr/>
+        </p:nvSpPr>
+        <p:spPr>
+          <a:xfrm>
+            <a:off x="731520" y="3941064"/>
+            <a:ext cx="457200" cy="457200"/>
+          </a:xfrm>
+          <a:prstGeom prst="rect">
+            <a:avLst/>
+          </a:prstGeom>
+          <a:noFill/>
+          <a:ln/>
+        </p:spPr>
+        <p:txBody>
+          <a:bodyPr wrap="square" lIns="0" tIns="0" rIns="0" bIns="0" rtlCol="0" anchor="ctr"/>
+          <a:lstStyle/>
+          <a:p>
+            <a:pPr algn="ctr" indent="0" marL="0">
+              <a:buNone/>
+            </a:pPr>
+            <a:r>
+              <a:rPr lang="en-US" sz="1600" b="1" dirty="0">
+                <a:solidFill>
+                  <a:srgbClr val="FFFFFF"/>
+                </a:solidFill>
+                <a:latin typeface="Meiryo" pitchFamily="34" charset="0"/>
+                <a:ea typeface="Meiryo" pitchFamily="34" charset="-122"/>
+                <a:cs typeface="Meiryo" pitchFamily="34" charset="-120"/>
+              </a:rPr>
+              <a:t>3</a:t>
+            </a:r>
+            <a:endParaRPr lang="en-US" sz="1600" dirty="0"/>
+          </a:p>
+        </p:txBody>
+      </p:sp>
+      <p:sp>
+        <p:nvSpPr>
+          <p:cNvPr id="21" name="Shape 18"/>
+          <p:cNvSpPr/>
+          <p:nvPr/>
+        </p:nvSpPr>
+        <p:spPr>
+          <a:xfrm>
+            <a:off x="932688" y="4434840"/>
+            <a:ext cx="41148" cy="566928"/>
+          </a:xfrm>
+          <a:prstGeom prst="rect">
+            <a:avLst/>
+          </a:prstGeom>
+          <a:solidFill>
+            <a:srgbClr val="CADCFC"/>
+          </a:solidFill>
+          <a:ln/>
+        </p:spPr>
+      </p:sp>
+      <p:sp>
+        <p:nvSpPr>
+          <p:cNvPr id="22" name="Text 19"/>
+          <p:cNvSpPr/>
+          <p:nvPr/>
+        </p:nvSpPr>
+        <p:spPr>
+          <a:xfrm>
+            <a:off x="1463040" y="3849624"/>
+            <a:ext cx="1691640" cy="640080"/>
+          </a:xfrm>
+          <a:prstGeom prst="rect">
+            <a:avLst/>
+          </a:prstGeom>
+          <a:noFill/>
+          <a:ln/>
+        </p:spPr>
+        <p:txBody>
+          <a:bodyPr wrap="square" lIns="0" tIns="0" rIns="0" bIns="0" rtlCol="0" anchor="ctr"/>
+          <a:lstStyle/>
+          <a:p>
+            <a:pPr indent="0" marL="0">
+              <a:buNone/>
+            </a:pPr>
+            <a:r>
+              <a:rPr lang="en-US" sz="1600" b="1" dirty="0">
+                <a:solidFill>
+                  <a:srgbClr val="1E2761"/>
+                </a:solidFill>
+                <a:latin typeface="Meiryo" pitchFamily="34" charset="0"/>
+                <a:ea typeface="Meiryo" pitchFamily="34" charset="-122"/>
+                <a:cs typeface="Meiryo" pitchFamily="34" charset="-120"/>
+              </a:rPr>
+              <a:t>当日 午後</a:t>
+            </a:r>
+            <a:endParaRPr lang="en-US" sz="1600" dirty="0"/>
+          </a:p>
+        </p:txBody>
+      </p:sp>
+      <p:sp>
+        <p:nvSpPr>
+          <p:cNvPr id="23" name="Text 20"/>
+          <p:cNvSpPr/>
+          <p:nvPr/>
+        </p:nvSpPr>
+        <p:spPr>
+          <a:xfrm>
+            <a:off x="3200400" y="3849624"/>
+            <a:ext cx="6583680" cy="960120"/>
+          </a:xfrm>
+          <a:prstGeom prst="rect">
+            <a:avLst/>
+          </a:prstGeom>
+          <a:noFill/>
+          <a:ln/>
+        </p:spPr>
+        <p:txBody>
+          <a:bodyPr wrap="square" lIns="0" tIns="0" rIns="0" bIns="0" rtlCol="0" anchor="ctr"/>
+          <a:lstStyle/>
+          <a:p>
+            <a:pPr indent="0" marL="0">
+              <a:buNone/>
+            </a:pPr>
+            <a:r>
+              <a:rPr lang="en-US" sz="1250" dirty="0">
+                <a:solidFill>
+                  <a:srgbClr val="1C2333"/>
+                </a:solidFill>
+                <a:latin typeface="Meiryo" pitchFamily="34" charset="0"/>
+                <a:ea typeface="Meiryo" pitchFamily="34" charset="-122"/>
+                <a:cs typeface="Meiryo" pitchFamily="34" charset="-120"/>
+              </a:rPr>
+              <a:t>録音デバイス（Plaud）とLINEから実データを投入 → 取り込み → 実データで即断・壁打ちを体験</a:t>
+            </a:r>
+            <a:endParaRPr lang="en-US" sz="1250" dirty="0"/>
+          </a:p>
+        </p:txBody>
+      </p:sp>
+      <p:sp>
+        <p:nvSpPr>
+          <p:cNvPr id="24" name="Shape 21"/>
+          <p:cNvSpPr/>
+          <p:nvPr/>
+        </p:nvSpPr>
+        <p:spPr>
+          <a:xfrm>
+            <a:off x="9921240" y="3895344"/>
+            <a:ext cx="1691640" cy="438912"/>
+          </a:xfrm>
+          <a:prstGeom prst="roundRect">
+            <a:avLst>
+              <a:gd name="adj" fmla="val 20833"/>
+            </a:avLst>
+          </a:prstGeom>
+          <a:solidFill>
             <a:srgbClr val="EDF3FD"/>
           </a:solidFill>
           <a:ln/>
         </p:spPr>
       </p:sp>
-      <p:pic>
-        <p:nvPicPr>
-          <p:cNvPr id="10" name="Image 2" descr="preencoded.png">    </p:cNvPr>
-          <p:cNvPicPr>
-            <a:picLocks noChangeAspect="1"/>
-          </p:cNvPicPr>
-          <p:nvPr/>
-        </p:nvPicPr>
-        <p:blipFill>
-          <a:blip r:embed="rId3"/>
-          <a:stretch>
-            <a:fillRect/>
-          </a:stretch>
-        </p:blipFill>
-        <p:spPr>
-          <a:xfrm>
-            <a:off x="873252" y="2939796"/>
-            <a:ext cx="283464" cy="283464"/>
-          </a:xfrm>
-          <a:prstGeom prst="rect">
-            <a:avLst/>
-          </a:prstGeom>
-        </p:spPr>
-      </p:pic>
-      <p:sp>
-        <p:nvSpPr>
-          <p:cNvPr id="11" name="Text 6"/>
-          <p:cNvSpPr/>
-          <p:nvPr/>
-        </p:nvSpPr>
-        <p:spPr>
-          <a:xfrm>
-            <a:off x="1600200" y="2724912"/>
-            <a:ext cx="9692640" cy="384048"/>
-          </a:xfrm>
-          <a:prstGeom prst="rect">
-            <a:avLst/>
-          </a:prstGeom>
-          <a:noFill/>
-          <a:ln/>
-        </p:spPr>
-        <p:txBody>
-          <a:bodyPr wrap="square" lIns="0" tIns="0" rIns="0" bIns="0" rtlCol="0" anchor="ctr"/>
-          <a:lstStyle/>
-          <a:p>
-            <a:pPr indent="0" marL="0">
-              <a:buNone/>
-            </a:pPr>
-            <a:r>
-              <a:rPr lang="en-US" sz="1700" b="1" dirty="0">
+      <p:sp>
+        <p:nvSpPr>
+          <p:cNvPr id="25" name="Text 22"/>
+          <p:cNvSpPr/>
+          <p:nvPr/>
+        </p:nvSpPr>
+        <p:spPr>
+          <a:xfrm>
+            <a:off x="9921240" y="3895344"/>
+            <a:ext cx="1691640" cy="438912"/>
+          </a:xfrm>
+          <a:prstGeom prst="rect">
+            <a:avLst/>
+          </a:prstGeom>
+          <a:noFill/>
+          <a:ln/>
+        </p:spPr>
+        <p:txBody>
+          <a:bodyPr wrap="square" lIns="0" tIns="0" rIns="0" bIns="0" rtlCol="0" anchor="ctr"/>
+          <a:lstStyle/>
+          <a:p>
+            <a:pPr algn="ctr" indent="0" marL="0">
+              <a:buNone/>
+            </a:pPr>
+            <a:r>
+              <a:rPr lang="en-US" sz="1050" b="1" dirty="0">
                 <a:solidFill>
                   <a:srgbClr val="1E2761"/>
                 </a:solidFill>
@@ -6837,22 +6514,120 @@
                 <a:ea typeface="Meiryo" pitchFamily="34" charset="-122"/>
                 <a:cs typeface="Meiryo" pitchFamily="34" charset="-120"/>
               </a:rPr>
-              <a:t>候補者情報は学習させない</a:t>
-            </a:r>
-            <a:endParaRPr lang="en-US" sz="1700" dirty="0"/>
-          </a:p>
-        </p:txBody>
-      </p:sp>
-      <p:sp>
-        <p:nvSpPr>
-          <p:cNvPr id="12" name="Text 7"/>
-          <p:cNvSpPr/>
-          <p:nvPr/>
-        </p:nvSpPr>
-        <p:spPr>
-          <a:xfrm>
-            <a:off x="1600200" y="3127248"/>
-            <a:ext cx="9692640" cy="548640"/>
+              <a:t>ランブック準備済み ✓</a:t>
+            </a:r>
+            <a:endParaRPr lang="en-US" sz="1050" dirty="0"/>
+          </a:p>
+        </p:txBody>
+      </p:sp>
+      <p:sp>
+        <p:nvSpPr>
+          <p:cNvPr id="26" name="Shape 23"/>
+          <p:cNvSpPr/>
+          <p:nvPr/>
+        </p:nvSpPr>
+        <p:spPr>
+          <a:xfrm>
+            <a:off x="731520" y="5056632"/>
+            <a:ext cx="457200" cy="457200"/>
+          </a:xfrm>
+          <a:prstGeom prst="ellipse">
+            <a:avLst/>
+          </a:prstGeom>
+          <a:solidFill>
+            <a:srgbClr val="1E2761"/>
+          </a:solidFill>
+          <a:ln/>
+        </p:spPr>
+      </p:sp>
+      <p:sp>
+        <p:nvSpPr>
+          <p:cNvPr id="27" name="Text 24"/>
+          <p:cNvSpPr/>
+          <p:nvPr/>
+        </p:nvSpPr>
+        <p:spPr>
+          <a:xfrm>
+            <a:off x="731520" y="5056632"/>
+            <a:ext cx="457200" cy="457200"/>
+          </a:xfrm>
+          <a:prstGeom prst="rect">
+            <a:avLst/>
+          </a:prstGeom>
+          <a:noFill/>
+          <a:ln/>
+        </p:spPr>
+        <p:txBody>
+          <a:bodyPr wrap="square" lIns="0" tIns="0" rIns="0" bIns="0" rtlCol="0" anchor="ctr"/>
+          <a:lstStyle/>
+          <a:p>
+            <a:pPr algn="ctr" indent="0" marL="0">
+              <a:buNone/>
+            </a:pPr>
+            <a:r>
+              <a:rPr lang="en-US" sz="1600" b="1" dirty="0">
+                <a:solidFill>
+                  <a:srgbClr val="FFFFFF"/>
+                </a:solidFill>
+                <a:latin typeface="Meiryo" pitchFamily="34" charset="0"/>
+                <a:ea typeface="Meiryo" pitchFamily="34" charset="-122"/>
+                <a:cs typeface="Meiryo" pitchFamily="34" charset="-120"/>
+              </a:rPr>
+              <a:t>4</a:t>
+            </a:r>
+            <a:endParaRPr lang="en-US" sz="1600" dirty="0"/>
+          </a:p>
+        </p:txBody>
+      </p:sp>
+      <p:sp>
+        <p:nvSpPr>
+          <p:cNvPr id="28" name="Text 25"/>
+          <p:cNvSpPr/>
+          <p:nvPr/>
+        </p:nvSpPr>
+        <p:spPr>
+          <a:xfrm>
+            <a:off x="1463040" y="4965192"/>
+            <a:ext cx="1691640" cy="640080"/>
+          </a:xfrm>
+          <a:prstGeom prst="rect">
+            <a:avLst/>
+          </a:prstGeom>
+          <a:noFill/>
+          <a:ln/>
+        </p:spPr>
+        <p:txBody>
+          <a:bodyPr wrap="square" lIns="0" tIns="0" rIns="0" bIns="0" rtlCol="0" anchor="ctr"/>
+          <a:lstStyle/>
+          <a:p>
+            <a:pPr indent="0" marL="0">
+              <a:buNone/>
+            </a:pPr>
+            <a:r>
+              <a:rPr lang="en-US" sz="1600" b="1" dirty="0">
+                <a:solidFill>
+                  <a:srgbClr val="1E2761"/>
+                </a:solidFill>
+                <a:latin typeface="Meiryo" pitchFamily="34" charset="0"/>
+                <a:ea typeface="Meiryo" pitchFamily="34" charset="-122"/>
+                <a:cs typeface="Meiryo" pitchFamily="34" charset="-120"/>
+              </a:rPr>
+              <a:t>今週中</a:t>
+            </a:r>
+            <a:endParaRPr lang="en-US" sz="1600" dirty="0"/>
+          </a:p>
+        </p:txBody>
+      </p:sp>
+      <p:sp>
+        <p:nvSpPr>
+          <p:cNvPr id="29" name="Text 26"/>
+          <p:cNvSpPr/>
+          <p:nvPr/>
+        </p:nvSpPr>
+        <p:spPr>
+          <a:xfrm>
+            <a:off x="3200400" y="4965192"/>
+            <a:ext cx="6583680" cy="960120"/>
           </a:xfrm>
           <a:prstGeom prst="rect">
             <a:avLst/>
@@ -6870,13 +6645,13 @@
             <a:r>
               <a:rPr lang="en-US" sz="1250" dirty="0">
                 <a:solidFill>
-                  <a:srgbClr val="5A6474"/>
-                </a:solidFill>
-                <a:latin typeface="Meiryo" pitchFamily="34" charset="0"/>
-                <a:ea typeface="Meiryo" pitchFamily="34" charset="-122"/>
-                <a:cs typeface="Meiryo" pitchFamily="34" charset="-120"/>
-              </a:rPr>
-              <a:t>採用モードの入力（履歴書・面接メモ）はDBに保存せず、他の回答に混入しない設計。</a:t>
+                  <a:srgbClr val="1C2333"/>
+                </a:solidFill>
+                <a:latin typeface="Meiryo" pitchFamily="34" charset="0"/>
+                <a:ea typeface="Meiryo" pitchFamily="34" charset="-122"/>
+                <a:cs typeface="Meiryo" pitchFamily="34" charset="-120"/>
+              </a:rPr>
+              <a:t>日次・週次の自動実行を設定 → Vertex AI・会社アカウントへ段階移行 → 本格運用開始</a:t>
             </a:r>
             <a:endParaRPr lang="en-US" sz="1250" dirty="0"/>
           </a:p>
@@ -6884,17 +6659,19 @@
       </p:sp>
       <p:sp>
         <p:nvSpPr>
-          <p:cNvPr id="13" name="Shape 8"/>
-          <p:cNvSpPr/>
-          <p:nvPr/>
-        </p:nvSpPr>
-        <p:spPr>
-          <a:xfrm>
-            <a:off x="731520" y="3968496"/>
-            <a:ext cx="566928" cy="566928"/>
-          </a:xfrm>
-          <a:prstGeom prst="ellipse">
-            <a:avLst/>
+          <p:cNvPr id="30" name="Shape 27"/>
+          <p:cNvSpPr/>
+          <p:nvPr/>
+        </p:nvSpPr>
+        <p:spPr>
+          <a:xfrm>
+            <a:off x="9921240" y="5010912"/>
+            <a:ext cx="1691640" cy="438912"/>
+          </a:xfrm>
+          <a:prstGeom prst="roundRect">
+            <a:avLst>
+              <a:gd name="adj" fmla="val 20833"/>
+            </a:avLst>
           </a:prstGeom>
           <a:solidFill>
             <a:srgbClr val="EDF3FD"/>
@@ -6902,56 +6679,32 @@
           <a:ln/>
         </p:spPr>
       </p:sp>
-      <p:pic>
-        <p:nvPicPr>
-          <p:cNvPr id="14" name="Image 3" descr="preencoded.png">    </p:cNvPr>
-          <p:cNvPicPr>
-            <a:picLocks noChangeAspect="1"/>
-          </p:cNvPicPr>
-          <p:nvPr/>
-        </p:nvPicPr>
-        <p:blipFill>
-          <a:blip r:embed="rId4"/>
-          <a:stretch>
-            <a:fillRect/>
-          </a:stretch>
-        </p:blipFill>
-        <p:spPr>
-          <a:xfrm>
-            <a:off x="873252" y="4110228"/>
-            <a:ext cx="283464" cy="283464"/>
-          </a:xfrm>
-          <a:prstGeom prst="rect">
-            <a:avLst/>
-          </a:prstGeom>
-        </p:spPr>
-      </p:pic>
-      <p:sp>
-        <p:nvSpPr>
-          <p:cNvPr id="15" name="Text 9"/>
-          <p:cNvSpPr/>
-          <p:nvPr/>
-        </p:nvSpPr>
-        <p:spPr>
-          <a:xfrm>
-            <a:off x="1600200" y="3895344"/>
-            <a:ext cx="9692640" cy="384048"/>
-          </a:xfrm>
-          <a:prstGeom prst="rect">
-            <a:avLst/>
-          </a:prstGeom>
-          <a:noFill/>
-          <a:ln/>
-        </p:spPr>
-        <p:txBody>
-          <a:bodyPr wrap="square" lIns="0" tIns="0" rIns="0" bIns="0" rtlCol="0" anchor="ctr"/>
-          <a:lstStyle/>
-          <a:p>
-            <a:pPr indent="0" marL="0">
-              <a:buNone/>
-            </a:pPr>
-            <a:r>
-              <a:rPr lang="en-US" sz="1700" b="1" dirty="0">
+      <p:sp>
+        <p:nvSpPr>
+          <p:cNvPr id="31" name="Text 28"/>
+          <p:cNvSpPr/>
+          <p:nvPr/>
+        </p:nvSpPr>
+        <p:spPr>
+          <a:xfrm>
+            <a:off x="9921240" y="5010912"/>
+            <a:ext cx="1691640" cy="438912"/>
+          </a:xfrm>
+          <a:prstGeom prst="rect">
+            <a:avLst/>
+          </a:prstGeom>
+          <a:noFill/>
+          <a:ln/>
+        </p:spPr>
+        <p:txBody>
+          <a:bodyPr wrap="square" lIns="0" tIns="0" rIns="0" bIns="0" rtlCol="0" anchor="ctr"/>
+          <a:lstStyle/>
+          <a:p>
+            <a:pPr algn="ctr" indent="0" marL="0">
+              <a:buNone/>
+            </a:pPr>
+            <a:r>
+              <a:rPr lang="en-US" sz="1050" b="1" dirty="0">
                 <a:solidFill>
                   <a:srgbClr val="1E2761"/>
                 </a:solidFill>
@@ -6959,121 +6712,38 @@
                 <a:ea typeface="Meiryo" pitchFamily="34" charset="-122"/>
                 <a:cs typeface="Meiryo" pitchFamily="34" charset="-120"/>
               </a:rPr>
-              <a:t>AIへのデータの渡し方も選べる</a:t>
-            </a:r>
-            <a:endParaRPr lang="en-US" sz="1700" dirty="0"/>
-          </a:p>
-        </p:txBody>
-      </p:sp>
-      <p:sp>
-        <p:nvSpPr>
-          <p:cNvPr id="16" name="Text 10"/>
-          <p:cNvSpPr/>
-          <p:nvPr/>
-        </p:nvSpPr>
-        <p:spPr>
-          <a:xfrm>
-            <a:off x="1600200" y="4297680"/>
-            <a:ext cx="9692640" cy="548640"/>
-          </a:xfrm>
-          <a:prstGeom prst="rect">
-            <a:avLst/>
-          </a:prstGeom>
-          <a:noFill/>
-          <a:ln/>
-        </p:spPr>
-        <p:txBody>
-          <a:bodyPr wrap="square" lIns="0" tIns="0" rIns="0" bIns="0" rtlCol="0" anchor="ctr"/>
-          <a:lstStyle/>
-          <a:p>
-            <a:pPr indent="0" marL="0">
-              <a:buNone/>
-            </a:pPr>
-            <a:r>
-              <a:rPr lang="en-US" sz="1250" dirty="0">
-                <a:solidFill>
-                  <a:srgbClr val="5A6474"/>
-                </a:solidFill>
-                <a:latin typeface="Meiryo" pitchFamily="34" charset="0"/>
-                <a:ea typeface="Meiryo" pitchFamily="34" charset="-122"/>
-                <a:cs typeface="Meiryo" pitchFamily="34" charset="-120"/>
-              </a:rPr>
-              <a:t>本格運用では Vertex AI（自社GCP）に切替可能 — 入力データはモデル学習に使われず自社クラウド内に留まる。</a:t>
-            </a:r>
-            <a:endParaRPr lang="en-US" sz="1250" dirty="0"/>
-          </a:p>
-        </p:txBody>
-      </p:sp>
-      <p:sp>
-        <p:nvSpPr>
-          <p:cNvPr id="17" name="Shape 11"/>
-          <p:cNvSpPr/>
-          <p:nvPr/>
-        </p:nvSpPr>
-        <p:spPr>
-          <a:xfrm>
-            <a:off x="731520" y="5138928"/>
-            <a:ext cx="566928" cy="566928"/>
-          </a:xfrm>
-          <a:prstGeom prst="ellipse">
-            <a:avLst/>
-          </a:prstGeom>
-          <a:solidFill>
-            <a:srgbClr val="EDF3FD"/>
-          </a:solidFill>
-          <a:ln/>
-        </p:spPr>
-      </p:sp>
-      <p:pic>
-        <p:nvPicPr>
-          <p:cNvPr id="18" name="Image 4" descr="preencoded.png">    </p:cNvPr>
-          <p:cNvPicPr>
-            <a:picLocks noChangeAspect="1"/>
-          </p:cNvPicPr>
-          <p:nvPr/>
-        </p:nvPicPr>
-        <p:blipFill>
-          <a:blip r:embed="rId5"/>
-          <a:stretch>
-            <a:fillRect/>
-          </a:stretch>
-        </p:blipFill>
-        <p:spPr>
-          <a:xfrm>
-            <a:off x="873252" y="5280660"/>
-            <a:ext cx="283464" cy="283464"/>
-          </a:xfrm>
-          <a:prstGeom prst="rect">
-            <a:avLst/>
-          </a:prstGeom>
-        </p:spPr>
-      </p:pic>
-      <p:sp>
-        <p:nvSpPr>
-          <p:cNvPr id="19" name="Text 12"/>
-          <p:cNvSpPr/>
-          <p:nvPr/>
-        </p:nvSpPr>
-        <p:spPr>
-          <a:xfrm>
-            <a:off x="1600200" y="5065776"/>
-            <a:ext cx="9692640" cy="384048"/>
-          </a:xfrm>
-          <a:prstGeom prst="rect">
-            <a:avLst/>
-          </a:prstGeom>
-          <a:noFill/>
-          <a:ln/>
-        </p:spPr>
-        <p:txBody>
-          <a:bodyPr wrap="square" lIns="0" tIns="0" rIns="0" bIns="0" rtlCol="0" anchor="ctr"/>
-          <a:lstStyle/>
-          <a:p>
-            <a:pPr indent="0" marL="0">
-              <a:buNone/>
-            </a:pPr>
-            <a:r>
-              <a:rPr lang="en-US" sz="1700" b="1" dirty="0">
+              <a:t>手順書準備済み ✓</a:t>
+            </a:r>
+            <a:endParaRPr lang="en-US" sz="1050" dirty="0"/>
+          </a:p>
+        </p:txBody>
+      </p:sp>
+      <p:sp>
+        <p:nvSpPr>
+          <p:cNvPr id="32" name="Text 29"/>
+          <p:cNvSpPr/>
+          <p:nvPr/>
+        </p:nvSpPr>
+        <p:spPr>
+          <a:xfrm>
+            <a:off x="640080" y="6172200"/>
+            <a:ext cx="10881360" cy="457200"/>
+          </a:xfrm>
+          <a:prstGeom prst="rect">
+            <a:avLst/>
+          </a:prstGeom>
+          <a:noFill/>
+          <a:ln/>
+        </p:spPr>
+        <p:txBody>
+          <a:bodyPr wrap="square" lIns="0" tIns="0" rIns="0" bIns="0" rtlCol="0" anchor="ctr"/>
+          <a:lstStyle/>
+          <a:p>
+            <a:pPr indent="0" marL="0">
+              <a:buNone/>
+            </a:pPr>
+            <a:r>
+              <a:rPr lang="en-US" sz="1300" b="1" dirty="0">
                 <a:solidFill>
                   <a:srgbClr val="1E2761"/>
                 </a:solidFill>
@@ -7081,87 +6751,23 @@
                 <a:ea typeface="Meiryo" pitchFamily="34" charset="-122"/>
                 <a:cs typeface="Meiryo" pitchFamily="34" charset="-120"/>
               </a:rPr>
-              <a:t>属人化しないアカウント設計</a:t>
-            </a:r>
-            <a:endParaRPr lang="en-US" sz="1700" dirty="0"/>
-          </a:p>
-        </p:txBody>
-      </p:sp>
-      <p:sp>
-        <p:nvSpPr>
-          <p:cNvPr id="20" name="Text 13"/>
-          <p:cNvSpPr/>
-          <p:nvPr/>
-        </p:nvSpPr>
-        <p:spPr>
-          <a:xfrm>
-            <a:off x="1600200" y="5468112"/>
-            <a:ext cx="9692640" cy="548640"/>
-          </a:xfrm>
-          <a:prstGeom prst="rect">
-            <a:avLst/>
-          </a:prstGeom>
-          <a:noFill/>
-          <a:ln/>
-        </p:spPr>
-        <p:txBody>
-          <a:bodyPr wrap="square" lIns="0" tIns="0" rIns="0" bIns="0" rtlCol="0" anchor="ctr"/>
-          <a:lstStyle/>
-          <a:p>
-            <a:pPr indent="0" marL="0">
-              <a:buNone/>
-            </a:pPr>
-            <a:r>
-              <a:rPr lang="en-US" sz="1250" dirty="0">
-                <a:solidFill>
-                  <a:srgbClr val="5A6474"/>
-                </a:solidFill>
-                <a:latin typeface="Meiryo" pitchFamily="34" charset="0"/>
-                <a:ea typeface="Meiryo" pitchFamily="34" charset="-122"/>
-                <a:cs typeface="Meiryo" pitchFamily="34" charset="-120"/>
-              </a:rPr>
-              <a:t>キー・DB・コードは会社アカウントに統一（LINEのみ個人が必然）。退職や不在でシステムが止まらない。</a:t>
-            </a:r>
-            <a:endParaRPr lang="en-US" sz="1250" dirty="0"/>
-          </a:p>
-        </p:txBody>
-      </p:sp>
-      <p:sp>
-        <p:nvSpPr>
-          <p:cNvPr id="21" name="Text 14"/>
-          <p:cNvSpPr/>
-          <p:nvPr/>
-        </p:nvSpPr>
-        <p:spPr>
-          <a:xfrm>
-            <a:off x="640080" y="6263640"/>
-            <a:ext cx="10881360" cy="365760"/>
-          </a:xfrm>
-          <a:prstGeom prst="rect">
-            <a:avLst/>
-          </a:prstGeom>
-          <a:noFill/>
-          <a:ln/>
-        </p:spPr>
-        <p:txBody>
-          <a:bodyPr wrap="square" lIns="0" tIns="0" rIns="0" bIns="0" rtlCol="0" anchor="ctr"/>
-          <a:lstStyle/>
-          <a:p>
-            <a:pPr indent="0" marL="0">
-              <a:buNone/>
-            </a:pPr>
-            <a:r>
-              <a:rPr lang="en-US" sz="1100" i="1" dirty="0">
-                <a:solidFill>
-                  <a:srgbClr val="5A6474"/>
-                </a:solidFill>
-                <a:latin typeface="Meiryo" pitchFamily="34" charset="0"/>
-                <a:ea typeface="Meiryo" pitchFamily="34" charset="-122"/>
-                <a:cs typeface="Meiryo" pitchFamily="34" charset="-120"/>
-              </a:rPr>
-              <a:t>経営者本人の同意と継続的な協力（録音・データ提供）が前提です。AIの回答は参考情報であり、最終判断は人が行います。</a:t>
-            </a:r>
-            <a:endParaRPr lang="en-US" sz="1100" dirty="0"/>
+              <a:t>費用: </a:t>
+            </a:r>
+            <a:pPr indent="0" marL="0">
+              <a:buNone/>
+            </a:pPr>
+            <a:r>
+              <a:rPr lang="en-US" sz="1300" dirty="0">
+                <a:solidFill>
+                  <a:srgbClr val="1C2333"/>
+                </a:solidFill>
+                <a:latin typeface="Meiryo" pitchFamily="34" charset="0"/>
+                <a:ea typeface="Meiryo" pitchFamily="34" charset="-122"/>
+                <a:cs typeface="Meiryo" pitchFamily="34" charset="-120"/>
+              </a:rPr>
+              <a:t>AI利用料は無料枠から開始可能。追加の主要コストは Notion 有料プラン（複数人利用時）と録音デバイス実費のみ。</a:t>
+            </a:r>
+            <a:endParaRPr lang="en-US" sz="1300" dirty="0"/>
           </a:p>
         </p:txBody>
       </p:sp>
@@ -7179,7 +6785,7 @@
     <p:bg>
       <p:bgPr>
         <a:solidFill>
-          <a:srgbClr val="FFFFFF"/>
+          <a:srgbClr val="1E2761"/>
         </a:solidFill>
       </p:bgPr>
     </p:bg>
@@ -7205,21 +6811,102 @@
         </p:nvSpPr>
         <p:spPr>
           <a:xfrm>
-            <a:off x="640080" y="502920"/>
+            <a:off x="10241280" y="4480560"/>
+            <a:ext cx="3291840" cy="3291840"/>
+          </a:xfrm>
+          <a:prstGeom prst="ellipse">
+            <a:avLst/>
+          </a:prstGeom>
+          <a:solidFill>
+            <a:srgbClr val="2A3575"/>
+          </a:solidFill>
+          <a:ln/>
+        </p:spPr>
+      </p:sp>
+      <p:sp>
+        <p:nvSpPr>
+          <p:cNvPr id="3" name="Text 1"/>
+          <p:cNvSpPr/>
+          <p:nvPr/>
+        </p:nvSpPr>
+        <p:spPr>
+          <a:xfrm>
+            <a:off x="822960" y="777240"/>
+            <a:ext cx="10515600" cy="914400"/>
+          </a:xfrm>
+          <a:prstGeom prst="rect">
+            <a:avLst/>
+          </a:prstGeom>
+          <a:noFill/>
+          <a:ln/>
+        </p:spPr>
+        <p:txBody>
+          <a:bodyPr wrap="square" lIns="0" tIns="0" rIns="0" bIns="0" rtlCol="0" anchor="ctr"/>
+          <a:lstStyle/>
+          <a:p>
+            <a:pPr indent="0" marL="0">
+              <a:buNone/>
+            </a:pPr>
+            <a:r>
+              <a:rPr lang="en-US" sz="4400" b="1" dirty="0">
+                <a:solidFill>
+                  <a:srgbClr val="FFFFFF"/>
+                </a:solidFill>
+                <a:latin typeface="Meiryo" pitchFamily="34" charset="0"/>
+                <a:ea typeface="Meiryo" pitchFamily="34" charset="-122"/>
+                <a:cs typeface="Meiryo" pitchFamily="34" charset="-120"/>
+              </a:rPr>
+              <a:t>待たない現場へ。</a:t>
+            </a:r>
+            <a:endParaRPr lang="en-US" sz="4400" dirty="0"/>
+          </a:p>
+        </p:txBody>
+      </p:sp>
+      <p:sp>
+        <p:nvSpPr>
+          <p:cNvPr id="4" name="Shape 2"/>
+          <p:cNvSpPr/>
+          <p:nvPr/>
+        </p:nvSpPr>
+        <p:spPr>
+          <a:xfrm>
+            <a:off x="822960" y="2011680"/>
+            <a:ext cx="3383280" cy="2651760"/>
+          </a:xfrm>
+          <a:prstGeom prst="roundRect">
+            <a:avLst>
+              <a:gd name="adj" fmla="val 4138"/>
+            </a:avLst>
+          </a:prstGeom>
+          <a:solidFill>
+            <a:srgbClr val="2A3575"/>
+          </a:solidFill>
+          <a:ln/>
+        </p:spPr>
+      </p:sp>
+      <p:sp>
+        <p:nvSpPr>
+          <p:cNvPr id="5" name="Shape 3"/>
+          <p:cNvSpPr/>
+          <p:nvPr/>
+        </p:nvSpPr>
+        <p:spPr>
+          <a:xfrm>
+            <a:off x="1143000" y="2331720"/>
             <a:ext cx="685800" cy="685800"/>
           </a:xfrm>
           <a:prstGeom prst="ellipse">
             <a:avLst/>
           </a:prstGeom>
           <a:solidFill>
-            <a:srgbClr val="1E2761"/>
+            <a:srgbClr val="CADCFC"/>
           </a:solidFill>
           <a:ln/>
         </p:spPr>
       </p:sp>
       <p:pic>
         <p:nvPicPr>
-          <p:cNvPr id="3" name="Image 0" descr="preencoded.png">    </p:cNvPr>
+          <p:cNvPr id="6" name="Image 0" descr="preencoded.png">    </p:cNvPr>
           <p:cNvPicPr>
             <a:picLocks noChangeAspect="1"/>
           </p:cNvPicPr>
@@ -7233,7 +6920,7 @@
         </p:blipFill>
         <p:spPr>
           <a:xfrm>
-            <a:off x="811530" y="674370"/>
+            <a:off x="1314450" y="2503170"/>
             <a:ext cx="342900" cy="342900"/>
           </a:xfrm>
           <a:prstGeom prst="rect">
@@ -7243,89 +6930,30 @@
       </p:pic>
       <p:sp>
         <p:nvSpPr>
-          <p:cNvPr id="4" name="Text 1"/>
-          <p:cNvSpPr/>
-          <p:nvPr/>
-        </p:nvSpPr>
-        <p:spPr>
-          <a:xfrm>
-            <a:off x="1508760" y="566928"/>
-            <a:ext cx="9601200" cy="594360"/>
-          </a:xfrm>
-          <a:prstGeom prst="rect">
-            <a:avLst/>
-          </a:prstGeom>
-          <a:noFill/>
-          <a:ln/>
-        </p:spPr>
-        <p:txBody>
-          <a:bodyPr wrap="square" lIns="0" tIns="0" rIns="0" bIns="0" rtlCol="0" anchor="ctr"/>
-          <a:lstStyle/>
-          <a:p>
-            <a:pPr indent="0" marL="0">
-              <a:buNone/>
-            </a:pPr>
-            <a:r>
-              <a:rPr lang="en-US" sz="3200" b="1" dirty="0">
-                <a:solidFill>
-                  <a:srgbClr val="1C2333"/>
-                </a:solidFill>
-                <a:latin typeface="Meiryo" pitchFamily="34" charset="0"/>
-                <a:ea typeface="Meiryo" pitchFamily="34" charset="-122"/>
-                <a:cs typeface="Meiryo" pitchFamily="34" charset="-120"/>
-              </a:rPr>
-              <a:t>導入プラン — 初日に「実データ一周」まで</a:t>
-            </a:r>
-            <a:endParaRPr lang="en-US" sz="3200" dirty="0"/>
-          </a:p>
-        </p:txBody>
-      </p:sp>
-      <p:sp>
-        <p:nvSpPr>
-          <p:cNvPr id="5" name="Shape 2"/>
-          <p:cNvSpPr/>
-          <p:nvPr/>
-        </p:nvSpPr>
-        <p:spPr>
-          <a:xfrm>
-            <a:off x="731520" y="1709928"/>
-            <a:ext cx="457200" cy="457200"/>
-          </a:xfrm>
-          <a:prstGeom prst="ellipse">
-            <a:avLst/>
-          </a:prstGeom>
-          <a:solidFill>
-            <a:srgbClr val="1E2761"/>
-          </a:solidFill>
-          <a:ln/>
-        </p:spPr>
-      </p:sp>
-      <p:sp>
-        <p:nvSpPr>
-          <p:cNvPr id="6" name="Text 3"/>
-          <p:cNvSpPr/>
-          <p:nvPr/>
-        </p:nvSpPr>
-        <p:spPr>
-          <a:xfrm>
-            <a:off x="731520" y="1709928"/>
-            <a:ext cx="457200" cy="457200"/>
-          </a:xfrm>
-          <a:prstGeom prst="rect">
-            <a:avLst/>
-          </a:prstGeom>
-          <a:noFill/>
-          <a:ln/>
-        </p:spPr>
-        <p:txBody>
-          <a:bodyPr wrap="square" lIns="0" tIns="0" rIns="0" bIns="0" rtlCol="0" anchor="ctr"/>
-          <a:lstStyle/>
-          <a:p>
-            <a:pPr algn="ctr" indent="0" marL="0">
-              <a:buNone/>
-            </a:pPr>
-            <a:r>
-              <a:rPr lang="en-US" sz="1600" b="1" dirty="0">
+          <p:cNvPr id="7" name="Text 4"/>
+          <p:cNvSpPr/>
+          <p:nvPr/>
+        </p:nvSpPr>
+        <p:spPr>
+          <a:xfrm>
+            <a:off x="1143000" y="3200400"/>
+            <a:ext cx="2743200" cy="685800"/>
+          </a:xfrm>
+          <a:prstGeom prst="rect">
+            <a:avLst/>
+          </a:prstGeom>
+          <a:noFill/>
+          <a:ln/>
+        </p:spPr>
+        <p:txBody>
+          <a:bodyPr wrap="square" lIns="0" tIns="0" rIns="0" bIns="0" rtlCol="0" anchor="ctr"/>
+          <a:lstStyle/>
+          <a:p>
+            <a:pPr indent="0" marL="0">
+              <a:buNone/>
+            </a:pPr>
+            <a:r>
+              <a:rPr lang="en-US" sz="1700" b="1" dirty="0">
                 <a:solidFill>
                   <a:srgbClr val="FFFFFF"/>
                 </a:solidFill>
@@ -7333,31 +6961,11 @@
                 <a:ea typeface="Meiryo" pitchFamily="34" charset="-122"/>
                 <a:cs typeface="Meiryo" pitchFamily="34" charset="-120"/>
               </a:rPr>
-              <a:t>1</a:t>
-            </a:r>
-            <a:endParaRPr lang="en-US" sz="1600" dirty="0"/>
-          </a:p>
-        </p:txBody>
-      </p:sp>
-      <p:sp>
-        <p:nvSpPr>
-          <p:cNvPr id="7" name="Shape 4"/>
-          <p:cNvSpPr/>
-          <p:nvPr/>
-        </p:nvSpPr>
-        <p:spPr>
-          <a:xfrm>
-            <a:off x="932688" y="2203704"/>
-            <a:ext cx="41148" cy="566928"/>
-          </a:xfrm>
-          <a:prstGeom prst="rect">
-            <a:avLst/>
-          </a:prstGeom>
-          <a:solidFill>
-            <a:srgbClr val="CADCFC"/>
-          </a:solidFill>
-          <a:ln/>
-        </p:spPr>
+              <a:t>意思決定が速くなる</a:t>
+            </a:r>
+            <a:endParaRPr lang="en-US" sz="1700" dirty="0"/>
+          </a:p>
+        </p:txBody>
       </p:sp>
       <p:sp>
         <p:nvSpPr>
@@ -7367,183 +6975,129 @@
         </p:nvSpPr>
         <p:spPr>
           <a:xfrm>
-            <a:off x="1463040" y="1618488"/>
-            <a:ext cx="1691640" cy="640080"/>
-          </a:xfrm>
-          <a:prstGeom prst="rect">
-            <a:avLst/>
-          </a:prstGeom>
-          <a:noFill/>
-          <a:ln/>
-        </p:spPr>
-        <p:txBody>
-          <a:bodyPr wrap="square" lIns="0" tIns="0" rIns="0" bIns="0" rtlCol="0" anchor="ctr"/>
-          <a:lstStyle/>
-          <a:p>
-            <a:pPr indent="0" marL="0">
-              <a:buNone/>
-            </a:pPr>
-            <a:r>
-              <a:rPr lang="en-US" sz="1600" b="1" dirty="0">
-                <a:solidFill>
-                  <a:srgbClr val="1E2761"/>
-                </a:solidFill>
-                <a:latin typeface="Meiryo" pitchFamily="34" charset="0"/>
-                <a:ea typeface="Meiryo" pitchFamily="34" charset="-122"/>
-                <a:cs typeface="Meiryo" pitchFamily="34" charset="-120"/>
-              </a:rPr>
-              <a:t>前日まで</a:t>
-            </a:r>
-            <a:endParaRPr lang="en-US" sz="1600" dirty="0"/>
-          </a:p>
-        </p:txBody>
-      </p:sp>
-      <p:sp>
-        <p:nvSpPr>
-          <p:cNvPr id="9" name="Text 6"/>
-          <p:cNvSpPr/>
-          <p:nvPr/>
-        </p:nvSpPr>
-        <p:spPr>
-          <a:xfrm>
-            <a:off x="3200400" y="1618488"/>
-            <a:ext cx="6583680" cy="960120"/>
-          </a:xfrm>
-          <a:prstGeom prst="rect">
-            <a:avLst/>
-          </a:prstGeom>
-          <a:noFill/>
-          <a:ln/>
-        </p:spPr>
-        <p:txBody>
-          <a:bodyPr wrap="square" lIns="0" tIns="0" rIns="0" bIns="0" rtlCol="0" anchor="ctr"/>
-          <a:lstStyle/>
-          <a:p>
-            <a:pPr indent="0" marL="0">
-              <a:buNone/>
-            </a:pPr>
-            <a:r>
-              <a:rPr lang="en-US" sz="1250" dirty="0">
-                <a:solidFill>
-                  <a:srgbClr val="1C2333"/>
-                </a:solidFill>
-                <a:latin typeface="Meiryo" pitchFamily="34" charset="0"/>
-                <a:ea typeface="Meiryo" pitchFamily="34" charset="-122"/>
-                <a:cs typeface="Meiryo" pitchFamily="34" charset="-120"/>
-              </a:rPr>
-              <a:t>ヒアリングシートで社長の価値観・判断ルール・権限委譲ライン・採用基準を言語化（60〜90分）</a:t>
-            </a:r>
-            <a:endParaRPr lang="en-US" sz="1250" dirty="0"/>
-          </a:p>
-        </p:txBody>
-      </p:sp>
-      <p:sp>
-        <p:nvSpPr>
-          <p:cNvPr id="10" name="Shape 7"/>
-          <p:cNvSpPr/>
-          <p:nvPr/>
-        </p:nvSpPr>
-        <p:spPr>
-          <a:xfrm>
-            <a:off x="9921240" y="1664208"/>
-            <a:ext cx="1691640" cy="438912"/>
+            <a:off x="1143000" y="3794760"/>
+            <a:ext cx="2743200" cy="777240"/>
+          </a:xfrm>
+          <a:prstGeom prst="rect">
+            <a:avLst/>
+          </a:prstGeom>
+          <a:noFill/>
+          <a:ln/>
+        </p:spPr>
+        <p:txBody>
+          <a:bodyPr wrap="square" lIns="0" tIns="0" rIns="0" bIns="0" rtlCol="0" anchor="ctr"/>
+          <a:lstStyle/>
+          <a:p>
+            <a:pPr indent="0" marL="0">
+              <a:buNone/>
+            </a:pPr>
+            <a:r>
+              <a:rPr lang="en-US" sz="1150" dirty="0">
+                <a:solidFill>
+                  <a:srgbClr val="CADCFC"/>
+                </a:solidFill>
+                <a:latin typeface="Meiryo" pitchFamily="34" charset="0"/>
+                <a:ea typeface="Meiryo" pitchFamily="34" charset="-122"/>
+                <a:cs typeface="Meiryo" pitchFamily="34" charset="-120"/>
+              </a:rPr>
+              <a:t>営業は商談の場で即断。社長確認は本当に必要なものだけに。</a:t>
+            </a:r>
+            <a:endParaRPr lang="en-US" sz="1150" dirty="0"/>
+          </a:p>
+        </p:txBody>
+      </p:sp>
+      <p:sp>
+        <p:nvSpPr>
+          <p:cNvPr id="9" name="Shape 6"/>
+          <p:cNvSpPr/>
+          <p:nvPr/>
+        </p:nvSpPr>
+        <p:spPr>
+          <a:xfrm>
+            <a:off x="4480560" y="2011680"/>
+            <a:ext cx="3383280" cy="2651760"/>
           </a:xfrm>
           <a:prstGeom prst="roundRect">
             <a:avLst>
-              <a:gd name="adj" fmla="val 20833"/>
+              <a:gd name="adj" fmla="val 4138"/>
             </a:avLst>
           </a:prstGeom>
           <a:solidFill>
-            <a:srgbClr val="EDF3FD"/>
-          </a:solidFill>
-          <a:ln/>
-        </p:spPr>
-      </p:sp>
-      <p:sp>
-        <p:nvSpPr>
-          <p:cNvPr id="11" name="Text 8"/>
-          <p:cNvSpPr/>
-          <p:nvPr/>
-        </p:nvSpPr>
-        <p:spPr>
-          <a:xfrm>
-            <a:off x="9921240" y="1664208"/>
-            <a:ext cx="1691640" cy="438912"/>
-          </a:xfrm>
-          <a:prstGeom prst="rect">
-            <a:avLst/>
-          </a:prstGeom>
-          <a:noFill/>
-          <a:ln/>
-        </p:spPr>
-        <p:txBody>
-          <a:bodyPr wrap="square" lIns="0" tIns="0" rIns="0" bIns="0" rtlCol="0" anchor="ctr"/>
-          <a:lstStyle/>
-          <a:p>
-            <a:pPr algn="ctr" indent="0" marL="0">
-              <a:buNone/>
-            </a:pPr>
-            <a:r>
-              <a:rPr lang="en-US" sz="1050" b="1" dirty="0">
-                <a:solidFill>
-                  <a:srgbClr val="1E2761"/>
-                </a:solidFill>
-                <a:latin typeface="Meiryo" pitchFamily="34" charset="0"/>
-                <a:ea typeface="Meiryo" pitchFamily="34" charset="-122"/>
-                <a:cs typeface="Meiryo" pitchFamily="34" charset="-120"/>
-              </a:rPr>
-              <a:t>準備済み ✓</a:t>
-            </a:r>
-            <a:endParaRPr lang="en-US" sz="1050" dirty="0"/>
-          </a:p>
-        </p:txBody>
-      </p:sp>
-      <p:sp>
-        <p:nvSpPr>
-          <p:cNvPr id="12" name="Shape 9"/>
-          <p:cNvSpPr/>
-          <p:nvPr/>
-        </p:nvSpPr>
-        <p:spPr>
-          <a:xfrm>
-            <a:off x="731520" y="2825496"/>
-            <a:ext cx="457200" cy="457200"/>
+            <a:srgbClr val="2A3575"/>
+          </a:solidFill>
+          <a:ln/>
+        </p:spPr>
+      </p:sp>
+      <p:sp>
+        <p:nvSpPr>
+          <p:cNvPr id="10" name="Shape 7"/>
+          <p:cNvSpPr/>
+          <p:nvPr/>
+        </p:nvSpPr>
+        <p:spPr>
+          <a:xfrm>
+            <a:off x="4800600" y="2331720"/>
+            <a:ext cx="685800" cy="685800"/>
           </a:xfrm>
           <a:prstGeom prst="ellipse">
             <a:avLst/>
           </a:prstGeom>
           <a:solidFill>
-            <a:srgbClr val="1E2761"/>
-          </a:solidFill>
-          <a:ln/>
-        </p:spPr>
-      </p:sp>
-      <p:sp>
-        <p:nvSpPr>
-          <p:cNvPr id="13" name="Text 10"/>
-          <p:cNvSpPr/>
-          <p:nvPr/>
-        </p:nvSpPr>
-        <p:spPr>
-          <a:xfrm>
-            <a:off x="731520" y="2825496"/>
-            <a:ext cx="457200" cy="457200"/>
-          </a:xfrm>
-          <a:prstGeom prst="rect">
-            <a:avLst/>
-          </a:prstGeom>
-          <a:noFill/>
-          <a:ln/>
-        </p:spPr>
-        <p:txBody>
-          <a:bodyPr wrap="square" lIns="0" tIns="0" rIns="0" bIns="0" rtlCol="0" anchor="ctr"/>
-          <a:lstStyle/>
-          <a:p>
-            <a:pPr algn="ctr" indent="0" marL="0">
-              <a:buNone/>
-            </a:pPr>
-            <a:r>
-              <a:rPr lang="en-US" sz="1600" b="1" dirty="0">
+            <a:srgbClr val="CADCFC"/>
+          </a:solidFill>
+          <a:ln/>
+        </p:spPr>
+      </p:sp>
+      <p:pic>
+        <p:nvPicPr>
+          <p:cNvPr id="11" name="Image 1" descr="preencoded.png">    </p:cNvPr>
+          <p:cNvPicPr>
+            <a:picLocks noChangeAspect="1"/>
+          </p:cNvPicPr>
+          <p:nvPr/>
+        </p:nvPicPr>
+        <p:blipFill>
+          <a:blip r:embed="rId2"/>
+          <a:stretch>
+            <a:fillRect/>
+          </a:stretch>
+        </p:blipFill>
+        <p:spPr>
+          <a:xfrm>
+            <a:off x="4972050" y="2503170"/>
+            <a:ext cx="342900" cy="342900"/>
+          </a:xfrm>
+          <a:prstGeom prst="rect">
+            <a:avLst/>
+          </a:prstGeom>
+        </p:spPr>
+      </p:pic>
+      <p:sp>
+        <p:nvSpPr>
+          <p:cNvPr id="12" name="Text 8"/>
+          <p:cNvSpPr/>
+          <p:nvPr/>
+        </p:nvSpPr>
+        <p:spPr>
+          <a:xfrm>
+            <a:off x="4800600" y="3200400"/>
+            <a:ext cx="2743200" cy="685800"/>
+          </a:xfrm>
+          <a:prstGeom prst="rect">
+            <a:avLst/>
+          </a:prstGeom>
+          <a:noFill/>
+          <a:ln/>
+        </p:spPr>
+        <p:txBody>
+          <a:bodyPr wrap="square" lIns="0" tIns="0" rIns="0" bIns="0" rtlCol="0" anchor="ctr"/>
+          <a:lstStyle/>
+          <a:p>
+            <a:pPr indent="0" marL="0">
+              <a:buNone/>
+            </a:pPr>
+            <a:r>
+              <a:rPr lang="en-US" sz="1700" b="1" dirty="0">
                 <a:solidFill>
                   <a:srgbClr val="FFFFFF"/>
                 </a:solidFill>
@@ -7551,217 +7105,143 @@
                 <a:ea typeface="Meiryo" pitchFamily="34" charset="-122"/>
                 <a:cs typeface="Meiryo" pitchFamily="34" charset="-120"/>
               </a:rPr>
-              <a:t>2</a:t>
-            </a:r>
-            <a:endParaRPr lang="en-US" sz="1600" dirty="0"/>
-          </a:p>
-        </p:txBody>
-      </p:sp>
-      <p:sp>
-        <p:nvSpPr>
-          <p:cNvPr id="14" name="Shape 11"/>
-          <p:cNvSpPr/>
-          <p:nvPr/>
-        </p:nvSpPr>
-        <p:spPr>
-          <a:xfrm>
-            <a:off x="932688" y="3319272"/>
-            <a:ext cx="41148" cy="566928"/>
-          </a:xfrm>
-          <a:prstGeom prst="rect">
-            <a:avLst/>
-          </a:prstGeom>
-          <a:solidFill>
-            <a:srgbClr val="CADCFC"/>
-          </a:solidFill>
-          <a:ln/>
-        </p:spPr>
-      </p:sp>
-      <p:sp>
-        <p:nvSpPr>
-          <p:cNvPr id="15" name="Text 12"/>
-          <p:cNvSpPr/>
-          <p:nvPr/>
-        </p:nvSpPr>
-        <p:spPr>
-          <a:xfrm>
-            <a:off x="1463040" y="2734056"/>
-            <a:ext cx="1691640" cy="640080"/>
-          </a:xfrm>
-          <a:prstGeom prst="rect">
-            <a:avLst/>
-          </a:prstGeom>
-          <a:noFill/>
-          <a:ln/>
-        </p:spPr>
-        <p:txBody>
-          <a:bodyPr wrap="square" lIns="0" tIns="0" rIns="0" bIns="0" rtlCol="0" anchor="ctr"/>
-          <a:lstStyle/>
-          <a:p>
-            <a:pPr indent="0" marL="0">
-              <a:buNone/>
-            </a:pPr>
-            <a:r>
-              <a:rPr lang="en-US" sz="1600" b="1" dirty="0">
-                <a:solidFill>
-                  <a:srgbClr val="1E2761"/>
-                </a:solidFill>
-                <a:latin typeface="Meiryo" pitchFamily="34" charset="0"/>
-                <a:ea typeface="Meiryo" pitchFamily="34" charset="-122"/>
-                <a:cs typeface="Meiryo" pitchFamily="34" charset="-120"/>
-              </a:rPr>
-              <a:t>当日 午前</a:t>
-            </a:r>
-            <a:endParaRPr lang="en-US" sz="1600" dirty="0"/>
-          </a:p>
-        </p:txBody>
-      </p:sp>
-      <p:sp>
-        <p:nvSpPr>
-          <p:cNvPr id="16" name="Text 13"/>
-          <p:cNvSpPr/>
-          <p:nvPr/>
-        </p:nvSpPr>
-        <p:spPr>
-          <a:xfrm>
-            <a:off x="3200400" y="2734056"/>
-            <a:ext cx="6583680" cy="960120"/>
-          </a:xfrm>
-          <a:prstGeom prst="rect">
-            <a:avLst/>
-          </a:prstGeom>
-          <a:noFill/>
-          <a:ln/>
-        </p:spPr>
-        <p:txBody>
-          <a:bodyPr wrap="square" lIns="0" tIns="0" rIns="0" bIns="0" rtlCol="0" anchor="ctr"/>
-          <a:lstStyle/>
-          <a:p>
-            <a:pPr indent="0" marL="0">
-              <a:buNone/>
-            </a:pPr>
-            <a:r>
-              <a:rPr lang="en-US" sz="1250" dirty="0">
-                <a:solidFill>
-                  <a:srgbClr val="1C2333"/>
-                </a:solidFill>
-                <a:latin typeface="Meiryo" pitchFamily="34" charset="0"/>
-                <a:ea typeface="Meiryo" pitchFamily="34" charset="-122"/>
-                <a:cs typeface="Meiryo" pitchFamily="34" charset="-120"/>
-              </a:rPr>
-              <a:t>Mac セットアップ（約30分）→ 環境診断・リハーサルコマンドで全経路を自動チェック → デモ確認</a:t>
-            </a:r>
-            <a:endParaRPr lang="en-US" sz="1250" dirty="0"/>
-          </a:p>
-        </p:txBody>
-      </p:sp>
-      <p:sp>
-        <p:nvSpPr>
-          <p:cNvPr id="17" name="Shape 14"/>
-          <p:cNvSpPr/>
-          <p:nvPr/>
-        </p:nvSpPr>
-        <p:spPr>
-          <a:xfrm>
-            <a:off x="9921240" y="2779776"/>
-            <a:ext cx="1691640" cy="438912"/>
+              <a:t>判断基準が資産になる</a:t>
+            </a:r>
+            <a:endParaRPr lang="en-US" sz="1700" dirty="0"/>
+          </a:p>
+        </p:txBody>
+      </p:sp>
+      <p:sp>
+        <p:nvSpPr>
+          <p:cNvPr id="13" name="Text 9"/>
+          <p:cNvSpPr/>
+          <p:nvPr/>
+        </p:nvSpPr>
+        <p:spPr>
+          <a:xfrm>
+            <a:off x="4800600" y="3794760"/>
+            <a:ext cx="2743200" cy="777240"/>
+          </a:xfrm>
+          <a:prstGeom prst="rect">
+            <a:avLst/>
+          </a:prstGeom>
+          <a:noFill/>
+          <a:ln/>
+        </p:spPr>
+        <p:txBody>
+          <a:bodyPr wrap="square" lIns="0" tIns="0" rIns="0" bIns="0" rtlCol="0" anchor="ctr"/>
+          <a:lstStyle/>
+          <a:p>
+            <a:pPr indent="0" marL="0">
+              <a:buNone/>
+            </a:pPr>
+            <a:r>
+              <a:rPr lang="en-US" sz="1150" dirty="0">
+                <a:solidFill>
+                  <a:srgbClr val="CADCFC"/>
+                </a:solidFill>
+                <a:latin typeface="Meiryo" pitchFamily="34" charset="0"/>
+                <a:ea typeface="Meiryo" pitchFamily="34" charset="-122"/>
+                <a:cs typeface="Meiryo" pitchFamily="34" charset="-120"/>
+              </a:rPr>
+              <a:t>社長の思考・因果関係がNotionに蓄積され、会社の共有財産に。</a:t>
+            </a:r>
+            <a:endParaRPr lang="en-US" sz="1150" dirty="0"/>
+          </a:p>
+        </p:txBody>
+      </p:sp>
+      <p:sp>
+        <p:nvSpPr>
+          <p:cNvPr id="14" name="Shape 10"/>
+          <p:cNvSpPr/>
+          <p:nvPr/>
+        </p:nvSpPr>
+        <p:spPr>
+          <a:xfrm>
+            <a:off x="8138160" y="2011680"/>
+            <a:ext cx="3383280" cy="2651760"/>
           </a:xfrm>
           <a:prstGeom prst="roundRect">
             <a:avLst>
-              <a:gd name="adj" fmla="val 20833"/>
+              <a:gd name="adj" fmla="val 4138"/>
             </a:avLst>
           </a:prstGeom>
           <a:solidFill>
-            <a:srgbClr val="EDF3FD"/>
-          </a:solidFill>
-          <a:ln/>
-        </p:spPr>
-      </p:sp>
-      <p:sp>
-        <p:nvSpPr>
-          <p:cNvPr id="18" name="Text 15"/>
-          <p:cNvSpPr/>
-          <p:nvPr/>
-        </p:nvSpPr>
-        <p:spPr>
-          <a:xfrm>
-            <a:off x="9921240" y="2779776"/>
-            <a:ext cx="1691640" cy="438912"/>
-          </a:xfrm>
-          <a:prstGeom prst="rect">
-            <a:avLst/>
-          </a:prstGeom>
-          <a:noFill/>
-          <a:ln/>
-        </p:spPr>
-        <p:txBody>
-          <a:bodyPr wrap="square" lIns="0" tIns="0" rIns="0" bIns="0" rtlCol="0" anchor="ctr"/>
-          <a:lstStyle/>
-          <a:p>
-            <a:pPr algn="ctr" indent="0" marL="0">
-              <a:buNone/>
-            </a:pPr>
-            <a:r>
-              <a:rPr lang="en-US" sz="1050" b="1" dirty="0">
-                <a:solidFill>
-                  <a:srgbClr val="1E2761"/>
-                </a:solidFill>
-                <a:latin typeface="Meiryo" pitchFamily="34" charset="0"/>
-                <a:ea typeface="Meiryo" pitchFamily="34" charset="-122"/>
-                <a:cs typeface="Meiryo" pitchFamily="34" charset="-120"/>
-              </a:rPr>
-              <a:t>Notion DB作成済み ✓</a:t>
-            </a:r>
-            <a:endParaRPr lang="en-US" sz="1050" dirty="0"/>
-          </a:p>
-        </p:txBody>
-      </p:sp>
-      <p:sp>
-        <p:nvSpPr>
-          <p:cNvPr id="19" name="Shape 16"/>
-          <p:cNvSpPr/>
-          <p:nvPr/>
-        </p:nvSpPr>
-        <p:spPr>
-          <a:xfrm>
-            <a:off x="731520" y="3941064"/>
-            <a:ext cx="457200" cy="457200"/>
+            <a:srgbClr val="2A3575"/>
+          </a:solidFill>
+          <a:ln/>
+        </p:spPr>
+      </p:sp>
+      <p:sp>
+        <p:nvSpPr>
+          <p:cNvPr id="15" name="Shape 11"/>
+          <p:cNvSpPr/>
+          <p:nvPr/>
+        </p:nvSpPr>
+        <p:spPr>
+          <a:xfrm>
+            <a:off x="8458200" y="2331720"/>
+            <a:ext cx="685800" cy="685800"/>
           </a:xfrm>
           <a:prstGeom prst="ellipse">
             <a:avLst/>
           </a:prstGeom>
           <a:solidFill>
-            <a:srgbClr val="1E2761"/>
-          </a:solidFill>
-          <a:ln/>
-        </p:spPr>
-      </p:sp>
-      <p:sp>
-        <p:nvSpPr>
-          <p:cNvPr id="20" name="Text 17"/>
-          <p:cNvSpPr/>
-          <p:nvPr/>
-        </p:nvSpPr>
-        <p:spPr>
-          <a:xfrm>
-            <a:off x="731520" y="3941064"/>
-            <a:ext cx="457200" cy="457200"/>
-          </a:xfrm>
-          <a:prstGeom prst="rect">
-            <a:avLst/>
-          </a:prstGeom>
-          <a:noFill/>
-          <a:ln/>
-        </p:spPr>
-        <p:txBody>
-          <a:bodyPr wrap="square" lIns="0" tIns="0" rIns="0" bIns="0" rtlCol="0" anchor="ctr"/>
-          <a:lstStyle/>
-          <a:p>
-            <a:pPr algn="ctr" indent="0" marL="0">
-              <a:buNone/>
-            </a:pPr>
-            <a:r>
-              <a:rPr lang="en-US" sz="1600" b="1" dirty="0">
+            <a:srgbClr val="CADCFC"/>
+          </a:solidFill>
+          <a:ln/>
+        </p:spPr>
+      </p:sp>
+      <p:pic>
+        <p:nvPicPr>
+          <p:cNvPr id="16" name="Image 2" descr="preencoded.png">    </p:cNvPr>
+          <p:cNvPicPr>
+            <a:picLocks noChangeAspect="1"/>
+          </p:cNvPicPr>
+          <p:nvPr/>
+        </p:nvPicPr>
+        <p:blipFill>
+          <a:blip r:embed="rId3"/>
+          <a:stretch>
+            <a:fillRect/>
+          </a:stretch>
+        </p:blipFill>
+        <p:spPr>
+          <a:xfrm>
+            <a:off x="8629650" y="2503170"/>
+            <a:ext cx="342900" cy="342900"/>
+          </a:xfrm>
+          <a:prstGeom prst="rect">
+            <a:avLst/>
+          </a:prstGeom>
+        </p:spPr>
+      </p:pic>
+      <p:sp>
+        <p:nvSpPr>
+          <p:cNvPr id="17" name="Text 12"/>
+          <p:cNvSpPr/>
+          <p:nvPr/>
+        </p:nvSpPr>
+        <p:spPr>
+          <a:xfrm>
+            <a:off x="8458200" y="3200400"/>
+            <a:ext cx="2743200" cy="685800"/>
+          </a:xfrm>
+          <a:prstGeom prst="rect">
+            <a:avLst/>
+          </a:prstGeom>
+          <a:noFill/>
+          <a:ln/>
+        </p:spPr>
+        <p:txBody>
+          <a:bodyPr wrap="square" lIns="0" tIns="0" rIns="0" bIns="0" rtlCol="0" anchor="ctr"/>
+          <a:lstStyle/>
+          <a:p>
+            <a:pPr indent="0" marL="0">
+              <a:buNone/>
+            </a:pPr>
+            <a:r>
+              <a:rPr lang="en-US" sz="1700" b="1" dirty="0">
                 <a:solidFill>
                   <a:srgbClr val="FFFFFF"/>
                 </a:solidFill>
@@ -7769,217 +7249,91 @@
                 <a:ea typeface="Meiryo" pitchFamily="34" charset="-122"/>
                 <a:cs typeface="Meiryo" pitchFamily="34" charset="-120"/>
               </a:rPr>
-              <a:t>3</a:t>
-            </a:r>
-            <a:endParaRPr lang="en-US" sz="1600" dirty="0"/>
-          </a:p>
-        </p:txBody>
-      </p:sp>
-      <p:sp>
-        <p:nvSpPr>
-          <p:cNvPr id="21" name="Shape 18"/>
-          <p:cNvSpPr/>
-          <p:nvPr/>
-        </p:nvSpPr>
-        <p:spPr>
-          <a:xfrm>
-            <a:off x="932688" y="4434840"/>
-            <a:ext cx="41148" cy="566928"/>
-          </a:xfrm>
-          <a:prstGeom prst="rect">
-            <a:avLst/>
-          </a:prstGeom>
-          <a:solidFill>
-            <a:srgbClr val="CADCFC"/>
-          </a:solidFill>
-          <a:ln/>
-        </p:spPr>
-      </p:sp>
-      <p:sp>
-        <p:nvSpPr>
-          <p:cNvPr id="22" name="Text 19"/>
-          <p:cNvSpPr/>
-          <p:nvPr/>
-        </p:nvSpPr>
-        <p:spPr>
-          <a:xfrm>
-            <a:off x="1463040" y="3849624"/>
-            <a:ext cx="1691640" cy="640080"/>
-          </a:xfrm>
-          <a:prstGeom prst="rect">
-            <a:avLst/>
-          </a:prstGeom>
-          <a:noFill/>
-          <a:ln/>
-        </p:spPr>
-        <p:txBody>
-          <a:bodyPr wrap="square" lIns="0" tIns="0" rIns="0" bIns="0" rtlCol="0" anchor="ctr"/>
-          <a:lstStyle/>
-          <a:p>
-            <a:pPr indent="0" marL="0">
-              <a:buNone/>
-            </a:pPr>
-            <a:r>
-              <a:rPr lang="en-US" sz="1600" b="1" dirty="0">
-                <a:solidFill>
-                  <a:srgbClr val="1E2761"/>
-                </a:solidFill>
-                <a:latin typeface="Meiryo" pitchFamily="34" charset="0"/>
-                <a:ea typeface="Meiryo" pitchFamily="34" charset="-122"/>
-                <a:cs typeface="Meiryo" pitchFamily="34" charset="-120"/>
-              </a:rPr>
-              <a:t>当日 午後</a:t>
-            </a:r>
-            <a:endParaRPr lang="en-US" sz="1600" dirty="0"/>
-          </a:p>
-        </p:txBody>
-      </p:sp>
-      <p:sp>
-        <p:nvSpPr>
-          <p:cNvPr id="23" name="Text 20"/>
-          <p:cNvSpPr/>
-          <p:nvPr/>
-        </p:nvSpPr>
-        <p:spPr>
-          <a:xfrm>
-            <a:off x="3200400" y="3849624"/>
-            <a:ext cx="6583680" cy="960120"/>
-          </a:xfrm>
-          <a:prstGeom prst="rect">
-            <a:avLst/>
-          </a:prstGeom>
-          <a:noFill/>
-          <a:ln/>
-        </p:spPr>
-        <p:txBody>
-          <a:bodyPr wrap="square" lIns="0" tIns="0" rIns="0" bIns="0" rtlCol="0" anchor="ctr"/>
-          <a:lstStyle/>
-          <a:p>
-            <a:pPr indent="0" marL="0">
-              <a:buNone/>
-            </a:pPr>
-            <a:r>
-              <a:rPr lang="en-US" sz="1250" dirty="0">
-                <a:solidFill>
-                  <a:srgbClr val="1C2333"/>
-                </a:solidFill>
-                <a:latin typeface="Meiryo" pitchFamily="34" charset="0"/>
-                <a:ea typeface="Meiryo" pitchFamily="34" charset="-122"/>
-                <a:cs typeface="Meiryo" pitchFamily="34" charset="-120"/>
-              </a:rPr>
-              <a:t>録音デバイス（Plaud）とLINEから実データを投入 → 取り込み → 実データで即断・壁打ちを体験</a:t>
-            </a:r>
-            <a:endParaRPr lang="en-US" sz="1250" dirty="0"/>
-          </a:p>
-        </p:txBody>
-      </p:sp>
-      <p:sp>
-        <p:nvSpPr>
-          <p:cNvPr id="24" name="Shape 21"/>
-          <p:cNvSpPr/>
-          <p:nvPr/>
-        </p:nvSpPr>
-        <p:spPr>
-          <a:xfrm>
-            <a:off x="9921240" y="3895344"/>
-            <a:ext cx="1691640" cy="438912"/>
-          </a:xfrm>
-          <a:prstGeom prst="roundRect">
-            <a:avLst>
-              <a:gd name="adj" fmla="val 20833"/>
-            </a:avLst>
-          </a:prstGeom>
-          <a:solidFill>
-            <a:srgbClr val="EDF3FD"/>
-          </a:solidFill>
-          <a:ln/>
-        </p:spPr>
-      </p:sp>
-      <p:sp>
-        <p:nvSpPr>
-          <p:cNvPr id="25" name="Text 22"/>
-          <p:cNvSpPr/>
-          <p:nvPr/>
-        </p:nvSpPr>
-        <p:spPr>
-          <a:xfrm>
-            <a:off x="9921240" y="3895344"/>
-            <a:ext cx="1691640" cy="438912"/>
-          </a:xfrm>
-          <a:prstGeom prst="rect">
-            <a:avLst/>
-          </a:prstGeom>
-          <a:noFill/>
-          <a:ln/>
-        </p:spPr>
-        <p:txBody>
-          <a:bodyPr wrap="square" lIns="0" tIns="0" rIns="0" bIns="0" rtlCol="0" anchor="ctr"/>
-          <a:lstStyle/>
-          <a:p>
-            <a:pPr algn="ctr" indent="0" marL="0">
-              <a:buNone/>
-            </a:pPr>
-            <a:r>
-              <a:rPr lang="en-US" sz="1050" b="1" dirty="0">
-                <a:solidFill>
-                  <a:srgbClr val="1E2761"/>
-                </a:solidFill>
-                <a:latin typeface="Meiryo" pitchFamily="34" charset="0"/>
-                <a:ea typeface="Meiryo" pitchFamily="34" charset="-122"/>
-                <a:cs typeface="Meiryo" pitchFamily="34" charset="-120"/>
-              </a:rPr>
-              <a:t>ランブック準備済み ✓</a:t>
-            </a:r>
-            <a:endParaRPr lang="en-US" sz="1050" dirty="0"/>
-          </a:p>
-        </p:txBody>
-      </p:sp>
-      <p:sp>
-        <p:nvSpPr>
-          <p:cNvPr id="26" name="Shape 23"/>
-          <p:cNvSpPr/>
-          <p:nvPr/>
-        </p:nvSpPr>
-        <p:spPr>
-          <a:xfrm>
-            <a:off x="731520" y="5056632"/>
-            <a:ext cx="457200" cy="457200"/>
-          </a:xfrm>
-          <a:prstGeom prst="ellipse">
-            <a:avLst/>
-          </a:prstGeom>
-          <a:solidFill>
-            <a:srgbClr val="1E2761"/>
-          </a:solidFill>
-          <a:ln/>
-        </p:spPr>
-      </p:sp>
-      <p:sp>
-        <p:nvSpPr>
-          <p:cNvPr id="27" name="Text 24"/>
-          <p:cNvSpPr/>
-          <p:nvPr/>
-        </p:nvSpPr>
-        <p:spPr>
-          <a:xfrm>
-            <a:off x="731520" y="5056632"/>
-            <a:ext cx="457200" cy="457200"/>
-          </a:xfrm>
-          <a:prstGeom prst="rect">
-            <a:avLst/>
-          </a:prstGeom>
-          <a:noFill/>
-          <a:ln/>
-        </p:spPr>
-        <p:txBody>
-          <a:bodyPr wrap="square" lIns="0" tIns="0" rIns="0" bIns="0" rtlCol="0" anchor="ctr"/>
-          <a:lstStyle/>
-          <a:p>
-            <a:pPr algn="ctr" indent="0" marL="0">
-              <a:buNone/>
-            </a:pPr>
-            <a:r>
-              <a:rPr lang="en-US" sz="1600" b="1" dirty="0">
+              <a:t>社長の時間が戻ってくる</a:t>
+            </a:r>
+            <a:endParaRPr lang="en-US" sz="1700" dirty="0"/>
+          </a:p>
+        </p:txBody>
+      </p:sp>
+      <p:sp>
+        <p:nvSpPr>
+          <p:cNvPr id="18" name="Text 13"/>
+          <p:cNvSpPr/>
+          <p:nvPr/>
+        </p:nvSpPr>
+        <p:spPr>
+          <a:xfrm>
+            <a:off x="8458200" y="3794760"/>
+            <a:ext cx="2743200" cy="777240"/>
+          </a:xfrm>
+          <a:prstGeom prst="rect">
+            <a:avLst/>
+          </a:prstGeom>
+          <a:noFill/>
+          <a:ln/>
+        </p:spPr>
+        <p:txBody>
+          <a:bodyPr wrap="square" lIns="0" tIns="0" rIns="0" bIns="0" rtlCol="0" anchor="ctr"/>
+          <a:lstStyle/>
+          <a:p>
+            <a:pPr indent="0" marL="0">
+              <a:buNone/>
+            </a:pPr>
+            <a:r>
+              <a:rPr lang="en-US" sz="1150" dirty="0">
+                <a:solidFill>
+                  <a:srgbClr val="CADCFC"/>
+                </a:solidFill>
+                <a:latin typeface="Meiryo" pitchFamily="34" charset="0"/>
+                <a:ea typeface="Meiryo" pitchFamily="34" charset="-122"/>
+                <a:cs typeface="Meiryo" pitchFamily="34" charset="-120"/>
+              </a:rPr>
+              <a:t>一次評価・壁打ち・情報整理をAIが肩代わり。社長は本質的な判断に集中。</a:t>
+            </a:r>
+            <a:endParaRPr lang="en-US" sz="1150" dirty="0"/>
+          </a:p>
+        </p:txBody>
+      </p:sp>
+      <p:sp>
+        <p:nvSpPr>
+          <p:cNvPr id="19" name="Text 14"/>
+          <p:cNvSpPr/>
+          <p:nvPr/>
+        </p:nvSpPr>
+        <p:spPr>
+          <a:xfrm>
+            <a:off x="822960" y="5212080"/>
+            <a:ext cx="10881360" cy="822960"/>
+          </a:xfrm>
+          <a:prstGeom prst="rect">
+            <a:avLst/>
+          </a:prstGeom>
+          <a:noFill/>
+          <a:ln/>
+        </p:spPr>
+        <p:txBody>
+          <a:bodyPr wrap="square" lIns="0" tIns="0" rIns="0" bIns="0" rtlCol="0" anchor="ctr"/>
+          <a:lstStyle/>
+          <a:p>
+            <a:pPr indent="0" marL="0">
+              <a:buNone/>
+            </a:pPr>
+            <a:r>
+              <a:rPr lang="en-US" sz="1400" b="1" dirty="0">
+                <a:solidFill>
+                  <a:srgbClr val="E8A33D"/>
+                </a:solidFill>
+                <a:latin typeface="Meiryo" pitchFamily="34" charset="0"/>
+                <a:ea typeface="Meiryo" pitchFamily="34" charset="-122"/>
+                <a:cs typeface="Meiryo" pitchFamily="34" charset="-120"/>
+              </a:rPr>
+              <a:t>次のアクション　</a:t>
+            </a:r>
+            <a:pPr indent="0" marL="0">
+              <a:buNone/>
+            </a:pPr>
+            <a:r>
+              <a:rPr lang="en-US" sz="1400" dirty="0">
                 <a:solidFill>
                   <a:srgbClr val="FFFFFF"/>
                 </a:solidFill>
@@ -7987,201 +7341,9 @@
                 <a:ea typeface="Meiryo" pitchFamily="34" charset="-122"/>
                 <a:cs typeface="Meiryo" pitchFamily="34" charset="-120"/>
               </a:rPr>
-              <a:t>4</a:t>
-            </a:r>
-            <a:endParaRPr lang="en-US" sz="1600" dirty="0"/>
-          </a:p>
-        </p:txBody>
-      </p:sp>
-      <p:sp>
-        <p:nvSpPr>
-          <p:cNvPr id="28" name="Text 25"/>
-          <p:cNvSpPr/>
-          <p:nvPr/>
-        </p:nvSpPr>
-        <p:spPr>
-          <a:xfrm>
-            <a:off x="1463040" y="4965192"/>
-            <a:ext cx="1691640" cy="640080"/>
-          </a:xfrm>
-          <a:prstGeom prst="rect">
-            <a:avLst/>
-          </a:prstGeom>
-          <a:noFill/>
-          <a:ln/>
-        </p:spPr>
-        <p:txBody>
-          <a:bodyPr wrap="square" lIns="0" tIns="0" rIns="0" bIns="0" rtlCol="0" anchor="ctr"/>
-          <a:lstStyle/>
-          <a:p>
-            <a:pPr indent="0" marL="0">
-              <a:buNone/>
-            </a:pPr>
-            <a:r>
-              <a:rPr lang="en-US" sz="1600" b="1" dirty="0">
-                <a:solidFill>
-                  <a:srgbClr val="1E2761"/>
-                </a:solidFill>
-                <a:latin typeface="Meiryo" pitchFamily="34" charset="0"/>
-                <a:ea typeface="Meiryo" pitchFamily="34" charset="-122"/>
-                <a:cs typeface="Meiryo" pitchFamily="34" charset="-120"/>
-              </a:rPr>
-              <a:t>今週中</a:t>
-            </a:r>
-            <a:endParaRPr lang="en-US" sz="1600" dirty="0"/>
-          </a:p>
-        </p:txBody>
-      </p:sp>
-      <p:sp>
-        <p:nvSpPr>
-          <p:cNvPr id="29" name="Text 26"/>
-          <p:cNvSpPr/>
-          <p:nvPr/>
-        </p:nvSpPr>
-        <p:spPr>
-          <a:xfrm>
-            <a:off x="3200400" y="4965192"/>
-            <a:ext cx="6583680" cy="960120"/>
-          </a:xfrm>
-          <a:prstGeom prst="rect">
-            <a:avLst/>
-          </a:prstGeom>
-          <a:noFill/>
-          <a:ln/>
-        </p:spPr>
-        <p:txBody>
-          <a:bodyPr wrap="square" lIns="0" tIns="0" rIns="0" bIns="0" rtlCol="0" anchor="ctr"/>
-          <a:lstStyle/>
-          <a:p>
-            <a:pPr indent="0" marL="0">
-              <a:buNone/>
-            </a:pPr>
-            <a:r>
-              <a:rPr lang="en-US" sz="1250" dirty="0">
-                <a:solidFill>
-                  <a:srgbClr val="1C2333"/>
-                </a:solidFill>
-                <a:latin typeface="Meiryo" pitchFamily="34" charset="0"/>
-                <a:ea typeface="Meiryo" pitchFamily="34" charset="-122"/>
-                <a:cs typeface="Meiryo" pitchFamily="34" charset="-120"/>
-              </a:rPr>
-              <a:t>日次・週次の自動実行を設定 → Vertex AI・会社アカウントへ段階移行 → 本格運用開始</a:t>
-            </a:r>
-            <a:endParaRPr lang="en-US" sz="1250" dirty="0"/>
-          </a:p>
-        </p:txBody>
-      </p:sp>
-      <p:sp>
-        <p:nvSpPr>
-          <p:cNvPr id="30" name="Shape 27"/>
-          <p:cNvSpPr/>
-          <p:nvPr/>
-        </p:nvSpPr>
-        <p:spPr>
-          <a:xfrm>
-            <a:off x="9921240" y="5010912"/>
-            <a:ext cx="1691640" cy="438912"/>
-          </a:xfrm>
-          <a:prstGeom prst="roundRect">
-            <a:avLst>
-              <a:gd name="adj" fmla="val 20833"/>
-            </a:avLst>
-          </a:prstGeom>
-          <a:solidFill>
-            <a:srgbClr val="EDF3FD"/>
-          </a:solidFill>
-          <a:ln/>
-        </p:spPr>
-      </p:sp>
-      <p:sp>
-        <p:nvSpPr>
-          <p:cNvPr id="31" name="Text 28"/>
-          <p:cNvSpPr/>
-          <p:nvPr/>
-        </p:nvSpPr>
-        <p:spPr>
-          <a:xfrm>
-            <a:off x="9921240" y="5010912"/>
-            <a:ext cx="1691640" cy="438912"/>
-          </a:xfrm>
-          <a:prstGeom prst="rect">
-            <a:avLst/>
-          </a:prstGeom>
-          <a:noFill/>
-          <a:ln/>
-        </p:spPr>
-        <p:txBody>
-          <a:bodyPr wrap="square" lIns="0" tIns="0" rIns="0" bIns="0" rtlCol="0" anchor="ctr"/>
-          <a:lstStyle/>
-          <a:p>
-            <a:pPr algn="ctr" indent="0" marL="0">
-              <a:buNone/>
-            </a:pPr>
-            <a:r>
-              <a:rPr lang="en-US" sz="1050" b="1" dirty="0">
-                <a:solidFill>
-                  <a:srgbClr val="1E2761"/>
-                </a:solidFill>
-                <a:latin typeface="Meiryo" pitchFamily="34" charset="0"/>
-                <a:ea typeface="Meiryo" pitchFamily="34" charset="-122"/>
-                <a:cs typeface="Meiryo" pitchFamily="34" charset="-120"/>
-              </a:rPr>
-              <a:t>手順書準備済み ✓</a:t>
-            </a:r>
-            <a:endParaRPr lang="en-US" sz="1050" dirty="0"/>
-          </a:p>
-        </p:txBody>
-      </p:sp>
-      <p:sp>
-        <p:nvSpPr>
-          <p:cNvPr id="32" name="Text 29"/>
-          <p:cNvSpPr/>
-          <p:nvPr/>
-        </p:nvSpPr>
-        <p:spPr>
-          <a:xfrm>
-            <a:off x="640080" y="6172200"/>
-            <a:ext cx="10881360" cy="457200"/>
-          </a:xfrm>
-          <a:prstGeom prst="rect">
-            <a:avLst/>
-          </a:prstGeom>
-          <a:noFill/>
-          <a:ln/>
-        </p:spPr>
-        <p:txBody>
-          <a:bodyPr wrap="square" lIns="0" tIns="0" rIns="0" bIns="0" rtlCol="0" anchor="ctr"/>
-          <a:lstStyle/>
-          <a:p>
-            <a:pPr indent="0" marL="0">
-              <a:buNone/>
-            </a:pPr>
-            <a:r>
-              <a:rPr lang="en-US" sz="1300" b="1" dirty="0">
-                <a:solidFill>
-                  <a:srgbClr val="1E2761"/>
-                </a:solidFill>
-                <a:latin typeface="Meiryo" pitchFamily="34" charset="0"/>
-                <a:ea typeface="Meiryo" pitchFamily="34" charset="-122"/>
-                <a:cs typeface="Meiryo" pitchFamily="34" charset="-120"/>
-              </a:rPr>
-              <a:t>費用: </a:t>
-            </a:r>
-            <a:pPr indent="0" marL="0">
-              <a:buNone/>
-            </a:pPr>
-            <a:r>
-              <a:rPr lang="en-US" sz="1300" dirty="0">
-                <a:solidFill>
-                  <a:srgbClr val="1C2333"/>
-                </a:solidFill>
-                <a:latin typeface="Meiryo" pitchFamily="34" charset="0"/>
-                <a:ea typeface="Meiryo" pitchFamily="34" charset="-122"/>
-                <a:cs typeface="Meiryo" pitchFamily="34" charset="-120"/>
-              </a:rPr>
-              <a:t>AI利用料は無料枠から開始可能。追加の主要コストは Notion 有料プラン（複数人利用時）と録音デバイス実費のみ。</a:t>
-            </a:r>
-            <a:endParaRPr lang="en-US" sz="1300" dirty="0"/>
+              <a:t>① ヒアリング日程の確定（60〜90分）　② 導入日に実データで体験　③ 1〜2週間の試用で精度を評価</a:t>
+            </a:r>
+            <a:endParaRPr lang="en-US" sz="1400" dirty="0"/>
           </a:p>
         </p:txBody>
       </p:sp>

--- a/docs/presentation.pptx
+++ b/docs/presentation.pptx
@@ -14,9 +14,10 @@
     <p:sldId id="262" r:id="rId8"/>
     <p:sldId id="263" r:id="rId9"/>
     <p:sldId id="264" r:id="rId10"/>
+    <p:sldId id="265" r:id="rId11"/>
   </p:sldIdLst>
   <p:notesMasterIdLst>
-    <p:notesMasterId r:id="rId11"/>
+    <p:notesMasterId r:id="rId12"/>
   </p:notesMasterIdLst>
   <p:sldSz cx="12192000" cy="6858000"/>
   <p:notesSz cx="6858000" cy="12192000"/>
@@ -552,6 +553,94 @@
 </p:notes>
 </file>
 
+<file path=ppt/notesSlides/notesSlide10.xml><?xml version="1.0" encoding="utf-8"?>
+<p:notes xmlns:a="http://schemas.openxmlformats.org/drawingml/2006/main" xmlns:r="http://schemas.openxmlformats.org/officeDocument/2006/relationships" xmlns:p="http://schemas.openxmlformats.org/presentationml/2006/main">
+  <p:cSld>
+    <p:spTree>
+      <p:nvGrpSpPr>
+        <p:cNvPr id="1" name=""/>
+        <p:cNvGrpSpPr/>
+        <p:nvPr/>
+      </p:nvGrpSpPr>
+      <p:grpSpPr>
+        <a:xfrm>
+          <a:off x="0" y="0"/>
+          <a:ext cx="0" cy="0"/>
+          <a:chOff x="0" y="0"/>
+          <a:chExt cx="0" cy="0"/>
+        </a:xfrm>
+      </p:grpSpPr>
+      <p:sp>
+        <p:nvSpPr>
+          <p:cNvPr id="2" name="Slide Image Placeholder 1"/>
+          <p:cNvSpPr>
+            <a:spLocks noGrp="1" noRot="1" noChangeAspect="1"/>
+          </p:cNvSpPr>
+          <p:nvPr>
+            <p:ph type="sldImg"/>
+          </p:nvPr>
+        </p:nvSpPr>
+        <p:spPr/>
+      </p:sp>
+      <p:sp>
+        <p:nvSpPr>
+          <p:cNvPr id="3" name="Notes Placeholder 2"/>
+          <p:cNvSpPr>
+            <a:spLocks noGrp="1"/>
+          </p:cNvSpPr>
+          <p:nvPr>
+            <p:ph type="body" idx="1"/>
+          </p:nvPr>
+        </p:nvSpPr>
+        <p:spPr/>
+        <p:txBody>
+          <a:bodyPr/>
+          <a:lstStyle/>
+          <a:p>
+            <a:r>
+              <a:rPr lang="en-US" dirty="0"/>
+              <a:t>価値は3つ: スピード、判断基準の資産化、社長の時間。次のアクションはヒアリング日程の確定から。</a:t>
+            </a:r>
+            <a:endParaRPr lang="en-US" dirty="0"/>
+          </a:p>
+        </p:txBody>
+      </p:sp>
+      <p:sp>
+        <p:nvSpPr>
+          <p:cNvPr id="4" name="Slide Number Placeholder 3"/>
+          <p:cNvSpPr>
+            <a:spLocks noGrp="1"/>
+          </p:cNvSpPr>
+          <p:nvPr>
+            <p:ph type="sldNum" sz="quarter" idx="10"/>
+          </p:nvPr>
+        </p:nvSpPr>
+        <p:spPr/>
+        <p:txBody>
+          <a:bodyPr/>
+          <a:lstStyle/>
+          <a:p>
+            <a:fld id="{F7021451-1387-4CA6-816F-3879F97B5CBC}" type="slidenum">
+              <a:rPr lang="en-US"/>
+              <a:t>10</a:t>
+            </a:fld>
+            <a:endParaRPr lang="en-US"/>
+          </a:p>
+        </p:txBody>
+      </p:sp>
+    </p:spTree>
+    <p:extLst>
+      <p:ext uri="{BB962C8B-B14F-4D97-AF65-F5344CB8AC3E}">
+        <p14:creationId xmlns:p14="http://schemas.microsoft.com/office/powerpoint/2010/main" val="1024086991"/>
+      </p:ext>
+    </p:extLst>
+  </p:cSld>
+  <p:clrMapOvr>
+    <a:masterClrMapping/>
+  </p:clrMapOvr>
+</p:notes>
+</file>
+
 <file path=ppt/notesSlides/notesSlide2.xml><?xml version="1.0" encoding="utf-8"?>
 <p:notes xmlns:a="http://schemas.openxmlformats.org/drawingml/2006/main" xmlns:r="http://schemas.openxmlformats.org/officeDocument/2006/relationships" xmlns:p="http://schemas.openxmlformats.org/presentationml/2006/main">
   <p:cSld>
@@ -1214,7 +1303,7 @@
           <a:p>
             <a:r>
               <a:rPr lang="en-US" dirty="0"/>
-              <a:t>価値は3つ: スピード、判断基準の資産化、社長の時間。次のアクションはヒアリング日程の確定から。</a:t>
+              <a:t>初期は端末込みで13〜18万円（端末を除けば実質2.5万円）。月額は5人利用の標準構成で1万円前後、年間10〜15万円。無料枠だけでも試用可能。</a:t>
             </a:r>
             <a:endParaRPr lang="en-US" dirty="0"/>
           </a:p>
@@ -1821,9 +1910,585 @@
                 <a:ea typeface="Meiryo" pitchFamily="34" charset="-122"/>
                 <a:cs typeface="Meiryo" pitchFamily="34" charset="-120"/>
               </a:rPr>
-              <a:t>導入提案資料</a:t>
+              <a:t>社内導入提案資料</a:t>
             </a:r>
             <a:endParaRPr lang="en-US" sz="1200" dirty="0"/>
+          </a:p>
+        </p:txBody>
+      </p:sp>
+    </p:spTree>
+  </p:cSld>
+  <p:clrMapOvr>
+    <a:masterClrMapping/>
+  </p:clrMapOvr>
+</p:sld>
+</file>
+
+<file path=ppt/slides/slide10.xml><?xml version="1.0" encoding="utf-8"?>
+<p:sld xmlns:a="http://schemas.openxmlformats.org/drawingml/2006/main" xmlns:r="http://schemas.openxmlformats.org/officeDocument/2006/relationships" xmlns:p="http://schemas.openxmlformats.org/presentationml/2006/main">
+  <p:cSld name="Slide 10">
+    <p:bg>
+      <p:bgPr>
+        <a:solidFill>
+          <a:srgbClr val="1E2761"/>
+        </a:solidFill>
+      </p:bgPr>
+    </p:bg>
+    <p:spTree>
+      <p:nvGrpSpPr>
+        <p:cNvPr id="1" name=""/>
+        <p:cNvGrpSpPr/>
+        <p:nvPr/>
+      </p:nvGrpSpPr>
+      <p:grpSpPr>
+        <a:xfrm>
+          <a:off x="0" y="0"/>
+          <a:ext cx="0" cy="0"/>
+          <a:chOff x="0" y="0"/>
+          <a:chExt cx="0" cy="0"/>
+        </a:xfrm>
+      </p:grpSpPr>
+      <p:sp>
+        <p:nvSpPr>
+          <p:cNvPr id="2" name="Shape 0"/>
+          <p:cNvSpPr/>
+          <p:nvPr/>
+        </p:nvSpPr>
+        <p:spPr>
+          <a:xfrm>
+            <a:off x="10241280" y="4480560"/>
+            <a:ext cx="3291840" cy="3291840"/>
+          </a:xfrm>
+          <a:prstGeom prst="ellipse">
+            <a:avLst/>
+          </a:prstGeom>
+          <a:solidFill>
+            <a:srgbClr val="2A3575"/>
+          </a:solidFill>
+          <a:ln/>
+        </p:spPr>
+      </p:sp>
+      <p:sp>
+        <p:nvSpPr>
+          <p:cNvPr id="3" name="Text 1"/>
+          <p:cNvSpPr/>
+          <p:nvPr/>
+        </p:nvSpPr>
+        <p:spPr>
+          <a:xfrm>
+            <a:off x="822960" y="777240"/>
+            <a:ext cx="10515600" cy="914400"/>
+          </a:xfrm>
+          <a:prstGeom prst="rect">
+            <a:avLst/>
+          </a:prstGeom>
+          <a:noFill/>
+          <a:ln/>
+        </p:spPr>
+        <p:txBody>
+          <a:bodyPr wrap="square" lIns="0" tIns="0" rIns="0" bIns="0" rtlCol="0" anchor="ctr"/>
+          <a:lstStyle/>
+          <a:p>
+            <a:pPr indent="0" marL="0">
+              <a:buNone/>
+            </a:pPr>
+            <a:r>
+              <a:rPr lang="en-US" sz="4400" b="1" dirty="0">
+                <a:solidFill>
+                  <a:srgbClr val="FFFFFF"/>
+                </a:solidFill>
+                <a:latin typeface="Meiryo" pitchFamily="34" charset="0"/>
+                <a:ea typeface="Meiryo" pitchFamily="34" charset="-122"/>
+                <a:cs typeface="Meiryo" pitchFamily="34" charset="-120"/>
+              </a:rPr>
+              <a:t>待たない現場へ。</a:t>
+            </a:r>
+            <a:endParaRPr lang="en-US" sz="4400" dirty="0"/>
+          </a:p>
+        </p:txBody>
+      </p:sp>
+      <p:sp>
+        <p:nvSpPr>
+          <p:cNvPr id="4" name="Shape 2"/>
+          <p:cNvSpPr/>
+          <p:nvPr/>
+        </p:nvSpPr>
+        <p:spPr>
+          <a:xfrm>
+            <a:off x="822960" y="2011680"/>
+            <a:ext cx="3383280" cy="2651760"/>
+          </a:xfrm>
+          <a:prstGeom prst="roundRect">
+            <a:avLst>
+              <a:gd name="adj" fmla="val 4138"/>
+            </a:avLst>
+          </a:prstGeom>
+          <a:solidFill>
+            <a:srgbClr val="2A3575"/>
+          </a:solidFill>
+          <a:ln/>
+        </p:spPr>
+      </p:sp>
+      <p:sp>
+        <p:nvSpPr>
+          <p:cNvPr id="5" name="Shape 3"/>
+          <p:cNvSpPr/>
+          <p:nvPr/>
+        </p:nvSpPr>
+        <p:spPr>
+          <a:xfrm>
+            <a:off x="1143000" y="2331720"/>
+            <a:ext cx="685800" cy="685800"/>
+          </a:xfrm>
+          <a:prstGeom prst="ellipse">
+            <a:avLst/>
+          </a:prstGeom>
+          <a:solidFill>
+            <a:srgbClr val="CADCFC"/>
+          </a:solidFill>
+          <a:ln/>
+        </p:spPr>
+      </p:sp>
+      <p:pic>
+        <p:nvPicPr>
+          <p:cNvPr id="6" name="Image 0" descr="preencoded.png">    </p:cNvPr>
+          <p:cNvPicPr>
+            <a:picLocks noChangeAspect="1"/>
+          </p:cNvPicPr>
+          <p:nvPr/>
+        </p:nvPicPr>
+        <p:blipFill>
+          <a:blip r:embed="rId1"/>
+          <a:stretch>
+            <a:fillRect/>
+          </a:stretch>
+        </p:blipFill>
+        <p:spPr>
+          <a:xfrm>
+            <a:off x="1314450" y="2503170"/>
+            <a:ext cx="342900" cy="342900"/>
+          </a:xfrm>
+          <a:prstGeom prst="rect">
+            <a:avLst/>
+          </a:prstGeom>
+        </p:spPr>
+      </p:pic>
+      <p:sp>
+        <p:nvSpPr>
+          <p:cNvPr id="7" name="Text 4"/>
+          <p:cNvSpPr/>
+          <p:nvPr/>
+        </p:nvSpPr>
+        <p:spPr>
+          <a:xfrm>
+            <a:off x="1143000" y="3200400"/>
+            <a:ext cx="2743200" cy="685800"/>
+          </a:xfrm>
+          <a:prstGeom prst="rect">
+            <a:avLst/>
+          </a:prstGeom>
+          <a:noFill/>
+          <a:ln/>
+        </p:spPr>
+        <p:txBody>
+          <a:bodyPr wrap="square" lIns="0" tIns="0" rIns="0" bIns="0" rtlCol="0" anchor="ctr"/>
+          <a:lstStyle/>
+          <a:p>
+            <a:pPr indent="0" marL="0">
+              <a:buNone/>
+            </a:pPr>
+            <a:r>
+              <a:rPr lang="en-US" sz="1700" b="1" dirty="0">
+                <a:solidFill>
+                  <a:srgbClr val="FFFFFF"/>
+                </a:solidFill>
+                <a:latin typeface="Meiryo" pitchFamily="34" charset="0"/>
+                <a:ea typeface="Meiryo" pitchFamily="34" charset="-122"/>
+                <a:cs typeface="Meiryo" pitchFamily="34" charset="-120"/>
+              </a:rPr>
+              <a:t>意思決定が速くなる</a:t>
+            </a:r>
+            <a:endParaRPr lang="en-US" sz="1700" dirty="0"/>
+          </a:p>
+        </p:txBody>
+      </p:sp>
+      <p:sp>
+        <p:nvSpPr>
+          <p:cNvPr id="8" name="Text 5"/>
+          <p:cNvSpPr/>
+          <p:nvPr/>
+        </p:nvSpPr>
+        <p:spPr>
+          <a:xfrm>
+            <a:off x="1143000" y="3794760"/>
+            <a:ext cx="2743200" cy="777240"/>
+          </a:xfrm>
+          <a:prstGeom prst="rect">
+            <a:avLst/>
+          </a:prstGeom>
+          <a:noFill/>
+          <a:ln/>
+        </p:spPr>
+        <p:txBody>
+          <a:bodyPr wrap="square" lIns="0" tIns="0" rIns="0" bIns="0" rtlCol="0" anchor="ctr"/>
+          <a:lstStyle/>
+          <a:p>
+            <a:pPr indent="0" marL="0">
+              <a:buNone/>
+            </a:pPr>
+            <a:r>
+              <a:rPr lang="en-US" sz="1150" dirty="0">
+                <a:solidFill>
+                  <a:srgbClr val="CADCFC"/>
+                </a:solidFill>
+                <a:latin typeface="Meiryo" pitchFamily="34" charset="0"/>
+                <a:ea typeface="Meiryo" pitchFamily="34" charset="-122"/>
+                <a:cs typeface="Meiryo" pitchFamily="34" charset="-120"/>
+              </a:rPr>
+              <a:t>営業は商談の場で即断。社長確認は本当に必要なものだけに。</a:t>
+            </a:r>
+            <a:endParaRPr lang="en-US" sz="1150" dirty="0"/>
+          </a:p>
+        </p:txBody>
+      </p:sp>
+      <p:sp>
+        <p:nvSpPr>
+          <p:cNvPr id="9" name="Shape 6"/>
+          <p:cNvSpPr/>
+          <p:nvPr/>
+        </p:nvSpPr>
+        <p:spPr>
+          <a:xfrm>
+            <a:off x="4480560" y="2011680"/>
+            <a:ext cx="3383280" cy="2651760"/>
+          </a:xfrm>
+          <a:prstGeom prst="roundRect">
+            <a:avLst>
+              <a:gd name="adj" fmla="val 4138"/>
+            </a:avLst>
+          </a:prstGeom>
+          <a:solidFill>
+            <a:srgbClr val="2A3575"/>
+          </a:solidFill>
+          <a:ln/>
+        </p:spPr>
+      </p:sp>
+      <p:sp>
+        <p:nvSpPr>
+          <p:cNvPr id="10" name="Shape 7"/>
+          <p:cNvSpPr/>
+          <p:nvPr/>
+        </p:nvSpPr>
+        <p:spPr>
+          <a:xfrm>
+            <a:off x="4800600" y="2331720"/>
+            <a:ext cx="685800" cy="685800"/>
+          </a:xfrm>
+          <a:prstGeom prst="ellipse">
+            <a:avLst/>
+          </a:prstGeom>
+          <a:solidFill>
+            <a:srgbClr val="CADCFC"/>
+          </a:solidFill>
+          <a:ln/>
+        </p:spPr>
+      </p:sp>
+      <p:pic>
+        <p:nvPicPr>
+          <p:cNvPr id="11" name="Image 1" descr="preencoded.png">    </p:cNvPr>
+          <p:cNvPicPr>
+            <a:picLocks noChangeAspect="1"/>
+          </p:cNvPicPr>
+          <p:nvPr/>
+        </p:nvPicPr>
+        <p:blipFill>
+          <a:blip r:embed="rId2"/>
+          <a:stretch>
+            <a:fillRect/>
+          </a:stretch>
+        </p:blipFill>
+        <p:spPr>
+          <a:xfrm>
+            <a:off x="4972050" y="2503170"/>
+            <a:ext cx="342900" cy="342900"/>
+          </a:xfrm>
+          <a:prstGeom prst="rect">
+            <a:avLst/>
+          </a:prstGeom>
+        </p:spPr>
+      </p:pic>
+      <p:sp>
+        <p:nvSpPr>
+          <p:cNvPr id="12" name="Text 8"/>
+          <p:cNvSpPr/>
+          <p:nvPr/>
+        </p:nvSpPr>
+        <p:spPr>
+          <a:xfrm>
+            <a:off x="4800600" y="3200400"/>
+            <a:ext cx="2743200" cy="685800"/>
+          </a:xfrm>
+          <a:prstGeom prst="rect">
+            <a:avLst/>
+          </a:prstGeom>
+          <a:noFill/>
+          <a:ln/>
+        </p:spPr>
+        <p:txBody>
+          <a:bodyPr wrap="square" lIns="0" tIns="0" rIns="0" bIns="0" rtlCol="0" anchor="ctr"/>
+          <a:lstStyle/>
+          <a:p>
+            <a:pPr indent="0" marL="0">
+              <a:buNone/>
+            </a:pPr>
+            <a:r>
+              <a:rPr lang="en-US" sz="1700" b="1" dirty="0">
+                <a:solidFill>
+                  <a:srgbClr val="FFFFFF"/>
+                </a:solidFill>
+                <a:latin typeface="Meiryo" pitchFamily="34" charset="0"/>
+                <a:ea typeface="Meiryo" pitchFamily="34" charset="-122"/>
+                <a:cs typeface="Meiryo" pitchFamily="34" charset="-120"/>
+              </a:rPr>
+              <a:t>判断基準が資産になる</a:t>
+            </a:r>
+            <a:endParaRPr lang="en-US" sz="1700" dirty="0"/>
+          </a:p>
+        </p:txBody>
+      </p:sp>
+      <p:sp>
+        <p:nvSpPr>
+          <p:cNvPr id="13" name="Text 9"/>
+          <p:cNvSpPr/>
+          <p:nvPr/>
+        </p:nvSpPr>
+        <p:spPr>
+          <a:xfrm>
+            <a:off x="4800600" y="3794760"/>
+            <a:ext cx="2743200" cy="777240"/>
+          </a:xfrm>
+          <a:prstGeom prst="rect">
+            <a:avLst/>
+          </a:prstGeom>
+          <a:noFill/>
+          <a:ln/>
+        </p:spPr>
+        <p:txBody>
+          <a:bodyPr wrap="square" lIns="0" tIns="0" rIns="0" bIns="0" rtlCol="0" anchor="ctr"/>
+          <a:lstStyle/>
+          <a:p>
+            <a:pPr indent="0" marL="0">
+              <a:buNone/>
+            </a:pPr>
+            <a:r>
+              <a:rPr lang="en-US" sz="1150" dirty="0">
+                <a:solidFill>
+                  <a:srgbClr val="CADCFC"/>
+                </a:solidFill>
+                <a:latin typeface="Meiryo" pitchFamily="34" charset="0"/>
+                <a:ea typeface="Meiryo" pitchFamily="34" charset="-122"/>
+                <a:cs typeface="Meiryo" pitchFamily="34" charset="-120"/>
+              </a:rPr>
+              <a:t>社長の思考・因果関係がNotionに蓄積され、会社の共有財産に。</a:t>
+            </a:r>
+            <a:endParaRPr lang="en-US" sz="1150" dirty="0"/>
+          </a:p>
+        </p:txBody>
+      </p:sp>
+      <p:sp>
+        <p:nvSpPr>
+          <p:cNvPr id="14" name="Shape 10"/>
+          <p:cNvSpPr/>
+          <p:nvPr/>
+        </p:nvSpPr>
+        <p:spPr>
+          <a:xfrm>
+            <a:off x="8138160" y="2011680"/>
+            <a:ext cx="3383280" cy="2651760"/>
+          </a:xfrm>
+          <a:prstGeom prst="roundRect">
+            <a:avLst>
+              <a:gd name="adj" fmla="val 4138"/>
+            </a:avLst>
+          </a:prstGeom>
+          <a:solidFill>
+            <a:srgbClr val="2A3575"/>
+          </a:solidFill>
+          <a:ln/>
+        </p:spPr>
+      </p:sp>
+      <p:sp>
+        <p:nvSpPr>
+          <p:cNvPr id="15" name="Shape 11"/>
+          <p:cNvSpPr/>
+          <p:nvPr/>
+        </p:nvSpPr>
+        <p:spPr>
+          <a:xfrm>
+            <a:off x="8458200" y="2331720"/>
+            <a:ext cx="685800" cy="685800"/>
+          </a:xfrm>
+          <a:prstGeom prst="ellipse">
+            <a:avLst/>
+          </a:prstGeom>
+          <a:solidFill>
+            <a:srgbClr val="CADCFC"/>
+          </a:solidFill>
+          <a:ln/>
+        </p:spPr>
+      </p:sp>
+      <p:pic>
+        <p:nvPicPr>
+          <p:cNvPr id="16" name="Image 2" descr="preencoded.png">    </p:cNvPr>
+          <p:cNvPicPr>
+            <a:picLocks noChangeAspect="1"/>
+          </p:cNvPicPr>
+          <p:nvPr/>
+        </p:nvPicPr>
+        <p:blipFill>
+          <a:blip r:embed="rId3"/>
+          <a:stretch>
+            <a:fillRect/>
+          </a:stretch>
+        </p:blipFill>
+        <p:spPr>
+          <a:xfrm>
+            <a:off x="8629650" y="2503170"/>
+            <a:ext cx="342900" cy="342900"/>
+          </a:xfrm>
+          <a:prstGeom prst="rect">
+            <a:avLst/>
+          </a:prstGeom>
+        </p:spPr>
+      </p:pic>
+      <p:sp>
+        <p:nvSpPr>
+          <p:cNvPr id="17" name="Text 12"/>
+          <p:cNvSpPr/>
+          <p:nvPr/>
+        </p:nvSpPr>
+        <p:spPr>
+          <a:xfrm>
+            <a:off x="8458200" y="3200400"/>
+            <a:ext cx="2743200" cy="685800"/>
+          </a:xfrm>
+          <a:prstGeom prst="rect">
+            <a:avLst/>
+          </a:prstGeom>
+          <a:noFill/>
+          <a:ln/>
+        </p:spPr>
+        <p:txBody>
+          <a:bodyPr wrap="square" lIns="0" tIns="0" rIns="0" bIns="0" rtlCol="0" anchor="ctr"/>
+          <a:lstStyle/>
+          <a:p>
+            <a:pPr indent="0" marL="0">
+              <a:buNone/>
+            </a:pPr>
+            <a:r>
+              <a:rPr lang="en-US" sz="1700" b="1" dirty="0">
+                <a:solidFill>
+                  <a:srgbClr val="FFFFFF"/>
+                </a:solidFill>
+                <a:latin typeface="Meiryo" pitchFamily="34" charset="0"/>
+                <a:ea typeface="Meiryo" pitchFamily="34" charset="-122"/>
+                <a:cs typeface="Meiryo" pitchFamily="34" charset="-120"/>
+              </a:rPr>
+              <a:t>社長の時間が戻ってくる</a:t>
+            </a:r>
+            <a:endParaRPr lang="en-US" sz="1700" dirty="0"/>
+          </a:p>
+        </p:txBody>
+      </p:sp>
+      <p:sp>
+        <p:nvSpPr>
+          <p:cNvPr id="18" name="Text 13"/>
+          <p:cNvSpPr/>
+          <p:nvPr/>
+        </p:nvSpPr>
+        <p:spPr>
+          <a:xfrm>
+            <a:off x="8458200" y="3794760"/>
+            <a:ext cx="2743200" cy="777240"/>
+          </a:xfrm>
+          <a:prstGeom prst="rect">
+            <a:avLst/>
+          </a:prstGeom>
+          <a:noFill/>
+          <a:ln/>
+        </p:spPr>
+        <p:txBody>
+          <a:bodyPr wrap="square" lIns="0" tIns="0" rIns="0" bIns="0" rtlCol="0" anchor="ctr"/>
+          <a:lstStyle/>
+          <a:p>
+            <a:pPr indent="0" marL="0">
+              <a:buNone/>
+            </a:pPr>
+            <a:r>
+              <a:rPr lang="en-US" sz="1150" dirty="0">
+                <a:solidFill>
+                  <a:srgbClr val="CADCFC"/>
+                </a:solidFill>
+                <a:latin typeface="Meiryo" pitchFamily="34" charset="0"/>
+                <a:ea typeface="Meiryo" pitchFamily="34" charset="-122"/>
+                <a:cs typeface="Meiryo" pitchFamily="34" charset="-120"/>
+              </a:rPr>
+              <a:t>一次評価・壁打ち・情報整理をAIが肩代わり。社長は本質的な判断に集中。</a:t>
+            </a:r>
+            <a:endParaRPr lang="en-US" sz="1150" dirty="0"/>
+          </a:p>
+        </p:txBody>
+      </p:sp>
+      <p:sp>
+        <p:nvSpPr>
+          <p:cNvPr id="19" name="Text 14"/>
+          <p:cNvSpPr/>
+          <p:nvPr/>
+        </p:nvSpPr>
+        <p:spPr>
+          <a:xfrm>
+            <a:off x="822960" y="5212080"/>
+            <a:ext cx="10881360" cy="822960"/>
+          </a:xfrm>
+          <a:prstGeom prst="rect">
+            <a:avLst/>
+          </a:prstGeom>
+          <a:noFill/>
+          <a:ln/>
+        </p:spPr>
+        <p:txBody>
+          <a:bodyPr wrap="square" lIns="0" tIns="0" rIns="0" bIns="0" rtlCol="0" anchor="ctr"/>
+          <a:lstStyle/>
+          <a:p>
+            <a:pPr indent="0" marL="0">
+              <a:buNone/>
+            </a:pPr>
+            <a:r>
+              <a:rPr lang="en-US" sz="1400" b="1" dirty="0">
+                <a:solidFill>
+                  <a:srgbClr val="E8A33D"/>
+                </a:solidFill>
+                <a:latin typeface="Meiryo" pitchFamily="34" charset="0"/>
+                <a:ea typeface="Meiryo" pitchFamily="34" charset="-122"/>
+                <a:cs typeface="Meiryo" pitchFamily="34" charset="-120"/>
+              </a:rPr>
+              <a:t>次のアクション　</a:t>
+            </a:r>
+            <a:pPr indent="0" marL="0">
+              <a:buNone/>
+            </a:pPr>
+            <a:r>
+              <a:rPr lang="en-US" sz="1400" dirty="0">
+                <a:solidFill>
+                  <a:srgbClr val="FFFFFF"/>
+                </a:solidFill>
+                <a:latin typeface="Meiryo" pitchFamily="34" charset="0"/>
+                <a:ea typeface="Meiryo" pitchFamily="34" charset="-122"/>
+                <a:cs typeface="Meiryo" pitchFamily="34" charset="-120"/>
+              </a:rPr>
+              <a:t>① ヒアリング日程の確定（60〜90分）　② 導入日に実データで体験　③ 1〜2週間の試用で精度を評価</a:t>
+            </a:r>
+            <a:endParaRPr lang="en-US" sz="1400" dirty="0"/>
           </a:p>
         </p:txBody>
       </p:sp>
@@ -6765,7 +7430,7 @@
                 <a:ea typeface="Meiryo" pitchFamily="34" charset="-122"/>
                 <a:cs typeface="Meiryo" pitchFamily="34" charset="-120"/>
               </a:rPr>
-              <a:t>AI利用料は無料枠から開始可能。追加の主要コストは Notion 有料プラン（複数人利用時）と録音デバイス実費のみ。</a:t>
+              <a:t>無料枠から開始でき、標準構成でも月1万円前後。予算の詳細は次ページ。</a:t>
             </a:r>
             <a:endParaRPr lang="en-US" sz="1300" dirty="0"/>
           </a:p>
@@ -6785,7 +7450,7 @@
     <p:bg>
       <p:bgPr>
         <a:solidFill>
-          <a:srgbClr val="1E2761"/>
+          <a:srgbClr val="FFFFFF"/>
         </a:solidFill>
       </p:bgPr>
     </p:bg>
@@ -6811,102 +7476,21 @@
         </p:nvSpPr>
         <p:spPr>
           <a:xfrm>
-            <a:off x="10241280" y="4480560"/>
-            <a:ext cx="3291840" cy="3291840"/>
+            <a:off x="640080" y="502920"/>
+            <a:ext cx="685800" cy="685800"/>
           </a:xfrm>
           <a:prstGeom prst="ellipse">
             <a:avLst/>
           </a:prstGeom>
           <a:solidFill>
-            <a:srgbClr val="2A3575"/>
-          </a:solidFill>
-          <a:ln/>
-        </p:spPr>
-      </p:sp>
-      <p:sp>
-        <p:nvSpPr>
-          <p:cNvPr id="3" name="Text 1"/>
-          <p:cNvSpPr/>
-          <p:nvPr/>
-        </p:nvSpPr>
-        <p:spPr>
-          <a:xfrm>
-            <a:off x="822960" y="777240"/>
-            <a:ext cx="10515600" cy="914400"/>
-          </a:xfrm>
-          <a:prstGeom prst="rect">
-            <a:avLst/>
-          </a:prstGeom>
-          <a:noFill/>
-          <a:ln/>
-        </p:spPr>
-        <p:txBody>
-          <a:bodyPr wrap="square" lIns="0" tIns="0" rIns="0" bIns="0" rtlCol="0" anchor="ctr"/>
-          <a:lstStyle/>
-          <a:p>
-            <a:pPr indent="0" marL="0">
-              <a:buNone/>
-            </a:pPr>
-            <a:r>
-              <a:rPr lang="en-US" sz="4400" b="1" dirty="0">
-                <a:solidFill>
-                  <a:srgbClr val="FFFFFF"/>
-                </a:solidFill>
-                <a:latin typeface="Meiryo" pitchFamily="34" charset="0"/>
-                <a:ea typeface="Meiryo" pitchFamily="34" charset="-122"/>
-                <a:cs typeface="Meiryo" pitchFamily="34" charset="-120"/>
-              </a:rPr>
-              <a:t>待たない現場へ。</a:t>
-            </a:r>
-            <a:endParaRPr lang="en-US" sz="4400" dirty="0"/>
-          </a:p>
-        </p:txBody>
-      </p:sp>
-      <p:sp>
-        <p:nvSpPr>
-          <p:cNvPr id="4" name="Shape 2"/>
-          <p:cNvSpPr/>
-          <p:nvPr/>
-        </p:nvSpPr>
-        <p:spPr>
-          <a:xfrm>
-            <a:off x="822960" y="2011680"/>
-            <a:ext cx="3383280" cy="2651760"/>
-          </a:xfrm>
-          <a:prstGeom prst="roundRect">
-            <a:avLst>
-              <a:gd name="adj" fmla="val 4138"/>
-            </a:avLst>
-          </a:prstGeom>
-          <a:solidFill>
-            <a:srgbClr val="2A3575"/>
-          </a:solidFill>
-          <a:ln/>
-        </p:spPr>
-      </p:sp>
-      <p:sp>
-        <p:nvSpPr>
-          <p:cNvPr id="5" name="Shape 3"/>
-          <p:cNvSpPr/>
-          <p:nvPr/>
-        </p:nvSpPr>
-        <p:spPr>
-          <a:xfrm>
-            <a:off x="1143000" y="2331720"/>
-            <a:ext cx="685800" cy="685800"/>
-          </a:xfrm>
-          <a:prstGeom prst="ellipse">
-            <a:avLst/>
-          </a:prstGeom>
-          <a:solidFill>
-            <a:srgbClr val="CADCFC"/>
+            <a:srgbClr val="1E2761"/>
           </a:solidFill>
           <a:ln/>
         </p:spPr>
       </p:sp>
       <p:pic>
         <p:nvPicPr>
-          <p:cNvPr id="6" name="Image 0" descr="preencoded.png">    </p:cNvPr>
+          <p:cNvPr id="3" name="Image 0" descr="preencoded.png">    </p:cNvPr>
           <p:cNvPicPr>
             <a:picLocks noChangeAspect="1"/>
           </p:cNvPicPr>
@@ -6920,7 +7504,7 @@
         </p:blipFill>
         <p:spPr>
           <a:xfrm>
-            <a:off x="1314450" y="2503170"/>
+            <a:off x="811530" y="674370"/>
             <a:ext cx="342900" cy="342900"/>
           </a:xfrm>
           <a:prstGeom prst="rect">
@@ -6930,116 +7514,467 @@
       </p:pic>
       <p:sp>
         <p:nvSpPr>
-          <p:cNvPr id="7" name="Text 4"/>
-          <p:cNvSpPr/>
-          <p:nvPr/>
-        </p:nvSpPr>
-        <p:spPr>
-          <a:xfrm>
-            <a:off x="1143000" y="3200400"/>
-            <a:ext cx="2743200" cy="685800"/>
-          </a:xfrm>
-          <a:prstGeom prst="rect">
-            <a:avLst/>
-          </a:prstGeom>
-          <a:noFill/>
-          <a:ln/>
-        </p:spPr>
-        <p:txBody>
-          <a:bodyPr wrap="square" lIns="0" tIns="0" rIns="0" bIns="0" rtlCol="0" anchor="ctr"/>
-          <a:lstStyle/>
-          <a:p>
-            <a:pPr indent="0" marL="0">
-              <a:buNone/>
-            </a:pPr>
-            <a:r>
-              <a:rPr lang="en-US" sz="1700" b="1" dirty="0">
-                <a:solidFill>
-                  <a:srgbClr val="FFFFFF"/>
-                </a:solidFill>
-                <a:latin typeface="Meiryo" pitchFamily="34" charset="0"/>
-                <a:ea typeface="Meiryo" pitchFamily="34" charset="-122"/>
-                <a:cs typeface="Meiryo" pitchFamily="34" charset="-120"/>
-              </a:rPr>
-              <a:t>意思決定が速くなる</a:t>
-            </a:r>
-            <a:endParaRPr lang="en-US" sz="1700" dirty="0"/>
-          </a:p>
-        </p:txBody>
-      </p:sp>
-      <p:sp>
-        <p:nvSpPr>
-          <p:cNvPr id="8" name="Text 5"/>
-          <p:cNvSpPr/>
-          <p:nvPr/>
-        </p:nvSpPr>
-        <p:spPr>
-          <a:xfrm>
-            <a:off x="1143000" y="3794760"/>
-            <a:ext cx="2743200" cy="777240"/>
-          </a:xfrm>
-          <a:prstGeom prst="rect">
-            <a:avLst/>
-          </a:prstGeom>
-          <a:noFill/>
-          <a:ln/>
-        </p:spPr>
-        <p:txBody>
-          <a:bodyPr wrap="square" lIns="0" tIns="0" rIns="0" bIns="0" rtlCol="0" anchor="ctr"/>
-          <a:lstStyle/>
-          <a:p>
-            <a:pPr indent="0" marL="0">
-              <a:buNone/>
-            </a:pPr>
-            <a:r>
-              <a:rPr lang="en-US" sz="1150" dirty="0">
-                <a:solidFill>
-                  <a:srgbClr val="CADCFC"/>
-                </a:solidFill>
-                <a:latin typeface="Meiryo" pitchFamily="34" charset="0"/>
-                <a:ea typeface="Meiryo" pitchFamily="34" charset="-122"/>
-                <a:cs typeface="Meiryo" pitchFamily="34" charset="-120"/>
-              </a:rPr>
-              <a:t>営業は商談の場で即断。社長確認は本当に必要なものだけに。</a:t>
-            </a:r>
-            <a:endParaRPr lang="en-US" sz="1150" dirty="0"/>
-          </a:p>
-        </p:txBody>
-      </p:sp>
-      <p:sp>
-        <p:nvSpPr>
-          <p:cNvPr id="9" name="Shape 6"/>
-          <p:cNvSpPr/>
-          <p:nvPr/>
-        </p:nvSpPr>
-        <p:spPr>
-          <a:xfrm>
-            <a:off x="4480560" y="2011680"/>
-            <a:ext cx="3383280" cy="2651760"/>
+          <p:cNvPr id="4" name="Text 1"/>
+          <p:cNvSpPr/>
+          <p:nvPr/>
+        </p:nvSpPr>
+        <p:spPr>
+          <a:xfrm>
+            <a:off x="1508760" y="566928"/>
+            <a:ext cx="9601200" cy="594360"/>
+          </a:xfrm>
+          <a:prstGeom prst="rect">
+            <a:avLst/>
+          </a:prstGeom>
+          <a:noFill/>
+          <a:ln/>
+        </p:spPr>
+        <p:txBody>
+          <a:bodyPr wrap="square" lIns="0" tIns="0" rIns="0" bIns="0" rtlCol="0" anchor="ctr"/>
+          <a:lstStyle/>
+          <a:p>
+            <a:pPr indent="0" marL="0">
+              <a:buNone/>
+            </a:pPr>
+            <a:r>
+              <a:rPr lang="en-US" sz="3200" b="1" dirty="0">
+                <a:solidFill>
+                  <a:srgbClr val="1C2333"/>
+                </a:solidFill>
+                <a:latin typeface="Meiryo" pitchFamily="34" charset="0"/>
+                <a:ea typeface="Meiryo" pitchFamily="34" charset="-122"/>
+                <a:cs typeface="Meiryo" pitchFamily="34" charset="-120"/>
+              </a:rPr>
+              <a:t>予算 — 標準構成で月1万円前後</a:t>
+            </a:r>
+            <a:endParaRPr lang="en-US" sz="3200" dirty="0"/>
+          </a:p>
+        </p:txBody>
+      </p:sp>
+      <p:sp>
+        <p:nvSpPr>
+          <p:cNvPr id="5" name="Shape 2"/>
+          <p:cNvSpPr/>
+          <p:nvPr/>
+        </p:nvSpPr>
+        <p:spPr>
+          <a:xfrm>
+            <a:off x="640080" y="1463040"/>
+            <a:ext cx="5440680" cy="3977640"/>
           </a:xfrm>
           <a:prstGeom prst="roundRect">
             <a:avLst>
-              <a:gd name="adj" fmla="val 4138"/>
+              <a:gd name="adj" fmla="val 2759"/>
             </a:avLst>
           </a:prstGeom>
           <a:solidFill>
-            <a:srgbClr val="2A3575"/>
+            <a:srgbClr val="EDF3FD"/>
           </a:solidFill>
           <a:ln/>
         </p:spPr>
       </p:sp>
       <p:sp>
         <p:nvSpPr>
-          <p:cNvPr id="10" name="Shape 7"/>
-          <p:cNvSpPr/>
-          <p:nvPr/>
-        </p:nvSpPr>
-        <p:spPr>
-          <a:xfrm>
-            <a:off x="4800600" y="2331720"/>
-            <a:ext cx="685800" cy="685800"/>
-          </a:xfrm>
-          <a:prstGeom prst="ellipse">
+          <p:cNvPr id="6" name="Text 3"/>
+          <p:cNvSpPr/>
+          <p:nvPr/>
+        </p:nvSpPr>
+        <p:spPr>
+          <a:xfrm>
+            <a:off x="914400" y="1645920"/>
+            <a:ext cx="4892040" cy="411480"/>
+          </a:xfrm>
+          <a:prstGeom prst="rect">
+            <a:avLst/>
+          </a:prstGeom>
+          <a:noFill/>
+          <a:ln/>
+        </p:spPr>
+        <p:txBody>
+          <a:bodyPr wrap="square" lIns="0" tIns="0" rIns="0" bIns="0" rtlCol="0" anchor="ctr"/>
+          <a:lstStyle/>
+          <a:p>
+            <a:pPr indent="0" marL="0">
+              <a:buNone/>
+            </a:pPr>
+            <a:r>
+              <a:rPr lang="en-US" sz="1700" b="1" dirty="0">
+                <a:solidFill>
+                  <a:srgbClr val="1E2761"/>
+                </a:solidFill>
+                <a:latin typeface="Meiryo" pitchFamily="34" charset="0"/>
+                <a:ea typeface="Meiryo" pitchFamily="34" charset="-122"/>
+                <a:cs typeface="Meiryo" pitchFamily="34" charset="-120"/>
+              </a:rPr>
+              <a:t>初期費用（一度だけ）</a:t>
+            </a:r>
+            <a:endParaRPr lang="en-US" sz="1700" dirty="0"/>
+          </a:p>
+        </p:txBody>
+      </p:sp>
+      <p:sp>
+        <p:nvSpPr>
+          <p:cNvPr id="7" name="Text 4"/>
+          <p:cNvSpPr/>
+          <p:nvPr/>
+        </p:nvSpPr>
+        <p:spPr>
+          <a:xfrm>
+            <a:off x="914400" y="2240280"/>
+            <a:ext cx="2697480" cy="365760"/>
+          </a:xfrm>
+          <a:prstGeom prst="rect">
+            <a:avLst/>
+          </a:prstGeom>
+          <a:noFill/>
+          <a:ln/>
+        </p:spPr>
+        <p:txBody>
+          <a:bodyPr wrap="square" lIns="0" tIns="0" rIns="0" bIns="0" rtlCol="0" anchor="ctr"/>
+          <a:lstStyle/>
+          <a:p>
+            <a:pPr indent="0" marL="0">
+              <a:buNone/>
+            </a:pPr>
+            <a:r>
+              <a:rPr lang="en-US" sz="1350" dirty="0">
+                <a:solidFill>
+                  <a:srgbClr val="1C2333"/>
+                </a:solidFill>
+                <a:latin typeface="Meiryo" pitchFamily="34" charset="0"/>
+                <a:ea typeface="Meiryo" pitchFamily="34" charset="-122"/>
+                <a:cs typeface="Meiryo" pitchFamily="34" charset="-120"/>
+              </a:rPr>
+              <a:t>Mac（実行端末）</a:t>
+            </a:r>
+            <a:endParaRPr lang="en-US" sz="1350" dirty="0"/>
+          </a:p>
+        </p:txBody>
+      </p:sp>
+      <p:sp>
+        <p:nvSpPr>
+          <p:cNvPr id="8" name="Text 5"/>
+          <p:cNvSpPr/>
+          <p:nvPr/>
+        </p:nvSpPr>
+        <p:spPr>
+          <a:xfrm>
+            <a:off x="914400" y="2569464"/>
+            <a:ext cx="2697480" cy="320040"/>
+          </a:xfrm>
+          <a:prstGeom prst="rect">
+            <a:avLst/>
+          </a:prstGeom>
+          <a:noFill/>
+          <a:ln/>
+        </p:spPr>
+        <p:txBody>
+          <a:bodyPr wrap="square" lIns="0" tIns="0" rIns="0" bIns="0" rtlCol="0" anchor="ctr"/>
+          <a:lstStyle/>
+          <a:p>
+            <a:pPr indent="0" marL="0">
+              <a:buNone/>
+            </a:pPr>
+            <a:r>
+              <a:rPr lang="en-US" sz="1050" dirty="0">
+                <a:solidFill>
+                  <a:srgbClr val="5A6474"/>
+                </a:solidFill>
+                <a:latin typeface="Meiryo" pitchFamily="34" charset="0"/>
+                <a:ea typeface="Meiryo" pitchFamily="34" charset="-122"/>
+                <a:cs typeface="Meiryo" pitchFamily="34" charset="-120"/>
+              </a:rPr>
+              <a:t>購入予定のものをそのまま使用</a:t>
+            </a:r>
+            <a:endParaRPr lang="en-US" sz="1050" dirty="0"/>
+          </a:p>
+        </p:txBody>
+      </p:sp>
+      <p:sp>
+        <p:nvSpPr>
+          <p:cNvPr id="9" name="Text 6"/>
+          <p:cNvSpPr/>
+          <p:nvPr/>
+        </p:nvSpPr>
+        <p:spPr>
+          <a:xfrm>
+            <a:off x="3474720" y="2240280"/>
+            <a:ext cx="2331720" cy="384048"/>
+          </a:xfrm>
+          <a:prstGeom prst="rect">
+            <a:avLst/>
+          </a:prstGeom>
+          <a:noFill/>
+          <a:ln/>
+        </p:spPr>
+        <p:txBody>
+          <a:bodyPr wrap="square" lIns="0" tIns="0" rIns="0" bIns="0" rtlCol="0" anchor="ctr"/>
+          <a:lstStyle/>
+          <a:p>
+            <a:pPr algn="r" indent="0" marL="0">
+              <a:buNone/>
+            </a:pPr>
+            <a:r>
+              <a:rPr lang="en-US" sz="1350" dirty="0">
+                <a:solidFill>
+                  <a:srgbClr val="1C2333"/>
+                </a:solidFill>
+                <a:latin typeface="Meiryo" pitchFamily="34" charset="0"/>
+                <a:ea typeface="Meiryo" pitchFamily="34" charset="-122"/>
+                <a:cs typeface="Meiryo" pitchFamily="34" charset="-120"/>
+              </a:rPr>
+              <a:t>10〜15万円</a:t>
+            </a:r>
+            <a:endParaRPr lang="en-US" sz="1350" dirty="0"/>
+          </a:p>
+        </p:txBody>
+      </p:sp>
+      <p:sp>
+        <p:nvSpPr>
+          <p:cNvPr id="10" name="Text 7"/>
+          <p:cNvSpPr/>
+          <p:nvPr/>
+        </p:nvSpPr>
+        <p:spPr>
+          <a:xfrm>
+            <a:off x="914400" y="2971800"/>
+            <a:ext cx="2697480" cy="365760"/>
+          </a:xfrm>
+          <a:prstGeom prst="rect">
+            <a:avLst/>
+          </a:prstGeom>
+          <a:noFill/>
+          <a:ln/>
+        </p:spPr>
+        <p:txBody>
+          <a:bodyPr wrap="square" lIns="0" tIns="0" rIns="0" bIns="0" rtlCol="0" anchor="ctr"/>
+          <a:lstStyle/>
+          <a:p>
+            <a:pPr indent="0" marL="0">
+              <a:buNone/>
+            </a:pPr>
+            <a:r>
+              <a:rPr lang="en-US" sz="1350" dirty="0">
+                <a:solidFill>
+                  <a:srgbClr val="1C2333"/>
+                </a:solidFill>
+                <a:latin typeface="Meiryo" pitchFamily="34" charset="0"/>
+                <a:ea typeface="Meiryo" pitchFamily="34" charset="-122"/>
+                <a:cs typeface="Meiryo" pitchFamily="34" charset="-120"/>
+              </a:rPr>
+              <a:t>Plaud NotePin S</a:t>
+            </a:r>
+            <a:endParaRPr lang="en-US" sz="1350" dirty="0"/>
+          </a:p>
+        </p:txBody>
+      </p:sp>
+      <p:sp>
+        <p:nvSpPr>
+          <p:cNvPr id="11" name="Text 8"/>
+          <p:cNvSpPr/>
+          <p:nvPr/>
+        </p:nvSpPr>
+        <p:spPr>
+          <a:xfrm>
+            <a:off x="914400" y="3300984"/>
+            <a:ext cx="2697480" cy="320040"/>
+          </a:xfrm>
+          <a:prstGeom prst="rect">
+            <a:avLst/>
+          </a:prstGeom>
+          <a:noFill/>
+          <a:ln/>
+        </p:spPr>
+        <p:txBody>
+          <a:bodyPr wrap="square" lIns="0" tIns="0" rIns="0" bIns="0" rtlCol="0" anchor="ctr"/>
+          <a:lstStyle/>
+          <a:p>
+            <a:pPr indent="0" marL="0">
+              <a:buNone/>
+            </a:pPr>
+            <a:r>
+              <a:rPr lang="en-US" sz="1050" dirty="0">
+                <a:solidFill>
+                  <a:srgbClr val="5A6474"/>
+                </a:solidFill>
+                <a:latin typeface="Meiryo" pitchFamily="34" charset="0"/>
+                <a:ea typeface="Meiryo" pitchFamily="34" charset="-122"/>
+                <a:cs typeface="Meiryo" pitchFamily="34" charset="-120"/>
+              </a:rPr>
+              <a:t>録音デバイス（月300分の文字起こし込み）</a:t>
+            </a:r>
+            <a:endParaRPr lang="en-US" sz="1050" dirty="0"/>
+          </a:p>
+        </p:txBody>
+      </p:sp>
+      <p:sp>
+        <p:nvSpPr>
+          <p:cNvPr id="12" name="Text 9"/>
+          <p:cNvSpPr/>
+          <p:nvPr/>
+        </p:nvSpPr>
+        <p:spPr>
+          <a:xfrm>
+            <a:off x="3474720" y="2971800"/>
+            <a:ext cx="2331720" cy="384048"/>
+          </a:xfrm>
+          <a:prstGeom prst="rect">
+            <a:avLst/>
+          </a:prstGeom>
+          <a:noFill/>
+          <a:ln/>
+        </p:spPr>
+        <p:txBody>
+          <a:bodyPr wrap="square" lIns="0" tIns="0" rIns="0" bIns="0" rtlCol="0" anchor="ctr"/>
+          <a:lstStyle/>
+          <a:p>
+            <a:pPr algn="r" indent="0" marL="0">
+              <a:buNone/>
+            </a:pPr>
+            <a:r>
+              <a:rPr lang="en-US" sz="1350" dirty="0">
+                <a:solidFill>
+                  <a:srgbClr val="1C2333"/>
+                </a:solidFill>
+                <a:latin typeface="Meiryo" pitchFamily="34" charset="0"/>
+                <a:ea typeface="Meiryo" pitchFamily="34" charset="-122"/>
+                <a:cs typeface="Meiryo" pitchFamily="34" charset="-120"/>
+              </a:rPr>
+              <a:t>約2.5万円</a:t>
+            </a:r>
+            <a:endParaRPr lang="en-US" sz="1350" dirty="0"/>
+          </a:p>
+        </p:txBody>
+      </p:sp>
+      <p:sp>
+        <p:nvSpPr>
+          <p:cNvPr id="13" name="Text 10"/>
+          <p:cNvSpPr/>
+          <p:nvPr/>
+        </p:nvSpPr>
+        <p:spPr>
+          <a:xfrm>
+            <a:off x="914400" y="3703320"/>
+            <a:ext cx="2697480" cy="365760"/>
+          </a:xfrm>
+          <a:prstGeom prst="rect">
+            <a:avLst/>
+          </a:prstGeom>
+          <a:noFill/>
+          <a:ln/>
+        </p:spPr>
+        <p:txBody>
+          <a:bodyPr wrap="square" lIns="0" tIns="0" rIns="0" bIns="0" rtlCol="0" anchor="ctr"/>
+          <a:lstStyle/>
+          <a:p>
+            <a:pPr indent="0" marL="0">
+              <a:buNone/>
+            </a:pPr>
+            <a:r>
+              <a:rPr lang="en-US" sz="1350" dirty="0">
+                <a:solidFill>
+                  <a:srgbClr val="1C2333"/>
+                </a:solidFill>
+                <a:latin typeface="Meiryo" pitchFamily="34" charset="0"/>
+                <a:ea typeface="Meiryo" pitchFamily="34" charset="-122"/>
+                <a:cs typeface="Meiryo" pitchFamily="34" charset="-120"/>
+              </a:rPr>
+              <a:t>システム構築費</a:t>
+            </a:r>
+            <a:endParaRPr lang="en-US" sz="1350" dirty="0"/>
+          </a:p>
+        </p:txBody>
+      </p:sp>
+      <p:sp>
+        <p:nvSpPr>
+          <p:cNvPr id="14" name="Text 11"/>
+          <p:cNvSpPr/>
+          <p:nvPr/>
+        </p:nvSpPr>
+        <p:spPr>
+          <a:xfrm>
+            <a:off x="914400" y="4032504"/>
+            <a:ext cx="2697480" cy="320040"/>
+          </a:xfrm>
+          <a:prstGeom prst="rect">
+            <a:avLst/>
+          </a:prstGeom>
+          <a:noFill/>
+          <a:ln/>
+        </p:spPr>
+        <p:txBody>
+          <a:bodyPr wrap="square" lIns="0" tIns="0" rIns="0" bIns="0" rtlCol="0" anchor="ctr"/>
+          <a:lstStyle/>
+          <a:p>
+            <a:pPr indent="0" marL="0">
+              <a:buNone/>
+            </a:pPr>
+            <a:r>
+              <a:rPr lang="en-US" sz="1050" dirty="0">
+                <a:solidFill>
+                  <a:srgbClr val="5A6474"/>
+                </a:solidFill>
+                <a:latin typeface="Meiryo" pitchFamily="34" charset="0"/>
+                <a:ea typeface="Meiryo" pitchFamily="34" charset="-122"/>
+                <a:cs typeface="Meiryo" pitchFamily="34" charset="-120"/>
+              </a:rPr>
+              <a:t>自社構築済みのため外注費なし</a:t>
+            </a:r>
+            <a:endParaRPr lang="en-US" sz="1050" dirty="0"/>
+          </a:p>
+        </p:txBody>
+      </p:sp>
+      <p:sp>
+        <p:nvSpPr>
+          <p:cNvPr id="15" name="Text 12"/>
+          <p:cNvSpPr/>
+          <p:nvPr/>
+        </p:nvSpPr>
+        <p:spPr>
+          <a:xfrm>
+            <a:off x="3474720" y="3703320"/>
+            <a:ext cx="2331720" cy="384048"/>
+          </a:xfrm>
+          <a:prstGeom prst="rect">
+            <a:avLst/>
+          </a:prstGeom>
+          <a:noFill/>
+          <a:ln/>
+        </p:spPr>
+        <p:txBody>
+          <a:bodyPr wrap="square" lIns="0" tIns="0" rIns="0" bIns="0" rtlCol="0" anchor="ctr"/>
+          <a:lstStyle/>
+          <a:p>
+            <a:pPr algn="r" indent="0" marL="0">
+              <a:buNone/>
+            </a:pPr>
+            <a:r>
+              <a:rPr lang="en-US" sz="1350" dirty="0">
+                <a:solidFill>
+                  <a:srgbClr val="1C2333"/>
+                </a:solidFill>
+                <a:latin typeface="Meiryo" pitchFamily="34" charset="0"/>
+                <a:ea typeface="Meiryo" pitchFamily="34" charset="-122"/>
+                <a:cs typeface="Meiryo" pitchFamily="34" charset="-120"/>
+              </a:rPr>
+              <a:t>0円</a:t>
+            </a:r>
+            <a:endParaRPr lang="en-US" sz="1350" dirty="0"/>
+          </a:p>
+        </p:txBody>
+      </p:sp>
+      <p:sp>
+        <p:nvSpPr>
+          <p:cNvPr id="16" name="Shape 13"/>
+          <p:cNvSpPr/>
+          <p:nvPr/>
+        </p:nvSpPr>
+        <p:spPr>
+          <a:xfrm>
+            <a:off x="914400" y="4828032"/>
+            <a:ext cx="4892040" cy="18288"/>
+          </a:xfrm>
+          <a:prstGeom prst="rect">
             <a:avLst/>
           </a:prstGeom>
           <a:solidFill>
@@ -7048,142 +7983,625 @@
           <a:ln/>
         </p:spPr>
       </p:sp>
-      <p:pic>
-        <p:nvPicPr>
-          <p:cNvPr id="11" name="Image 1" descr="preencoded.png">    </p:cNvPr>
-          <p:cNvPicPr>
-            <a:picLocks noChangeAspect="1"/>
-          </p:cNvPicPr>
-          <p:nvPr/>
-        </p:nvPicPr>
-        <p:blipFill>
-          <a:blip r:embed="rId2"/>
-          <a:stretch>
-            <a:fillRect/>
-          </a:stretch>
-        </p:blipFill>
-        <p:spPr>
-          <a:xfrm>
-            <a:off x="4972050" y="2503170"/>
-            <a:ext cx="342900" cy="342900"/>
-          </a:xfrm>
-          <a:prstGeom prst="rect">
-            <a:avLst/>
-          </a:prstGeom>
-        </p:spPr>
-      </p:pic>
-      <p:sp>
-        <p:nvSpPr>
-          <p:cNvPr id="12" name="Text 8"/>
-          <p:cNvSpPr/>
-          <p:nvPr/>
-        </p:nvSpPr>
-        <p:spPr>
-          <a:xfrm>
-            <a:off x="4800600" y="3200400"/>
-            <a:ext cx="2743200" cy="685800"/>
-          </a:xfrm>
-          <a:prstGeom prst="rect">
-            <a:avLst/>
-          </a:prstGeom>
-          <a:noFill/>
-          <a:ln/>
-        </p:spPr>
-        <p:txBody>
-          <a:bodyPr wrap="square" lIns="0" tIns="0" rIns="0" bIns="0" rtlCol="0" anchor="ctr"/>
-          <a:lstStyle/>
-          <a:p>
-            <a:pPr indent="0" marL="0">
-              <a:buNone/>
-            </a:pPr>
-            <a:r>
-              <a:rPr lang="en-US" sz="1700" b="1" dirty="0">
-                <a:solidFill>
-                  <a:srgbClr val="FFFFFF"/>
-                </a:solidFill>
-                <a:latin typeface="Meiryo" pitchFamily="34" charset="0"/>
-                <a:ea typeface="Meiryo" pitchFamily="34" charset="-122"/>
-                <a:cs typeface="Meiryo" pitchFamily="34" charset="-120"/>
-              </a:rPr>
-              <a:t>判断基準が資産になる</a:t>
-            </a:r>
-            <a:endParaRPr lang="en-US" sz="1700" dirty="0"/>
-          </a:p>
-        </p:txBody>
-      </p:sp>
-      <p:sp>
-        <p:nvSpPr>
-          <p:cNvPr id="13" name="Text 9"/>
-          <p:cNvSpPr/>
-          <p:nvPr/>
-        </p:nvSpPr>
-        <p:spPr>
-          <a:xfrm>
-            <a:off x="4800600" y="3794760"/>
-            <a:ext cx="2743200" cy="777240"/>
-          </a:xfrm>
-          <a:prstGeom prst="rect">
-            <a:avLst/>
-          </a:prstGeom>
-          <a:noFill/>
-          <a:ln/>
-        </p:spPr>
-        <p:txBody>
-          <a:bodyPr wrap="square" lIns="0" tIns="0" rIns="0" bIns="0" rtlCol="0" anchor="ctr"/>
-          <a:lstStyle/>
-          <a:p>
-            <a:pPr indent="0" marL="0">
-              <a:buNone/>
-            </a:pPr>
-            <a:r>
-              <a:rPr lang="en-US" sz="1150" dirty="0">
-                <a:solidFill>
-                  <a:srgbClr val="CADCFC"/>
-                </a:solidFill>
-                <a:latin typeface="Meiryo" pitchFamily="34" charset="0"/>
-                <a:ea typeface="Meiryo" pitchFamily="34" charset="-122"/>
-                <a:cs typeface="Meiryo" pitchFamily="34" charset="-120"/>
-              </a:rPr>
-              <a:t>社長の思考・因果関係がNotionに蓄積され、会社の共有財産に。</a:t>
-            </a:r>
-            <a:endParaRPr lang="en-US" sz="1150" dirty="0"/>
-          </a:p>
-        </p:txBody>
-      </p:sp>
-      <p:sp>
-        <p:nvSpPr>
-          <p:cNvPr id="14" name="Shape 10"/>
-          <p:cNvSpPr/>
-          <p:nvPr/>
-        </p:nvSpPr>
-        <p:spPr>
-          <a:xfrm>
-            <a:off x="8138160" y="2011680"/>
-            <a:ext cx="3383280" cy="2651760"/>
+      <p:sp>
+        <p:nvSpPr>
+          <p:cNvPr id="17" name="Text 14"/>
+          <p:cNvSpPr/>
+          <p:nvPr/>
+        </p:nvSpPr>
+        <p:spPr>
+          <a:xfrm>
+            <a:off x="914400" y="4956048"/>
+            <a:ext cx="2697480" cy="365760"/>
+          </a:xfrm>
+          <a:prstGeom prst="rect">
+            <a:avLst/>
+          </a:prstGeom>
+          <a:noFill/>
+          <a:ln/>
+        </p:spPr>
+        <p:txBody>
+          <a:bodyPr wrap="square" lIns="0" tIns="0" rIns="0" bIns="0" rtlCol="0" anchor="ctr"/>
+          <a:lstStyle/>
+          <a:p>
+            <a:pPr indent="0" marL="0">
+              <a:buNone/>
+            </a:pPr>
+            <a:r>
+              <a:rPr lang="en-US" sz="1350" b="1" dirty="0">
+                <a:solidFill>
+                  <a:srgbClr val="1C2333"/>
+                </a:solidFill>
+                <a:latin typeface="Meiryo" pitchFamily="34" charset="0"/>
+                <a:ea typeface="Meiryo" pitchFamily="34" charset="-122"/>
+                <a:cs typeface="Meiryo" pitchFamily="34" charset="-120"/>
+              </a:rPr>
+              <a:t>初期費用 合計</a:t>
+            </a:r>
+            <a:endParaRPr lang="en-US" sz="1350" dirty="0"/>
+          </a:p>
+        </p:txBody>
+      </p:sp>
+      <p:sp>
+        <p:nvSpPr>
+          <p:cNvPr id="18" name="Text 15"/>
+          <p:cNvSpPr/>
+          <p:nvPr/>
+        </p:nvSpPr>
+        <p:spPr>
+          <a:xfrm>
+            <a:off x="3474720" y="4956048"/>
+            <a:ext cx="2331720" cy="384048"/>
+          </a:xfrm>
+          <a:prstGeom prst="rect">
+            <a:avLst/>
+          </a:prstGeom>
+          <a:noFill/>
+          <a:ln/>
+        </p:spPr>
+        <p:txBody>
+          <a:bodyPr wrap="square" lIns="0" tIns="0" rIns="0" bIns="0" rtlCol="0" anchor="ctr"/>
+          <a:lstStyle/>
+          <a:p>
+            <a:pPr algn="r" indent="0" marL="0">
+              <a:buNone/>
+            </a:pPr>
+            <a:r>
+              <a:rPr lang="en-US" sz="1350" b="1" dirty="0">
+                <a:solidFill>
+                  <a:srgbClr val="1E2761"/>
+                </a:solidFill>
+                <a:latin typeface="Meiryo" pitchFamily="34" charset="0"/>
+                <a:ea typeface="Meiryo" pitchFamily="34" charset="-122"/>
+                <a:cs typeface="Meiryo" pitchFamily="34" charset="-120"/>
+              </a:rPr>
+              <a:t>約13〜18万円</a:t>
+            </a:r>
+            <a:endParaRPr lang="en-US" sz="1350" dirty="0"/>
+          </a:p>
+        </p:txBody>
+      </p:sp>
+      <p:sp>
+        <p:nvSpPr>
+          <p:cNvPr id="19" name="Shape 16"/>
+          <p:cNvSpPr/>
+          <p:nvPr/>
+        </p:nvSpPr>
+        <p:spPr>
+          <a:xfrm>
+            <a:off x="6355080" y="1463040"/>
+            <a:ext cx="5193792" cy="3977640"/>
           </a:xfrm>
           <a:prstGeom prst="roundRect">
             <a:avLst>
-              <a:gd name="adj" fmla="val 4138"/>
+              <a:gd name="adj" fmla="val 2759"/>
             </a:avLst>
           </a:prstGeom>
           <a:solidFill>
-            <a:srgbClr val="2A3575"/>
+            <a:srgbClr val="EDF3FD"/>
           </a:solidFill>
           <a:ln/>
         </p:spPr>
       </p:sp>
       <p:sp>
         <p:nvSpPr>
-          <p:cNvPr id="15" name="Shape 11"/>
-          <p:cNvSpPr/>
-          <p:nvPr/>
-        </p:nvSpPr>
-        <p:spPr>
-          <a:xfrm>
-            <a:off x="8458200" y="2331720"/>
-            <a:ext cx="685800" cy="685800"/>
-          </a:xfrm>
-          <a:prstGeom prst="ellipse">
+          <p:cNvPr id="20" name="Text 17"/>
+          <p:cNvSpPr/>
+          <p:nvPr/>
+        </p:nvSpPr>
+        <p:spPr>
+          <a:xfrm>
+            <a:off x="6629400" y="1645920"/>
+            <a:ext cx="4645152" cy="411480"/>
+          </a:xfrm>
+          <a:prstGeom prst="rect">
+            <a:avLst/>
+          </a:prstGeom>
+          <a:noFill/>
+          <a:ln/>
+        </p:spPr>
+        <p:txBody>
+          <a:bodyPr wrap="square" lIns="0" tIns="0" rIns="0" bIns="0" rtlCol="0" anchor="ctr"/>
+          <a:lstStyle/>
+          <a:p>
+            <a:pPr indent="0" marL="0">
+              <a:buNone/>
+            </a:pPr>
+            <a:r>
+              <a:rPr lang="en-US" sz="1700" b="1" dirty="0">
+                <a:solidFill>
+                  <a:srgbClr val="1E2761"/>
+                </a:solidFill>
+                <a:latin typeface="Meiryo" pitchFamily="34" charset="0"/>
+                <a:ea typeface="Meiryo" pitchFamily="34" charset="-122"/>
+                <a:cs typeface="Meiryo" pitchFamily="34" charset="-120"/>
+              </a:rPr>
+              <a:t>月額（ランニング・5人利用の例）</a:t>
+            </a:r>
+            <a:endParaRPr lang="en-US" sz="1700" dirty="0"/>
+          </a:p>
+        </p:txBody>
+      </p:sp>
+      <p:sp>
+        <p:nvSpPr>
+          <p:cNvPr id="21" name="Text 18"/>
+          <p:cNvSpPr/>
+          <p:nvPr/>
+        </p:nvSpPr>
+        <p:spPr>
+          <a:xfrm>
+            <a:off x="6629400" y="2240280"/>
+            <a:ext cx="2450592" cy="365760"/>
+          </a:xfrm>
+          <a:prstGeom prst="rect">
+            <a:avLst/>
+          </a:prstGeom>
+          <a:noFill/>
+          <a:ln/>
+        </p:spPr>
+        <p:txBody>
+          <a:bodyPr wrap="square" lIns="0" tIns="0" rIns="0" bIns="0" rtlCol="0" anchor="ctr"/>
+          <a:lstStyle/>
+          <a:p>
+            <a:pPr indent="0" marL="0">
+              <a:buNone/>
+            </a:pPr>
+            <a:r>
+              <a:rPr lang="en-US" sz="1350" dirty="0">
+                <a:solidFill>
+                  <a:srgbClr val="1C2333"/>
+                </a:solidFill>
+                <a:latin typeface="Meiryo" pitchFamily="34" charset="0"/>
+                <a:ea typeface="Meiryo" pitchFamily="34" charset="-122"/>
+                <a:cs typeface="Meiryo" pitchFamily="34" charset="-120"/>
+              </a:rPr>
+              <a:t>AI利用料（Gemini）</a:t>
+            </a:r>
+            <a:endParaRPr lang="en-US" sz="1350" dirty="0"/>
+          </a:p>
+        </p:txBody>
+      </p:sp>
+      <p:sp>
+        <p:nvSpPr>
+          <p:cNvPr id="22" name="Text 19"/>
+          <p:cNvSpPr/>
+          <p:nvPr/>
+        </p:nvSpPr>
+        <p:spPr>
+          <a:xfrm>
+            <a:off x="6629400" y="2569464"/>
+            <a:ext cx="2450592" cy="320040"/>
+          </a:xfrm>
+          <a:prstGeom prst="rect">
+            <a:avLst/>
+          </a:prstGeom>
+          <a:noFill/>
+          <a:ln/>
+        </p:spPr>
+        <p:txBody>
+          <a:bodyPr wrap="square" lIns="0" tIns="0" rIns="0" bIns="0" rtlCol="0" anchor="ctr"/>
+          <a:lstStyle/>
+          <a:p>
+            <a:pPr indent="0" marL="0">
+              <a:buNone/>
+            </a:pPr>
+            <a:r>
+              <a:rPr lang="en-US" sz="1050" dirty="0">
+                <a:solidFill>
+                  <a:srgbClr val="5A6474"/>
+                </a:solidFill>
+                <a:latin typeface="Meiryo" pitchFamily="34" charset="0"/>
+                <a:ea typeface="Meiryo" pitchFamily="34" charset="-122"/>
+                <a:cs typeface="Meiryo" pitchFamily="34" charset="-120"/>
+              </a:rPr>
+              <a:t>無料枠で開始 → 本番は従量課金の目安</a:t>
+            </a:r>
+            <a:endParaRPr lang="en-US" sz="1050" dirty="0"/>
+          </a:p>
+        </p:txBody>
+      </p:sp>
+      <p:sp>
+        <p:nvSpPr>
+          <p:cNvPr id="23" name="Text 20"/>
+          <p:cNvSpPr/>
+          <p:nvPr/>
+        </p:nvSpPr>
+        <p:spPr>
+          <a:xfrm>
+            <a:off x="8942832" y="2240280"/>
+            <a:ext cx="2331720" cy="384048"/>
+          </a:xfrm>
+          <a:prstGeom prst="rect">
+            <a:avLst/>
+          </a:prstGeom>
+          <a:noFill/>
+          <a:ln/>
+        </p:spPr>
+        <p:txBody>
+          <a:bodyPr wrap="square" lIns="0" tIns="0" rIns="0" bIns="0" rtlCol="0" anchor="ctr"/>
+          <a:lstStyle/>
+          <a:p>
+            <a:pPr algn="r" indent="0" marL="0">
+              <a:buNone/>
+            </a:pPr>
+            <a:r>
+              <a:rPr lang="en-US" sz="1350" dirty="0">
+                <a:solidFill>
+                  <a:srgbClr val="1C2333"/>
+                </a:solidFill>
+                <a:latin typeface="Meiryo" pitchFamily="34" charset="0"/>
+                <a:ea typeface="Meiryo" pitchFamily="34" charset="-122"/>
+                <a:cs typeface="Meiryo" pitchFamily="34" charset="-120"/>
+              </a:rPr>
+              <a:t>0〜2,000円</a:t>
+            </a:r>
+            <a:endParaRPr lang="en-US" sz="1350" dirty="0"/>
+          </a:p>
+        </p:txBody>
+      </p:sp>
+      <p:sp>
+        <p:nvSpPr>
+          <p:cNvPr id="24" name="Text 21"/>
+          <p:cNvSpPr/>
+          <p:nvPr/>
+        </p:nvSpPr>
+        <p:spPr>
+          <a:xfrm>
+            <a:off x="6629400" y="2880360"/>
+            <a:ext cx="2450592" cy="365760"/>
+          </a:xfrm>
+          <a:prstGeom prst="rect">
+            <a:avLst/>
+          </a:prstGeom>
+          <a:noFill/>
+          <a:ln/>
+        </p:spPr>
+        <p:txBody>
+          <a:bodyPr wrap="square" lIns="0" tIns="0" rIns="0" bIns="0" rtlCol="0" anchor="ctr"/>
+          <a:lstStyle/>
+          <a:p>
+            <a:pPr indent="0" marL="0">
+              <a:buNone/>
+            </a:pPr>
+            <a:r>
+              <a:rPr lang="en-US" sz="1350" dirty="0">
+                <a:solidFill>
+                  <a:srgbClr val="1C2333"/>
+                </a:solidFill>
+                <a:latin typeface="Meiryo" pitchFamily="34" charset="0"/>
+                <a:ea typeface="Meiryo" pitchFamily="34" charset="-122"/>
+                <a:cs typeface="Meiryo" pitchFamily="34" charset="-120"/>
+              </a:rPr>
+              <a:t>Notion プラスプラン</a:t>
+            </a:r>
+            <a:endParaRPr lang="en-US" sz="1350" dirty="0"/>
+          </a:p>
+        </p:txBody>
+      </p:sp>
+      <p:sp>
+        <p:nvSpPr>
+          <p:cNvPr id="25" name="Text 22"/>
+          <p:cNvSpPr/>
+          <p:nvPr/>
+        </p:nvSpPr>
+        <p:spPr>
+          <a:xfrm>
+            <a:off x="6629400" y="3209544"/>
+            <a:ext cx="2450592" cy="320040"/>
+          </a:xfrm>
+          <a:prstGeom prst="rect">
+            <a:avLst/>
+          </a:prstGeom>
+          <a:noFill/>
+          <a:ln/>
+        </p:spPr>
+        <p:txBody>
+          <a:bodyPr wrap="square" lIns="0" tIns="0" rIns="0" bIns="0" rtlCol="0" anchor="ctr"/>
+          <a:lstStyle/>
+          <a:p>
+            <a:pPr indent="0" marL="0">
+              <a:buNone/>
+            </a:pPr>
+            <a:r>
+              <a:rPr lang="en-US" sz="1050" dirty="0">
+                <a:solidFill>
+                  <a:srgbClr val="5A6474"/>
+                </a:solidFill>
+                <a:latin typeface="Meiryo" pitchFamily="34" charset="0"/>
+                <a:ea typeface="Meiryo" pitchFamily="34" charset="-122"/>
+                <a:cs typeface="Meiryo" pitchFamily="34" charset="-120"/>
+              </a:rPr>
+              <a:t>1,650円/人 × 5人</a:t>
+            </a:r>
+            <a:endParaRPr lang="en-US" sz="1050" dirty="0"/>
+          </a:p>
+        </p:txBody>
+      </p:sp>
+      <p:sp>
+        <p:nvSpPr>
+          <p:cNvPr id="26" name="Text 23"/>
+          <p:cNvSpPr/>
+          <p:nvPr/>
+        </p:nvSpPr>
+        <p:spPr>
+          <a:xfrm>
+            <a:off x="8942832" y="2880360"/>
+            <a:ext cx="2331720" cy="384048"/>
+          </a:xfrm>
+          <a:prstGeom prst="rect">
+            <a:avLst/>
+          </a:prstGeom>
+          <a:noFill/>
+          <a:ln/>
+        </p:spPr>
+        <p:txBody>
+          <a:bodyPr wrap="square" lIns="0" tIns="0" rIns="0" bIns="0" rtlCol="0" anchor="ctr"/>
+          <a:lstStyle/>
+          <a:p>
+            <a:pPr algn="r" indent="0" marL="0">
+              <a:buNone/>
+            </a:pPr>
+            <a:r>
+              <a:rPr lang="en-US" sz="1350" dirty="0">
+                <a:solidFill>
+                  <a:srgbClr val="1C2333"/>
+                </a:solidFill>
+                <a:latin typeface="Meiryo" pitchFamily="34" charset="0"/>
+                <a:ea typeface="Meiryo" pitchFamily="34" charset="-122"/>
+                <a:cs typeface="Meiryo" pitchFamily="34" charset="-120"/>
+              </a:rPr>
+              <a:t>8,250円</a:t>
+            </a:r>
+            <a:endParaRPr lang="en-US" sz="1350" dirty="0"/>
+          </a:p>
+        </p:txBody>
+      </p:sp>
+      <p:sp>
+        <p:nvSpPr>
+          <p:cNvPr id="27" name="Text 24"/>
+          <p:cNvSpPr/>
+          <p:nvPr/>
+        </p:nvSpPr>
+        <p:spPr>
+          <a:xfrm>
+            <a:off x="6629400" y="3520440"/>
+            <a:ext cx="2450592" cy="365760"/>
+          </a:xfrm>
+          <a:prstGeom prst="rect">
+            <a:avLst/>
+          </a:prstGeom>
+          <a:noFill/>
+          <a:ln/>
+        </p:spPr>
+        <p:txBody>
+          <a:bodyPr wrap="square" lIns="0" tIns="0" rIns="0" bIns="0" rtlCol="0" anchor="ctr"/>
+          <a:lstStyle/>
+          <a:p>
+            <a:pPr indent="0" marL="0">
+              <a:buNone/>
+            </a:pPr>
+            <a:r>
+              <a:rPr lang="en-US" sz="1350" dirty="0">
+                <a:solidFill>
+                  <a:srgbClr val="1C2333"/>
+                </a:solidFill>
+                <a:latin typeface="Meiryo" pitchFamily="34" charset="0"/>
+                <a:ea typeface="Meiryo" pitchFamily="34" charset="-122"/>
+                <a:cs typeface="Meiryo" pitchFamily="34" charset="-120"/>
+              </a:rPr>
+              <a:t>Plaud 文字起こし追加枠</a:t>
+            </a:r>
+            <a:endParaRPr lang="en-US" sz="1350" dirty="0"/>
+          </a:p>
+        </p:txBody>
+      </p:sp>
+      <p:sp>
+        <p:nvSpPr>
+          <p:cNvPr id="28" name="Text 25"/>
+          <p:cNvSpPr/>
+          <p:nvPr/>
+        </p:nvSpPr>
+        <p:spPr>
+          <a:xfrm>
+            <a:off x="6629400" y="3849624"/>
+            <a:ext cx="2450592" cy="320040"/>
+          </a:xfrm>
+          <a:prstGeom prst="rect">
+            <a:avLst/>
+          </a:prstGeom>
+          <a:noFill/>
+          <a:ln/>
+        </p:spPr>
+        <p:txBody>
+          <a:bodyPr wrap="square" lIns="0" tIns="0" rIns="0" bIns="0" rtlCol="0" anchor="ctr"/>
+          <a:lstStyle/>
+          <a:p>
+            <a:pPr indent="0" marL="0">
+              <a:buNone/>
+            </a:pPr>
+            <a:r>
+              <a:rPr lang="en-US" sz="1050" dirty="0">
+                <a:solidFill>
+                  <a:srgbClr val="5A6474"/>
+                </a:solidFill>
+                <a:latin typeface="Meiryo" pitchFamily="34" charset="0"/>
+                <a:ea typeface="Meiryo" pitchFamily="34" charset="-122"/>
+                <a:cs typeface="Meiryo" pitchFamily="34" charset="-120"/>
+              </a:rPr>
+              <a:t>月300分超過時のみ有料プラン</a:t>
+            </a:r>
+            <a:endParaRPr lang="en-US" sz="1050" dirty="0"/>
+          </a:p>
+        </p:txBody>
+      </p:sp>
+      <p:sp>
+        <p:nvSpPr>
+          <p:cNvPr id="29" name="Text 26"/>
+          <p:cNvSpPr/>
+          <p:nvPr/>
+        </p:nvSpPr>
+        <p:spPr>
+          <a:xfrm>
+            <a:off x="8942832" y="3520440"/>
+            <a:ext cx="2331720" cy="384048"/>
+          </a:xfrm>
+          <a:prstGeom prst="rect">
+            <a:avLst/>
+          </a:prstGeom>
+          <a:noFill/>
+          <a:ln/>
+        </p:spPr>
+        <p:txBody>
+          <a:bodyPr wrap="square" lIns="0" tIns="0" rIns="0" bIns="0" rtlCol="0" anchor="ctr"/>
+          <a:lstStyle/>
+          <a:p>
+            <a:pPr algn="r" indent="0" marL="0">
+              <a:buNone/>
+            </a:pPr>
+            <a:r>
+              <a:rPr lang="en-US" sz="1350" dirty="0">
+                <a:solidFill>
+                  <a:srgbClr val="1C2333"/>
+                </a:solidFill>
+                <a:latin typeface="Meiryo" pitchFamily="34" charset="0"/>
+                <a:ea typeface="Meiryo" pitchFamily="34" charset="-122"/>
+                <a:cs typeface="Meiryo" pitchFamily="34" charset="-120"/>
+              </a:rPr>
+              <a:t>0〜2,000円</a:t>
+            </a:r>
+            <a:endParaRPr lang="en-US" sz="1350" dirty="0"/>
+          </a:p>
+        </p:txBody>
+      </p:sp>
+      <p:sp>
+        <p:nvSpPr>
+          <p:cNvPr id="30" name="Text 27"/>
+          <p:cNvSpPr/>
+          <p:nvPr/>
+        </p:nvSpPr>
+        <p:spPr>
+          <a:xfrm>
+            <a:off x="6629400" y="4160520"/>
+            <a:ext cx="2450592" cy="365760"/>
+          </a:xfrm>
+          <a:prstGeom prst="rect">
+            <a:avLst/>
+          </a:prstGeom>
+          <a:noFill/>
+          <a:ln/>
+        </p:spPr>
+        <p:txBody>
+          <a:bodyPr wrap="square" lIns="0" tIns="0" rIns="0" bIns="0" rtlCol="0" anchor="ctr"/>
+          <a:lstStyle/>
+          <a:p>
+            <a:pPr indent="0" marL="0">
+              <a:buNone/>
+            </a:pPr>
+            <a:r>
+              <a:rPr lang="en-US" sz="1350" dirty="0">
+                <a:solidFill>
+                  <a:srgbClr val="1C2333"/>
+                </a:solidFill>
+                <a:latin typeface="Meiryo" pitchFamily="34" charset="0"/>
+                <a:ea typeface="Meiryo" pitchFamily="34" charset="-122"/>
+                <a:cs typeface="Meiryo" pitchFamily="34" charset="-120"/>
+              </a:rPr>
+              <a:t>Google Workspace / Slack</a:t>
+            </a:r>
+            <a:endParaRPr lang="en-US" sz="1350" dirty="0"/>
+          </a:p>
+        </p:txBody>
+      </p:sp>
+      <p:sp>
+        <p:nvSpPr>
+          <p:cNvPr id="31" name="Text 28"/>
+          <p:cNvSpPr/>
+          <p:nvPr/>
+        </p:nvSpPr>
+        <p:spPr>
+          <a:xfrm>
+            <a:off x="6629400" y="4489704"/>
+            <a:ext cx="2450592" cy="320040"/>
+          </a:xfrm>
+          <a:prstGeom prst="rect">
+            <a:avLst/>
+          </a:prstGeom>
+          <a:noFill/>
+          <a:ln/>
+        </p:spPr>
+        <p:txBody>
+          <a:bodyPr wrap="square" lIns="0" tIns="0" rIns="0" bIns="0" rtlCol="0" anchor="ctr"/>
+          <a:lstStyle/>
+          <a:p>
+            <a:pPr indent="0" marL="0">
+              <a:buNone/>
+            </a:pPr>
+            <a:r>
+              <a:rPr lang="en-US" sz="1050" dirty="0">
+                <a:solidFill>
+                  <a:srgbClr val="5A6474"/>
+                </a:solidFill>
+                <a:latin typeface="Meiryo" pitchFamily="34" charset="0"/>
+                <a:ea typeface="Meiryo" pitchFamily="34" charset="-122"/>
+                <a:cs typeface="Meiryo" pitchFamily="34" charset="-120"/>
+              </a:rPr>
+              <a:t>既存契約の範囲内で追加費用なし</a:t>
+            </a:r>
+            <a:endParaRPr lang="en-US" sz="1050" dirty="0"/>
+          </a:p>
+        </p:txBody>
+      </p:sp>
+      <p:sp>
+        <p:nvSpPr>
+          <p:cNvPr id="32" name="Text 29"/>
+          <p:cNvSpPr/>
+          <p:nvPr/>
+        </p:nvSpPr>
+        <p:spPr>
+          <a:xfrm>
+            <a:off x="8942832" y="4160520"/>
+            <a:ext cx="2331720" cy="384048"/>
+          </a:xfrm>
+          <a:prstGeom prst="rect">
+            <a:avLst/>
+          </a:prstGeom>
+          <a:noFill/>
+          <a:ln/>
+        </p:spPr>
+        <p:txBody>
+          <a:bodyPr wrap="square" lIns="0" tIns="0" rIns="0" bIns="0" rtlCol="0" anchor="ctr"/>
+          <a:lstStyle/>
+          <a:p>
+            <a:pPr algn="r" indent="0" marL="0">
+              <a:buNone/>
+            </a:pPr>
+            <a:r>
+              <a:rPr lang="en-US" sz="1350" dirty="0">
+                <a:solidFill>
+                  <a:srgbClr val="1C2333"/>
+                </a:solidFill>
+                <a:latin typeface="Meiryo" pitchFamily="34" charset="0"/>
+                <a:ea typeface="Meiryo" pitchFamily="34" charset="-122"/>
+                <a:cs typeface="Meiryo" pitchFamily="34" charset="-120"/>
+              </a:rPr>
+              <a:t>0円</a:t>
+            </a:r>
+            <a:endParaRPr lang="en-US" sz="1350" dirty="0"/>
+          </a:p>
+        </p:txBody>
+      </p:sp>
+      <p:sp>
+        <p:nvSpPr>
+          <p:cNvPr id="33" name="Shape 30"/>
+          <p:cNvSpPr/>
+          <p:nvPr/>
+        </p:nvSpPr>
+        <p:spPr>
+          <a:xfrm>
+            <a:off x="6629400" y="4828032"/>
+            <a:ext cx="4645152" cy="18288"/>
+          </a:xfrm>
+          <a:prstGeom prst="rect">
             <a:avLst/>
           </a:prstGeom>
           <a:solidFill>
@@ -7192,56 +8610,146 @@
           <a:ln/>
         </p:spPr>
       </p:sp>
-      <p:pic>
-        <p:nvPicPr>
-          <p:cNvPr id="16" name="Image 2" descr="preencoded.png">    </p:cNvPr>
-          <p:cNvPicPr>
-            <a:picLocks noChangeAspect="1"/>
-          </p:cNvPicPr>
-          <p:nvPr/>
-        </p:nvPicPr>
-        <p:blipFill>
-          <a:blip r:embed="rId3"/>
-          <a:stretch>
-            <a:fillRect/>
-          </a:stretch>
-        </p:blipFill>
-        <p:spPr>
-          <a:xfrm>
-            <a:off x="8629650" y="2503170"/>
-            <a:ext cx="342900" cy="342900"/>
-          </a:xfrm>
-          <a:prstGeom prst="rect">
-            <a:avLst/>
-          </a:prstGeom>
-        </p:spPr>
-      </p:pic>
-      <p:sp>
-        <p:nvSpPr>
-          <p:cNvPr id="17" name="Text 12"/>
-          <p:cNvSpPr/>
-          <p:nvPr/>
-        </p:nvSpPr>
-        <p:spPr>
-          <a:xfrm>
-            <a:off x="8458200" y="3200400"/>
-            <a:ext cx="2743200" cy="685800"/>
-          </a:xfrm>
-          <a:prstGeom prst="rect">
-            <a:avLst/>
-          </a:prstGeom>
-          <a:noFill/>
-          <a:ln/>
-        </p:spPr>
-        <p:txBody>
-          <a:bodyPr wrap="square" lIns="0" tIns="0" rIns="0" bIns="0" rtlCol="0" anchor="ctr"/>
-          <a:lstStyle/>
-          <a:p>
-            <a:pPr indent="0" marL="0">
-              <a:buNone/>
-            </a:pPr>
-            <a:r>
-              <a:rPr lang="en-US" sz="1700" b="1" dirty="0">
+      <p:sp>
+        <p:nvSpPr>
+          <p:cNvPr id="34" name="Text 31"/>
+          <p:cNvSpPr/>
+          <p:nvPr/>
+        </p:nvSpPr>
+        <p:spPr>
+          <a:xfrm>
+            <a:off x="6629400" y="4956048"/>
+            <a:ext cx="2450592" cy="365760"/>
+          </a:xfrm>
+          <a:prstGeom prst="rect">
+            <a:avLst/>
+          </a:prstGeom>
+          <a:noFill/>
+          <a:ln/>
+        </p:spPr>
+        <p:txBody>
+          <a:bodyPr wrap="square" lIns="0" tIns="0" rIns="0" bIns="0" rtlCol="0" anchor="ctr"/>
+          <a:lstStyle/>
+          <a:p>
+            <a:pPr indent="0" marL="0">
+              <a:buNone/>
+            </a:pPr>
+            <a:r>
+              <a:rPr lang="en-US" sz="1350" b="1" dirty="0">
+                <a:solidFill>
+                  <a:srgbClr val="1C2333"/>
+                </a:solidFill>
+                <a:latin typeface="Meiryo" pitchFamily="34" charset="0"/>
+                <a:ea typeface="Meiryo" pitchFamily="34" charset="-122"/>
+                <a:cs typeface="Meiryo" pitchFamily="34" charset="-120"/>
+              </a:rPr>
+              <a:t>月額 合計</a:t>
+            </a:r>
+            <a:endParaRPr lang="en-US" sz="1350" dirty="0"/>
+          </a:p>
+        </p:txBody>
+      </p:sp>
+      <p:sp>
+        <p:nvSpPr>
+          <p:cNvPr id="35" name="Text 32"/>
+          <p:cNvSpPr/>
+          <p:nvPr/>
+        </p:nvSpPr>
+        <p:spPr>
+          <a:xfrm>
+            <a:off x="8942832" y="4956048"/>
+            <a:ext cx="2331720" cy="384048"/>
+          </a:xfrm>
+          <a:prstGeom prst="rect">
+            <a:avLst/>
+          </a:prstGeom>
+          <a:noFill/>
+          <a:ln/>
+        </p:spPr>
+        <p:txBody>
+          <a:bodyPr wrap="square" lIns="0" tIns="0" rIns="0" bIns="0" rtlCol="0" anchor="ctr"/>
+          <a:lstStyle/>
+          <a:p>
+            <a:pPr algn="r" indent="0" marL="0">
+              <a:buNone/>
+            </a:pPr>
+            <a:r>
+              <a:rPr lang="en-US" sz="1350" b="1" dirty="0">
+                <a:solidFill>
+                  <a:srgbClr val="1E2761"/>
+                </a:solidFill>
+                <a:latin typeface="Meiryo" pitchFamily="34" charset="0"/>
+                <a:ea typeface="Meiryo" pitchFamily="34" charset="-122"/>
+                <a:cs typeface="Meiryo" pitchFamily="34" charset="-120"/>
+              </a:rPr>
+              <a:t>約8,000〜12,000円</a:t>
+            </a:r>
+            <a:endParaRPr lang="en-US" sz="1350" dirty="0"/>
+          </a:p>
+        </p:txBody>
+      </p:sp>
+      <p:sp>
+        <p:nvSpPr>
+          <p:cNvPr id="36" name="Shape 33"/>
+          <p:cNvSpPr/>
+          <p:nvPr/>
+        </p:nvSpPr>
+        <p:spPr>
+          <a:xfrm>
+            <a:off x="640080" y="5669280"/>
+            <a:ext cx="10908792" cy="685800"/>
+          </a:xfrm>
+          <a:prstGeom prst="roundRect">
+            <a:avLst>
+              <a:gd name="adj" fmla="val 16000"/>
+            </a:avLst>
+          </a:prstGeom>
+          <a:solidFill>
+            <a:srgbClr val="1E2761"/>
+          </a:solidFill>
+          <a:ln/>
+        </p:spPr>
+      </p:sp>
+      <p:sp>
+        <p:nvSpPr>
+          <p:cNvPr id="37" name="Text 34"/>
+          <p:cNvSpPr/>
+          <p:nvPr/>
+        </p:nvSpPr>
+        <p:spPr>
+          <a:xfrm>
+            <a:off x="914400" y="5669280"/>
+            <a:ext cx="10332720" cy="685800"/>
+          </a:xfrm>
+          <a:prstGeom prst="rect">
+            <a:avLst/>
+          </a:prstGeom>
+          <a:noFill/>
+          <a:ln/>
+        </p:spPr>
+        <p:txBody>
+          <a:bodyPr wrap="square" lIns="0" tIns="0" rIns="0" bIns="0" rtlCol="0" anchor="ctr"/>
+          <a:lstStyle/>
+          <a:p>
+            <a:pPr indent="0" marL="0">
+              <a:buNone/>
+            </a:pPr>
+            <a:r>
+              <a:rPr lang="en-US" sz="1400" b="1" dirty="0">
+                <a:solidFill>
+                  <a:srgbClr val="E8A33D"/>
+                </a:solidFill>
+                <a:latin typeface="Meiryo" pitchFamily="34" charset="0"/>
+                <a:ea typeface="Meiryo" pitchFamily="34" charset="-122"/>
+                <a:cs typeface="Meiryo" pitchFamily="34" charset="-120"/>
+              </a:rPr>
+              <a:t>年間ランニング 約10〜15万円</a:t>
+            </a:r>
+            <a:pPr indent="0" marL="0">
+              <a:buNone/>
+            </a:pPr>
+            <a:r>
+              <a:rPr lang="en-US" sz="1400" dirty="0">
                 <a:solidFill>
                   <a:srgbClr val="FFFFFF"/>
                 </a:solidFill>
@@ -7249,101 +8757,48 @@
                 <a:ea typeface="Meiryo" pitchFamily="34" charset="-122"/>
                 <a:cs typeface="Meiryo" pitchFamily="34" charset="-120"/>
               </a:rPr>
-              <a:t>社長の時間が戻ってくる</a:t>
-            </a:r>
-            <a:endParaRPr lang="en-US" sz="1700" dirty="0"/>
-          </a:p>
-        </p:txBody>
-      </p:sp>
-      <p:sp>
-        <p:nvSpPr>
-          <p:cNvPr id="18" name="Text 13"/>
-          <p:cNvSpPr/>
-          <p:nvPr/>
-        </p:nvSpPr>
-        <p:spPr>
-          <a:xfrm>
-            <a:off x="8458200" y="3794760"/>
-            <a:ext cx="2743200" cy="777240"/>
-          </a:xfrm>
-          <a:prstGeom prst="rect">
-            <a:avLst/>
-          </a:prstGeom>
-          <a:noFill/>
-          <a:ln/>
-        </p:spPr>
-        <p:txBody>
-          <a:bodyPr wrap="square" lIns="0" tIns="0" rIns="0" bIns="0" rtlCol="0" anchor="ctr"/>
-          <a:lstStyle/>
-          <a:p>
-            <a:pPr indent="0" marL="0">
-              <a:buNone/>
-            </a:pPr>
-            <a:r>
-              <a:rPr lang="en-US" sz="1150" dirty="0">
-                <a:solidFill>
-                  <a:srgbClr val="CADCFC"/>
-                </a:solidFill>
-                <a:latin typeface="Meiryo" pitchFamily="34" charset="0"/>
-                <a:ea typeface="Meiryo" pitchFamily="34" charset="-122"/>
-                <a:cs typeface="Meiryo" pitchFamily="34" charset="-120"/>
-              </a:rPr>
-              <a:t>一次評価・壁打ち・情報整理をAIが肩代わり。社長は本質的な判断に集中。</a:t>
-            </a:r>
-            <a:endParaRPr lang="en-US" sz="1150" dirty="0"/>
-          </a:p>
-        </p:txBody>
-      </p:sp>
-      <p:sp>
-        <p:nvSpPr>
-          <p:cNvPr id="19" name="Text 14"/>
-          <p:cNvSpPr/>
-          <p:nvPr/>
-        </p:nvSpPr>
-        <p:spPr>
-          <a:xfrm>
-            <a:off x="822960" y="5212080"/>
-            <a:ext cx="10881360" cy="822960"/>
-          </a:xfrm>
-          <a:prstGeom prst="rect">
-            <a:avLst/>
-          </a:prstGeom>
-          <a:noFill/>
-          <a:ln/>
-        </p:spPr>
-        <p:txBody>
-          <a:bodyPr wrap="square" lIns="0" tIns="0" rIns="0" bIns="0" rtlCol="0" anchor="ctr"/>
-          <a:lstStyle/>
-          <a:p>
-            <a:pPr indent="0" marL="0">
-              <a:buNone/>
-            </a:pPr>
-            <a:r>
-              <a:rPr lang="en-US" sz="1400" b="1" dirty="0">
-                <a:solidFill>
-                  <a:srgbClr val="E8A33D"/>
-                </a:solidFill>
-                <a:latin typeface="Meiryo" pitchFamily="34" charset="0"/>
-                <a:ea typeface="Meiryo" pitchFamily="34" charset="-122"/>
-                <a:cs typeface="Meiryo" pitchFamily="34" charset="-120"/>
-              </a:rPr>
-              <a:t>次のアクション　</a:t>
-            </a:r>
-            <a:pPr indent="0" marL="0">
-              <a:buNone/>
-            </a:pPr>
-            <a:r>
-              <a:rPr lang="en-US" sz="1400" dirty="0">
-                <a:solidFill>
-                  <a:srgbClr val="FFFFFF"/>
-                </a:solidFill>
-                <a:latin typeface="Meiryo" pitchFamily="34" charset="0"/>
-                <a:ea typeface="Meiryo" pitchFamily="34" charset="-122"/>
-                <a:cs typeface="Meiryo" pitchFamily="34" charset="-120"/>
-              </a:rPr>
-              <a:t>① ヒアリング日程の確定（60〜90分）　② 導入日に実データで体験　③ 1〜2週間の試用で精度を評価</a:t>
+              <a:t>（5人・標準構成）。お試し期間は無料枠＋少人数で 月0〜3,300円 から開始できます。</a:t>
             </a:r>
             <a:endParaRPr lang="en-US" sz="1400" dirty="0"/>
+          </a:p>
+        </p:txBody>
+      </p:sp>
+      <p:sp>
+        <p:nvSpPr>
+          <p:cNvPr id="38" name="Text 35"/>
+          <p:cNvSpPr/>
+          <p:nvPr/>
+        </p:nvSpPr>
+        <p:spPr>
+          <a:xfrm>
+            <a:off x="640080" y="6419088"/>
+            <a:ext cx="10881360" cy="320040"/>
+          </a:xfrm>
+          <a:prstGeom prst="rect">
+            <a:avLst/>
+          </a:prstGeom>
+          <a:noFill/>
+          <a:ln/>
+        </p:spPr>
+        <p:txBody>
+          <a:bodyPr wrap="square" lIns="0" tIns="0" rIns="0" bIns="0" rtlCol="0" anchor="ctr"/>
+          <a:lstStyle/>
+          <a:p>
+            <a:pPr indent="0" marL="0">
+              <a:buNone/>
+            </a:pPr>
+            <a:r>
+              <a:rPr lang="en-US" sz="950" dirty="0">
+                <a:solidFill>
+                  <a:srgbClr val="5A6474"/>
+                </a:solidFill>
+                <a:latin typeface="Meiryo" pitchFamily="34" charset="0"/>
+                <a:ea typeface="Meiryo" pitchFamily="34" charset="-122"/>
+                <a:cs typeface="Meiryo" pitchFamily="34" charset="-120"/>
+              </a:rPr>
+              <a:t>※ 2026年時点の公開価格に基づく目安。AI利用料は使用量により変動（本文書の試算は日次バッチ＋1日20回程度の利用を想定）。</a:t>
+            </a:r>
+            <a:endParaRPr lang="en-US" sz="950" dirty="0"/>
           </a:p>
         </p:txBody>
       </p:sp>
